--- a/44_心理学/24_浥尘伙伴社团原创：浥尘智慧家长课堂/智慧家长课堂.pptx
+++ b/44_心理学/24_浥尘伙伴社团原创：浥尘智慧家长课堂/智慧家长课堂.pptx
@@ -10,29 +10,32 @@
     <p:sldId id="261" r:id="rId4"/>
     <p:sldId id="264" r:id="rId5"/>
     <p:sldId id="262" r:id="rId6"/>
-    <p:sldId id="258" r:id="rId7"/>
-    <p:sldId id="265" r:id="rId8"/>
-    <p:sldId id="266" r:id="rId9"/>
-    <p:sldId id="267" r:id="rId10"/>
-    <p:sldId id="268" r:id="rId11"/>
-    <p:sldId id="269" r:id="rId12"/>
-    <p:sldId id="270" r:id="rId13"/>
-    <p:sldId id="259" r:id="rId14"/>
-    <p:sldId id="271" r:id="rId15"/>
-    <p:sldId id="272" r:id="rId16"/>
-    <p:sldId id="273" r:id="rId17"/>
-    <p:sldId id="274" r:id="rId18"/>
-    <p:sldId id="275" r:id="rId19"/>
-    <p:sldId id="276" r:id="rId20"/>
-    <p:sldId id="277" r:id="rId21"/>
-    <p:sldId id="260" r:id="rId22"/>
+    <p:sldId id="269" r:id="rId7"/>
+    <p:sldId id="288" r:id="rId8"/>
+    <p:sldId id="258" r:id="rId9"/>
+    <p:sldId id="265" r:id="rId10"/>
+    <p:sldId id="266" r:id="rId11"/>
+    <p:sldId id="267" r:id="rId12"/>
+    <p:sldId id="268" r:id="rId13"/>
+    <p:sldId id="285" r:id="rId14"/>
+    <p:sldId id="270" r:id="rId15"/>
+    <p:sldId id="259" r:id="rId16"/>
+    <p:sldId id="271" r:id="rId17"/>
+    <p:sldId id="272" r:id="rId18"/>
+    <p:sldId id="273" r:id="rId19"/>
+    <p:sldId id="274" r:id="rId20"/>
+    <p:sldId id="260" r:id="rId21"/>
+    <p:sldId id="289" r:id="rId22"/>
     <p:sldId id="278" r:id="rId23"/>
-    <p:sldId id="279" r:id="rId24"/>
-    <p:sldId id="280" r:id="rId25"/>
-    <p:sldId id="281" r:id="rId26"/>
-    <p:sldId id="282" r:id="rId27"/>
-    <p:sldId id="283" r:id="rId28"/>
-    <p:sldId id="284" r:id="rId29"/>
+    <p:sldId id="286" r:id="rId24"/>
+    <p:sldId id="287" r:id="rId25"/>
+    <p:sldId id="291" r:id="rId26"/>
+    <p:sldId id="290" r:id="rId27"/>
+    <p:sldId id="279" r:id="rId28"/>
+    <p:sldId id="280" r:id="rId29"/>
+    <p:sldId id="281" r:id="rId30"/>
+    <p:sldId id="282" r:id="rId31"/>
+    <p:sldId id="292" r:id="rId32"/>
   </p:sldIdLst>
   <p:sldSz cx="12192000" cy="6858000"/>
   <p:notesSz cx="6858000" cy="9144000"/>
@@ -131,6 +134,11 @@
       </a:defRPr>
     </a:lvl9pPr>
   </p:defaultTextStyle>
+  <p:extLst>
+    <p:ext uri="{EFAFB233-063F-42B5-8137-9DF3F51BA10A}">
+      <p15:sldGuideLst xmlns:p15="http://schemas.microsoft.com/office/powerpoint/2012/main"/>
+    </p:ext>
+  </p:extLst>
 </p:presentation>
 </file>
 
@@ -415,7 +423,7 @@
           <a:p>
             <a:fld id="{E80C50CD-E178-4744-9B35-B2F624D6C5E9}" type="datetimeFigureOut">
               <a:rPr lang="en-US" smtClean="0"/>
-              <a:t>9/26/2025</a:t>
+              <a:t>11/3/2025</a:t>
             </a:fld>
             <a:endParaRPr lang="en-US"/>
           </a:p>
@@ -613,7 +621,7 @@
           <a:p>
             <a:fld id="{E80C50CD-E178-4744-9B35-B2F624D6C5E9}" type="datetimeFigureOut">
               <a:rPr lang="en-US" smtClean="0"/>
-              <a:t>9/26/2025</a:t>
+              <a:t>11/3/2025</a:t>
             </a:fld>
             <a:endParaRPr lang="en-US"/>
           </a:p>
@@ -821,7 +829,7 @@
           <a:p>
             <a:fld id="{E80C50CD-E178-4744-9B35-B2F624D6C5E9}" type="datetimeFigureOut">
               <a:rPr lang="en-US" smtClean="0"/>
-              <a:t>9/26/2025</a:t>
+              <a:t>11/3/2025</a:t>
             </a:fld>
             <a:endParaRPr lang="en-US"/>
           </a:p>
@@ -1071,7 +1079,7 @@
           <a:p>
             <a:fld id="{E80C50CD-E178-4744-9B35-B2F624D6C5E9}" type="datetimeFigureOut">
               <a:rPr lang="en-US" smtClean="0"/>
-              <a:t>9/26/2025</a:t>
+              <a:t>11/3/2025</a:t>
             </a:fld>
             <a:endParaRPr lang="en-US"/>
           </a:p>
@@ -1350,7 +1358,7 @@
           <a:p>
             <a:fld id="{E80C50CD-E178-4744-9B35-B2F624D6C5E9}" type="datetimeFigureOut">
               <a:rPr lang="en-US" smtClean="0"/>
-              <a:t>9/26/2025</a:t>
+              <a:t>11/3/2025</a:t>
             </a:fld>
             <a:endParaRPr lang="en-US"/>
           </a:p>
@@ -1667,7 +1675,7 @@
           <a:p>
             <a:fld id="{E80C50CD-E178-4744-9B35-B2F624D6C5E9}" type="datetimeFigureOut">
               <a:rPr lang="en-US" smtClean="0"/>
-              <a:t>9/26/2025</a:t>
+              <a:t>11/3/2025</a:t>
             </a:fld>
             <a:endParaRPr lang="en-US"/>
           </a:p>
@@ -2083,7 +2091,7 @@
           <a:p>
             <a:fld id="{E80C50CD-E178-4744-9B35-B2F624D6C5E9}" type="datetimeFigureOut">
               <a:rPr lang="en-US" smtClean="0"/>
-              <a:t>9/26/2025</a:t>
+              <a:t>11/3/2025</a:t>
             </a:fld>
             <a:endParaRPr lang="en-US"/>
           </a:p>
@@ -2224,7 +2232,7 @@
           <a:p>
             <a:fld id="{E80C50CD-E178-4744-9B35-B2F624D6C5E9}" type="datetimeFigureOut">
               <a:rPr lang="en-US" smtClean="0"/>
-              <a:t>9/26/2025</a:t>
+              <a:t>11/3/2025</a:t>
             </a:fld>
             <a:endParaRPr lang="en-US"/>
           </a:p>
@@ -2337,7 +2345,7 @@
           <a:p>
             <a:fld id="{E80C50CD-E178-4744-9B35-B2F624D6C5E9}" type="datetimeFigureOut">
               <a:rPr lang="en-US" smtClean="0"/>
-              <a:t>9/26/2025</a:t>
+              <a:t>11/3/2025</a:t>
             </a:fld>
             <a:endParaRPr lang="en-US"/>
           </a:p>
@@ -2654,7 +2662,7 @@
           <a:p>
             <a:fld id="{E80C50CD-E178-4744-9B35-B2F624D6C5E9}" type="datetimeFigureOut">
               <a:rPr lang="en-US" smtClean="0"/>
-              <a:t>9/26/2025</a:t>
+              <a:t>11/3/2025</a:t>
             </a:fld>
             <a:endParaRPr lang="en-US"/>
           </a:p>
@@ -2946,7 +2954,7 @@
           <a:p>
             <a:fld id="{E80C50CD-E178-4744-9B35-B2F624D6C5E9}" type="datetimeFigureOut">
               <a:rPr lang="en-US" smtClean="0"/>
-              <a:t>9/26/2025</a:t>
+              <a:t>11/3/2025</a:t>
             </a:fld>
             <a:endParaRPr lang="en-US"/>
           </a:p>
@@ -3182,7 +3190,7 @@
             <a:fld id="{E80C50CD-E178-4744-9B35-B2F624D6C5E9}" type="datetimeFigureOut">
               <a:rPr lang="en-US" smtClean="0"/>
               <a:pPr/>
-              <a:t>9/26/2025</a:t>
+              <a:t>11/3/2025</a:t>
             </a:fld>
             <a:endParaRPr lang="en-US"/>
           </a:p>
@@ -3964,12 +3972,12 @@
         </p:spPr>
         <p:txBody>
           <a:bodyPr anchor="ctr">
-            <a:normAutofit/>
+            <a:noAutofit/>
           </a:bodyPr>
           <a:lstStyle/>
           <a:p>
             <a:r>
-              <a:rPr lang="zh-CN" altLang="en-US" sz="4400" dirty="0"/>
+              <a:rPr lang="zh-CN" altLang="en-US" sz="5400" dirty="0"/>
               <a:t>智慧家长课堂</a:t>
             </a:r>
           </a:p>
@@ -4025,6 +4033,364 @@
 </file>
 
 <file path=ppt/slides/slide10.xml><?xml version="1.0" encoding="utf-8"?>
+<p:sld xmlns:a="http://schemas.openxmlformats.org/drawingml/2006/main" xmlns:r="http://schemas.openxmlformats.org/officeDocument/2006/relationships" xmlns:p="http://schemas.openxmlformats.org/presentationml/2006/main">
+  <p:cSld>
+    <p:spTree>
+      <p:nvGrpSpPr>
+        <p:cNvPr id="1" name="">
+          <a:extLst>
+            <a:ext uri="{FF2B5EF4-FFF2-40B4-BE49-F238E27FC236}">
+              <a16:creationId xmlns:a16="http://schemas.microsoft.com/office/drawing/2014/main" id="{3032A584-2B92-7ABF-B79F-F210BB8CD9BE}"/>
+            </a:ext>
+          </a:extLst>
+        </p:cNvPr>
+        <p:cNvGrpSpPr/>
+        <p:nvPr/>
+      </p:nvGrpSpPr>
+      <p:grpSpPr>
+        <a:xfrm>
+          <a:off x="0" y="0"/>
+          <a:ext cx="0" cy="0"/>
+          <a:chOff x="0" y="0"/>
+          <a:chExt cx="0" cy="0"/>
+        </a:xfrm>
+      </p:grpSpPr>
+      <p:sp>
+        <p:nvSpPr>
+          <p:cNvPr id="2" name="标题 1">
+            <a:extLst>
+              <a:ext uri="{FF2B5EF4-FFF2-40B4-BE49-F238E27FC236}">
+                <a16:creationId xmlns:a16="http://schemas.microsoft.com/office/drawing/2014/main" id="{6C2CA7BE-D398-D7F6-98A7-4A128F4ECE9C}"/>
+              </a:ext>
+            </a:extLst>
+          </p:cNvPr>
+          <p:cNvSpPr>
+            <a:spLocks noGrp="1"/>
+          </p:cNvSpPr>
+          <p:nvPr>
+            <p:ph type="title"/>
+          </p:nvPr>
+        </p:nvSpPr>
+        <p:spPr/>
+        <p:txBody>
+          <a:bodyPr/>
+          <a:lstStyle/>
+          <a:p>
+            <a:r>
+              <a:rPr lang="zh-CN" altLang="en-US" sz="4400" dirty="0"/>
+              <a:t>教育历史变化及当下教育真相（五）</a:t>
+            </a:r>
+          </a:p>
+        </p:txBody>
+      </p:sp>
+      <p:sp>
+        <p:nvSpPr>
+          <p:cNvPr id="3" name="内容占位符 2">
+            <a:extLst>
+              <a:ext uri="{FF2B5EF4-FFF2-40B4-BE49-F238E27FC236}">
+                <a16:creationId xmlns:a16="http://schemas.microsoft.com/office/drawing/2014/main" id="{523C810A-8008-AED6-6082-9A74846E0EE5}"/>
+              </a:ext>
+            </a:extLst>
+          </p:cNvPr>
+          <p:cNvSpPr>
+            <a:spLocks noGrp="1"/>
+          </p:cNvSpPr>
+          <p:nvPr>
+            <p:ph idx="1"/>
+          </p:nvPr>
+        </p:nvSpPr>
+        <p:spPr>
+          <a:xfrm>
+            <a:off x="521208" y="1985963"/>
+            <a:ext cx="11155680" cy="4359973"/>
+          </a:xfrm>
+        </p:spPr>
+        <p:txBody>
+          <a:bodyPr/>
+          <a:lstStyle/>
+          <a:p>
+            <a:pPr marL="0" indent="0">
+              <a:buNone/>
+            </a:pPr>
+            <a:r>
+              <a:rPr lang="zh-CN" altLang="en-US" sz="1800" dirty="0"/>
+              <a:t>这两种理论无关谁对谁错，关键要看你怎么用。</a:t>
+            </a:r>
+          </a:p>
+          <a:p>
+            <a:pPr marL="0" indent="0">
+              <a:buNone/>
+            </a:pPr>
+            <a:r>
+              <a:rPr lang="zh-CN" altLang="en-US" sz="1800" dirty="0"/>
+              <a:t>因为前者是建立在群体集体的角度去看问题的，而后者是个体角度。</a:t>
+            </a:r>
+          </a:p>
+          <a:p>
+            <a:pPr marL="0" indent="0">
+              <a:buNone/>
+            </a:pPr>
+            <a:r>
+              <a:rPr lang="zh-CN" altLang="en-US" sz="1800" dirty="0"/>
+              <a:t>我们国家就是采用前者的教育理念。所以大家就应该明白，为什么所有的小朋友都要学习一样的东西，而且难度大家都一样。如果谁没跟上，那么只能说某个个体成长得慢了一些。</a:t>
+            </a:r>
+            <a:endParaRPr lang="en-US" altLang="zh-CN" sz="1800" dirty="0"/>
+          </a:p>
+          <a:p>
+            <a:pPr marL="0" indent="0">
+              <a:buNone/>
+            </a:pPr>
+            <a:endParaRPr lang="zh-CN" altLang="en-US" sz="1800" dirty="0"/>
+          </a:p>
+          <a:p>
+            <a:pPr marL="0" indent="0">
+              <a:buNone/>
+            </a:pPr>
+            <a:r>
+              <a:rPr lang="zh-CN" altLang="en-US" sz="1800" dirty="0"/>
+              <a:t>不过这是以前，最初我们的中小学教育还算可以。大家都是那个时候过来的，应该有所体会。但是现在问题起了变化。</a:t>
+            </a:r>
+          </a:p>
+          <a:p>
+            <a:pPr marL="0" indent="0">
+              <a:buNone/>
+            </a:pPr>
+            <a:r>
+              <a:rPr lang="zh-CN" altLang="en-US" sz="1800" dirty="0"/>
+              <a:t>每年的中小学课程难度增加得很多，大部分孩子已经不适合学习了，变得自信也被打击。</a:t>
+            </a:r>
+          </a:p>
+          <a:p>
+            <a:pPr marL="0" indent="0">
+              <a:buNone/>
+            </a:pPr>
+            <a:r>
+              <a:rPr lang="zh-CN" altLang="en-US" sz="1800" dirty="0"/>
+              <a:t>为什么会这样呢？为什么会大幅增加难度呢？大家都学好不行吗？</a:t>
+            </a:r>
+          </a:p>
+          <a:p>
+            <a:pPr marL="0" indent="0">
+              <a:buNone/>
+            </a:pPr>
+            <a:r>
+              <a:rPr lang="zh-CN" altLang="en-US" sz="1800" dirty="0"/>
+              <a:t>为了解释这个问题，除了我们要知道前面说的“最近发展区”理论之外，我们还要结合当下时代发展的背景。</a:t>
+            </a:r>
+          </a:p>
+        </p:txBody>
+      </p:sp>
+    </p:spTree>
+    <p:extLst>
+      <p:ext uri="{BB962C8B-B14F-4D97-AF65-F5344CB8AC3E}">
+        <p14:creationId xmlns:p14="http://schemas.microsoft.com/office/powerpoint/2010/main" val="1688765062"/>
+      </p:ext>
+    </p:extLst>
+  </p:cSld>
+  <p:clrMapOvr>
+    <a:masterClrMapping/>
+  </p:clrMapOvr>
+</p:sld>
+</file>
+
+<file path=ppt/slides/slide11.xml><?xml version="1.0" encoding="utf-8"?>
+<p:sld xmlns:a="http://schemas.openxmlformats.org/drawingml/2006/main" xmlns:r="http://schemas.openxmlformats.org/officeDocument/2006/relationships" xmlns:p="http://schemas.openxmlformats.org/presentationml/2006/main">
+  <p:cSld>
+    <p:spTree>
+      <p:nvGrpSpPr>
+        <p:cNvPr id="1" name="">
+          <a:extLst>
+            <a:ext uri="{FF2B5EF4-FFF2-40B4-BE49-F238E27FC236}">
+              <a16:creationId xmlns:a16="http://schemas.microsoft.com/office/drawing/2014/main" id="{013F7E17-0C8F-B187-F28D-D0D6E2A4BD86}"/>
+            </a:ext>
+          </a:extLst>
+        </p:cNvPr>
+        <p:cNvGrpSpPr/>
+        <p:nvPr/>
+      </p:nvGrpSpPr>
+      <p:grpSpPr>
+        <a:xfrm>
+          <a:off x="0" y="0"/>
+          <a:ext cx="0" cy="0"/>
+          <a:chOff x="0" y="0"/>
+          <a:chExt cx="0" cy="0"/>
+        </a:xfrm>
+      </p:grpSpPr>
+      <p:sp>
+        <p:nvSpPr>
+          <p:cNvPr id="2" name="标题 1">
+            <a:extLst>
+              <a:ext uri="{FF2B5EF4-FFF2-40B4-BE49-F238E27FC236}">
+                <a16:creationId xmlns:a16="http://schemas.microsoft.com/office/drawing/2014/main" id="{8E427952-518A-FB34-9F34-EBB45287A4E8}"/>
+              </a:ext>
+            </a:extLst>
+          </p:cNvPr>
+          <p:cNvSpPr>
+            <a:spLocks noGrp="1"/>
+          </p:cNvSpPr>
+          <p:nvPr>
+            <p:ph type="title"/>
+          </p:nvPr>
+        </p:nvSpPr>
+        <p:spPr/>
+        <p:txBody>
+          <a:bodyPr/>
+          <a:lstStyle/>
+          <a:p>
+            <a:r>
+              <a:rPr lang="zh-CN" altLang="en-US" sz="4400" dirty="0"/>
+              <a:t>教育历史变化及当下教育真相（六）</a:t>
+            </a:r>
+          </a:p>
+        </p:txBody>
+      </p:sp>
+      <p:sp>
+        <p:nvSpPr>
+          <p:cNvPr id="3" name="内容占位符 2">
+            <a:extLst>
+              <a:ext uri="{FF2B5EF4-FFF2-40B4-BE49-F238E27FC236}">
+                <a16:creationId xmlns:a16="http://schemas.microsoft.com/office/drawing/2014/main" id="{E0572A0C-8083-5C10-1057-F2782FA17B0A}"/>
+              </a:ext>
+            </a:extLst>
+          </p:cNvPr>
+          <p:cNvSpPr>
+            <a:spLocks noGrp="1"/>
+          </p:cNvSpPr>
+          <p:nvPr>
+            <p:ph idx="1"/>
+          </p:nvPr>
+        </p:nvSpPr>
+        <p:spPr>
+          <a:xfrm>
+            <a:off x="521208" y="1728789"/>
+            <a:ext cx="11155680" cy="4986336"/>
+          </a:xfrm>
+        </p:spPr>
+        <p:txBody>
+          <a:bodyPr/>
+          <a:lstStyle/>
+          <a:p>
+            <a:pPr marL="0" indent="0">
+              <a:buNone/>
+            </a:pPr>
+            <a:r>
+              <a:rPr lang="zh-CN" altLang="en-US" sz="1800" dirty="0"/>
+              <a:t>**好，我们将时间线，再拉回到改革开放初期。**</a:t>
+            </a:r>
+          </a:p>
+          <a:p>
+            <a:pPr marL="0" indent="0">
+              <a:buNone/>
+            </a:pPr>
+            <a:r>
+              <a:rPr lang="zh-CN" altLang="en-US" sz="1800" dirty="0"/>
+              <a:t>就是我们当时学的是什么的问题。我们学的是什么？</a:t>
+            </a:r>
+          </a:p>
+          <a:p>
+            <a:pPr marL="0" indent="0">
+              <a:buNone/>
+            </a:pPr>
+            <a:r>
+              <a:rPr lang="zh-CN" altLang="en-US" sz="1800" dirty="0"/>
+              <a:t>有一句话：学好数理化，走遍开下都不怕。</a:t>
+            </a:r>
+          </a:p>
+          <a:p>
+            <a:pPr marL="0" indent="0">
+              <a:buNone/>
+            </a:pPr>
+            <a:r>
+              <a:rPr lang="zh-CN" altLang="en-US" sz="1800" dirty="0"/>
+              <a:t>没错，就是我们最缺的工业文明的知识。我们从那时起，就渴望着知识，实际上是这些工业知识。</a:t>
+            </a:r>
+          </a:p>
+          <a:p>
+            <a:pPr marL="0" indent="0">
+              <a:buNone/>
+            </a:pPr>
+            <a:r>
+              <a:rPr lang="zh-CN" altLang="en-US" sz="1800" dirty="0"/>
+              <a:t>这些知识的特点就是，都是西方资本主义国家现成的，</a:t>
+            </a:r>
+            <a:r>
+              <a:rPr lang="en-US" altLang="zh-CN" sz="1800" dirty="0"/>
+              <a:t>200</a:t>
+            </a:r>
+            <a:r>
+              <a:rPr lang="zh-CN" altLang="en-US" sz="1800" dirty="0"/>
+              <a:t>多年的历史，有的你学了。</a:t>
+            </a:r>
+          </a:p>
+          <a:p>
+            <a:pPr marL="0" indent="0">
+              <a:buNone/>
+            </a:pPr>
+            <a:r>
+              <a:rPr lang="zh-CN" altLang="en-US" sz="1800" dirty="0"/>
+              <a:t>怎么学呢？</a:t>
+            </a:r>
+          </a:p>
+          <a:p>
+            <a:pPr marL="0" indent="0">
+              <a:buNone/>
+            </a:pPr>
+            <a:r>
+              <a:rPr lang="zh-CN" altLang="en-US" sz="1800" dirty="0"/>
+              <a:t>直接抄直接背，最后直接拿来用，对不对？</a:t>
+            </a:r>
+          </a:p>
+          <a:p>
+            <a:pPr marL="0" indent="0">
+              <a:buNone/>
+            </a:pPr>
+            <a:r>
+              <a:rPr lang="zh-CN" altLang="en-US" sz="1800" dirty="0"/>
+              <a:t>非常好使，中国人又聪明，用了</a:t>
+            </a:r>
+            <a:r>
+              <a:rPr lang="en-US" altLang="zh-CN" sz="1800" dirty="0"/>
+              <a:t>20</a:t>
+            </a:r>
+            <a:r>
+              <a:rPr lang="zh-CN" altLang="en-US" sz="1800" dirty="0"/>
+              <a:t>年的时间，基本已经学完了，抄完了。</a:t>
+            </a:r>
+          </a:p>
+          <a:p>
+            <a:pPr marL="0" indent="0">
+              <a:buNone/>
+            </a:pPr>
+            <a:r>
+              <a:rPr lang="zh-CN" altLang="en-US" sz="1800" dirty="0"/>
+              <a:t>我称之为创造“复制型”人才，就是小镇做题家形的人才。过去，你学个什么都行，文凭学历或技术随便拿，你就有口饭吃，日子过得还不错。</a:t>
+            </a:r>
+          </a:p>
+          <a:p>
+            <a:pPr marL="0" indent="0">
+              <a:buNone/>
+            </a:pPr>
+            <a:r>
+              <a:rPr lang="zh-CN" altLang="en-US" sz="1800" dirty="0"/>
+              <a:t>因为国家大量的需要你这样的人才。</a:t>
+            </a:r>
+          </a:p>
+        </p:txBody>
+      </p:sp>
+    </p:spTree>
+    <p:extLst>
+      <p:ext uri="{BB962C8B-B14F-4D97-AF65-F5344CB8AC3E}">
+        <p14:creationId xmlns:p14="http://schemas.microsoft.com/office/powerpoint/2010/main" val="3346054117"/>
+      </p:ext>
+    </p:extLst>
+  </p:cSld>
+  <p:clrMapOvr>
+    <a:masterClrMapping/>
+  </p:clrMapOvr>
+</p:sld>
+</file>
+
+<file path=ppt/slides/slide12.xml><?xml version="1.0" encoding="utf-8"?>
 <p:sld xmlns:a="http://schemas.openxmlformats.org/drawingml/2006/main" xmlns:r="http://schemas.openxmlformats.org/officeDocument/2006/relationships" xmlns:p="http://schemas.openxmlformats.org/presentationml/2006/main">
   <p:cSld>
     <p:spTree>
@@ -4069,8 +4435,8 @@
           <a:lstStyle/>
           <a:p>
             <a:r>
-              <a:rPr lang="zh-CN" altLang="en-US" dirty="0"/>
-              <a:t>教育历史变化及当下教育真相</a:t>
+              <a:rPr lang="zh-CN" altLang="en-US" sz="4400" dirty="0"/>
+              <a:t>教育历史变化及当下教育真相（七）</a:t>
             </a:r>
           </a:p>
         </p:txBody>
@@ -4091,7 +4457,12 @@
             <p:ph idx="1"/>
           </p:nvPr>
         </p:nvSpPr>
-        <p:spPr/>
+        <p:spPr>
+          <a:xfrm>
+            <a:off x="521208" y="1943100"/>
+            <a:ext cx="11155680" cy="4700588"/>
+          </a:xfrm>
+        </p:spPr>
         <p:txBody>
           <a:bodyPr/>
           <a:lstStyle/>
@@ -4103,6 +4474,13 @@
               <a:rPr lang="zh-CN" altLang="en-US" dirty="0"/>
               <a:t>然后，你再看现在，我们还学什么？</a:t>
             </a:r>
+            <a:endParaRPr lang="en-US" altLang="zh-CN" dirty="0"/>
+          </a:p>
+          <a:p>
+            <a:pPr marL="0" indent="0">
+              <a:buNone/>
+            </a:pPr>
+            <a:endParaRPr lang="zh-CN" altLang="en-US" dirty="0"/>
           </a:p>
           <a:p>
             <a:pPr marL="0" indent="0">
@@ -4112,6 +4490,13 @@
               <a:rPr lang="zh-CN" altLang="en-US" dirty="0"/>
               <a:t>基本上没有太多的东西让我们学了，因为很多领域我们都已经超过了西方。</a:t>
             </a:r>
+            <a:endParaRPr lang="en-US" altLang="zh-CN" dirty="0"/>
+          </a:p>
+          <a:p>
+            <a:pPr marL="0" indent="0">
+              <a:buNone/>
+            </a:pPr>
+            <a:endParaRPr lang="zh-CN" altLang="en-US" dirty="0"/>
           </a:p>
           <a:p>
             <a:pPr marL="0" indent="0">
@@ -4121,6 +4506,7 @@
               <a:rPr lang="zh-CN" altLang="en-US" dirty="0"/>
               <a:t>进入后工业时代，只能是我们自己创造新的知识了。</a:t>
             </a:r>
+            <a:endParaRPr lang="en-US" altLang="zh-CN" dirty="0"/>
           </a:p>
           <a:p>
             <a:pPr marL="0" indent="0">
@@ -4152,164 +4538,6 @@
               <a:buNone/>
             </a:pPr>
             <a:endParaRPr lang="zh-CN" altLang="en-US" dirty="0"/>
-          </a:p>
-          <a:p>
-            <a:pPr marL="0" indent="0">
-              <a:buNone/>
-            </a:pPr>
-            <a:r>
-              <a:rPr lang="zh-CN" altLang="en-US" dirty="0"/>
-              <a:t>为什么我们家长会疑惑，现在考个大学，学那么多东西，越来越没用了呢？</a:t>
-            </a:r>
-          </a:p>
-          <a:p>
-            <a:pPr marL="0" indent="0">
-              <a:buNone/>
-            </a:pPr>
-            <a:r>
-              <a:rPr lang="zh-CN" altLang="en-US" dirty="0"/>
-              <a:t>因为过去是“复制型”人才的培养模式，而现在，不是了。</a:t>
-            </a:r>
-          </a:p>
-          <a:p>
-            <a:pPr marL="0" indent="0">
-              <a:buNone/>
-            </a:pPr>
-            <a:r>
-              <a:rPr lang="zh-CN" altLang="en-US" dirty="0"/>
-              <a:t>国家希望找到那个真正聪明的，有创新能力的人才。</a:t>
-            </a:r>
-          </a:p>
-          <a:p>
-            <a:pPr marL="0" indent="0">
-              <a:buNone/>
-            </a:pPr>
-            <a:r>
-              <a:rPr lang="zh-CN" altLang="en-US" dirty="0"/>
-              <a:t>怎么办呢？</a:t>
-            </a:r>
-          </a:p>
-          <a:p>
-            <a:pPr marL="0" indent="0">
-              <a:buNone/>
-            </a:pPr>
-            <a:r>
-              <a:rPr lang="zh-CN" altLang="en-US" dirty="0"/>
-              <a:t>增加高考难度，增加考题的灵活性。</a:t>
-            </a:r>
-          </a:p>
-          <a:p>
-            <a:pPr marL="0" indent="0">
-              <a:buNone/>
-            </a:pPr>
-            <a:r>
-              <a:rPr lang="zh-CN" altLang="en-US" dirty="0"/>
-              <a:t>所以你会发现，为什么现在孩子们学的东西都是非常灵活的，不再是过去的死知识。</a:t>
-            </a:r>
-          </a:p>
-          <a:p>
-            <a:pPr marL="0" indent="0">
-              <a:buNone/>
-            </a:pPr>
-            <a:r>
-              <a:rPr lang="zh-CN" altLang="en-US" dirty="0"/>
-              <a:t>所以网上那些叫嚷着要恢复</a:t>
-            </a:r>
-            <a:r>
-              <a:rPr lang="en-US" altLang="zh-CN" dirty="0"/>
-              <a:t>80</a:t>
-            </a:r>
-            <a:r>
-              <a:rPr lang="zh-CN" altLang="en-US" dirty="0"/>
-              <a:t>后的教材的视频，你们还觉得对吗？</a:t>
-            </a:r>
-          </a:p>
-          <a:p>
-            <a:pPr marL="0" indent="0">
-              <a:buNone/>
-            </a:pPr>
-            <a:r>
-              <a:rPr lang="zh-CN" altLang="en-US" dirty="0"/>
-              <a:t>这些自媒体只是迎合了大众的心理，炒流量罢了，没人会真的懂这里面的本质，更不会有人告诉你真相。</a:t>
-            </a:r>
-          </a:p>
-          <a:p>
-            <a:pPr marL="0" indent="0">
-              <a:buNone/>
-            </a:pPr>
-            <a:r>
-              <a:rPr lang="zh-CN" altLang="en-US" dirty="0"/>
-              <a:t>所以国家为什么要双减？</a:t>
-            </a:r>
-          </a:p>
-          <a:p>
-            <a:pPr marL="0" indent="0">
-              <a:buNone/>
-            </a:pPr>
-            <a:r>
-              <a:rPr lang="zh-CN" altLang="en-US" dirty="0"/>
-              <a:t>因为绝大多数的孩子，不是他不聪明，更不是他笨，不是智商低，你别误会了你的孩子。</a:t>
-            </a:r>
-          </a:p>
-          <a:p>
-            <a:pPr marL="0" indent="0">
-              <a:buNone/>
-            </a:pPr>
-            <a:r>
-              <a:rPr lang="zh-CN" altLang="en-US" dirty="0"/>
-              <a:t>而是在这种选拔机制下，国家要的是那极少的真正人才。</a:t>
-            </a:r>
-          </a:p>
-          <a:p>
-            <a:pPr marL="0" indent="0">
-              <a:buNone/>
-            </a:pPr>
-            <a:r>
-              <a:rPr lang="zh-CN" altLang="en-US" dirty="0"/>
-              <a:t>作为普通的娃来说，没必要卷。</a:t>
-            </a:r>
-          </a:p>
-          <a:p>
-            <a:pPr marL="0" indent="0">
-              <a:buNone/>
-            </a:pPr>
-            <a:r>
-              <a:rPr lang="zh-CN" altLang="en-US" dirty="0"/>
-              <a:t>因为再卷，国家也不好筛选人才，你还累，没有意义。</a:t>
-            </a:r>
-          </a:p>
-          <a:p>
-            <a:pPr marL="0" indent="0">
-              <a:buNone/>
-            </a:pPr>
-            <a:r>
-              <a:rPr lang="zh-CN" altLang="en-US" dirty="0"/>
-              <a:t>所以现在的教育改革主流方向，就是让孩子们更轻松些，但学习难度却上了层次。</a:t>
-            </a:r>
-          </a:p>
-          <a:p>
-            <a:pPr marL="0" indent="0">
-              <a:buNone/>
-            </a:pPr>
-            <a:r>
-              <a:rPr lang="zh-CN" altLang="en-US" dirty="0"/>
-              <a:t>这才是真相，你现在明白了吗？</a:t>
-            </a:r>
-          </a:p>
-          <a:p>
-            <a:pPr marL="0" indent="0">
-              <a:buNone/>
-            </a:pPr>
-            <a:endParaRPr lang="zh-CN" altLang="en-US" dirty="0"/>
-          </a:p>
-          <a:p>
-            <a:pPr marL="0" indent="0">
-              <a:buNone/>
-            </a:pPr>
-            <a:r>
-              <a:rPr lang="zh-CN" altLang="en-US" dirty="0"/>
-              <a:t>如果还执意要卷，那么大概率会导致孩子的心理健康问题。</a:t>
-            </a:r>
           </a:p>
         </p:txBody>
       </p:sp>
@@ -4326,7 +4554,7 @@
 </p:sld>
 </file>
 
-<file path=ppt/slides/slide11.xml><?xml version="1.0" encoding="utf-8"?>
+<file path=ppt/slides/slide13.xml><?xml version="1.0" encoding="utf-8"?>
 <p:sld xmlns:a="http://schemas.openxmlformats.org/drawingml/2006/main" xmlns:r="http://schemas.openxmlformats.org/officeDocument/2006/relationships" xmlns:p="http://schemas.openxmlformats.org/presentationml/2006/main">
   <p:cSld>
     <p:spTree>
@@ -4334,7 +4562,7 @@
         <p:cNvPr id="1" name="">
           <a:extLst>
             <a:ext uri="{FF2B5EF4-FFF2-40B4-BE49-F238E27FC236}">
-              <a16:creationId xmlns:a16="http://schemas.microsoft.com/office/drawing/2014/main" id="{731178F9-20D8-CA27-FE2B-B3454737D8D2}"/>
+              <a16:creationId xmlns:a16="http://schemas.microsoft.com/office/drawing/2014/main" id="{4CF316C8-EC5E-4C39-C987-53027328682A}"/>
             </a:ext>
           </a:extLst>
         </p:cNvPr>
@@ -4354,7 +4582,7 @@
           <p:cNvPr id="2" name="标题 1">
             <a:extLst>
               <a:ext uri="{FF2B5EF4-FFF2-40B4-BE49-F238E27FC236}">
-                <a16:creationId xmlns:a16="http://schemas.microsoft.com/office/drawing/2014/main" id="{0EC63A5C-FC02-A7F5-2C06-AB808CC59E96}"/>
+                <a16:creationId xmlns:a16="http://schemas.microsoft.com/office/drawing/2014/main" id="{3ADE6D88-1303-4D2E-E284-B11D803CDC1C}"/>
               </a:ext>
             </a:extLst>
           </p:cNvPr>
@@ -4371,8 +4599,8 @@
           <a:lstStyle/>
           <a:p>
             <a:r>
-              <a:rPr lang="zh-CN" altLang="en-US" dirty="0"/>
-              <a:t>教育历史变化及当下教育真相</a:t>
+              <a:rPr lang="zh-CN" altLang="en-US" sz="4400" dirty="0"/>
+              <a:t>教育历史变化及当下教育真相（八）</a:t>
             </a:r>
           </a:p>
         </p:txBody>
@@ -4382,7 +4610,7 @@
           <p:cNvPr id="3" name="内容占位符 2">
             <a:extLst>
               <a:ext uri="{FF2B5EF4-FFF2-40B4-BE49-F238E27FC236}">
-                <a16:creationId xmlns:a16="http://schemas.microsoft.com/office/drawing/2014/main" id="{60B44F66-41FF-4954-6CC5-DDA1ACCF0401}"/>
+                <a16:creationId xmlns:a16="http://schemas.microsoft.com/office/drawing/2014/main" id="{13FB239B-F1DC-CD79-35A3-44A301C63E1A}"/>
               </a:ext>
             </a:extLst>
           </p:cNvPr>
@@ -4393,19 +4621,110 @@
             <p:ph idx="1"/>
           </p:nvPr>
         </p:nvSpPr>
-        <p:spPr/>
+        <p:spPr>
+          <a:xfrm>
+            <a:off x="521208" y="1814513"/>
+            <a:ext cx="11155680" cy="4829175"/>
+          </a:xfrm>
+        </p:spPr>
         <p:txBody>
           <a:bodyPr/>
           <a:lstStyle/>
           <a:p>
-            <a:endParaRPr lang="zh-CN" altLang="en-US"/>
+            <a:pPr marL="0" indent="0">
+              <a:buNone/>
+            </a:pPr>
+            <a:r>
+              <a:rPr lang="zh-CN" altLang="en-US" sz="1800" dirty="0"/>
+              <a:t>为什么我们家长会疑惑，现在考个大学，学那么多东西，越来越没用了呢？</a:t>
+            </a:r>
+          </a:p>
+          <a:p>
+            <a:pPr marL="0" indent="0">
+              <a:buNone/>
+            </a:pPr>
+            <a:r>
+              <a:rPr lang="zh-CN" altLang="en-US" sz="1800" dirty="0"/>
+              <a:t>因为过去是“复制型”人才的培养模式，而现在，不是了。</a:t>
+            </a:r>
+          </a:p>
+          <a:p>
+            <a:pPr marL="0" indent="0">
+              <a:buNone/>
+            </a:pPr>
+            <a:r>
+              <a:rPr lang="zh-CN" altLang="en-US" sz="1800" dirty="0"/>
+              <a:t>国家希望找到那个真正聪明的，有创新能力的人才。怎么办呢？增加高考难度，增加考题的灵活性。</a:t>
+            </a:r>
+          </a:p>
+          <a:p>
+            <a:pPr marL="0" indent="0">
+              <a:buNone/>
+            </a:pPr>
+            <a:r>
+              <a:rPr lang="zh-CN" altLang="en-US" sz="1800" dirty="0"/>
+              <a:t>所以你会发现，为什么现在孩子们学的东西都是非常灵活的，不再是过去的死知识。</a:t>
+            </a:r>
+          </a:p>
+          <a:p>
+            <a:pPr marL="0" indent="0">
+              <a:buNone/>
+            </a:pPr>
+            <a:r>
+              <a:rPr lang="zh-CN" altLang="en-US" sz="1800" dirty="0"/>
+              <a:t>所以网上那些叫嚷着要恢复</a:t>
+            </a:r>
+            <a:r>
+              <a:rPr lang="en-US" altLang="zh-CN" sz="1800" dirty="0"/>
+              <a:t>80</a:t>
+            </a:r>
+            <a:r>
+              <a:rPr lang="zh-CN" altLang="en-US" sz="1800" dirty="0"/>
+              <a:t>后的教材的视频，你们还觉得对吗？</a:t>
+            </a:r>
+          </a:p>
+          <a:p>
+            <a:pPr marL="0" indent="0">
+              <a:buNone/>
+            </a:pPr>
+            <a:r>
+              <a:rPr lang="zh-CN" altLang="en-US" sz="1800" dirty="0"/>
+              <a:t>这些自媒体只是迎合了大众的心理，炒流量罢了，没人会真的懂这里面的本质，更不会有人告诉你真相。所以国家为什么要双减？因为绝大多数的孩子，不是他不聪明，更不是他笨，不是智商低，你别误会了你的孩子。而是在这种选拔机制下，国家要的是那极少的真正人才。</a:t>
+            </a:r>
+          </a:p>
+          <a:p>
+            <a:pPr marL="0" indent="0">
+              <a:buNone/>
+            </a:pPr>
+            <a:r>
+              <a:rPr lang="zh-CN" altLang="en-US" sz="1800" dirty="0"/>
+              <a:t>作为普通的娃来说，没必要卷。因为再卷，国家也不好筛选人才，你还累，没有意义。</a:t>
+            </a:r>
+          </a:p>
+          <a:p>
+            <a:pPr marL="0" indent="0">
+              <a:buNone/>
+            </a:pPr>
+            <a:r>
+              <a:rPr lang="zh-CN" altLang="en-US" sz="1800" dirty="0"/>
+              <a:t>所以现在的教育改革主流方向，就是让孩子们更轻松些，但学习难度却上了层次。</a:t>
+            </a:r>
+          </a:p>
+          <a:p>
+            <a:pPr marL="0" indent="0">
+              <a:buNone/>
+            </a:pPr>
+            <a:r>
+              <a:rPr lang="zh-CN" altLang="en-US" sz="1800" dirty="0"/>
+              <a:t>这才是真相，你现在明白了吗？如果还执意要卷，那么大概率会导致孩子的心理健康问题。</a:t>
+            </a:r>
           </a:p>
         </p:txBody>
       </p:sp>
     </p:spTree>
     <p:extLst>
       <p:ext uri="{BB962C8B-B14F-4D97-AF65-F5344CB8AC3E}">
-        <p14:creationId xmlns:p14="http://schemas.microsoft.com/office/powerpoint/2010/main" val="2590083551"/>
+        <p14:creationId xmlns:p14="http://schemas.microsoft.com/office/powerpoint/2010/main" val="3229734243"/>
       </p:ext>
     </p:extLst>
   </p:cSld>
@@ -4415,7 +4734,7 @@
 </p:sld>
 </file>
 
-<file path=ppt/slides/slide12.xml><?xml version="1.0" encoding="utf-8"?>
+<file path=ppt/slides/slide14.xml><?xml version="1.0" encoding="utf-8"?>
 <p:sld xmlns:a="http://schemas.openxmlformats.org/drawingml/2006/main" xmlns:r="http://schemas.openxmlformats.org/officeDocument/2006/relationships" xmlns:p="http://schemas.openxmlformats.org/presentationml/2006/main">
   <p:cSld>
     <p:spTree>
@@ -4460,34 +4779,737 @@
           <a:lstStyle/>
           <a:p>
             <a:r>
-              <a:rPr lang="zh-CN" altLang="en-US" dirty="0"/>
-              <a:t>教育历史变化及当下教育真相</a:t>
-            </a:r>
-          </a:p>
-        </p:txBody>
-      </p:sp>
-      <p:sp>
-        <p:nvSpPr>
-          <p:cNvPr id="3" name="内容占位符 2">
-            <a:extLst>
-              <a:ext uri="{FF2B5EF4-FFF2-40B4-BE49-F238E27FC236}">
-                <a16:creationId xmlns:a16="http://schemas.microsoft.com/office/drawing/2014/main" id="{D103613E-4097-8DB8-8B59-5D379581162B}"/>
-              </a:ext>
-            </a:extLst>
-          </p:cNvPr>
-          <p:cNvSpPr>
-            <a:spLocks noGrp="1"/>
+              <a:rPr lang="zh-CN" altLang="en-US" sz="4400" dirty="0"/>
+              <a:t>教育历史变化及当下教育真相（九）</a:t>
+            </a:r>
+          </a:p>
+        </p:txBody>
+      </p:sp>
+      <p:sp>
+        <p:nvSpPr>
+          <p:cNvPr id="4" name="Rectangle 1">
+            <a:extLst>
+              <a:ext uri="{FF2B5EF4-FFF2-40B4-BE49-F238E27FC236}">
+                <a16:creationId xmlns:a16="http://schemas.microsoft.com/office/drawing/2014/main" id="{DB64FB12-5BF2-8BD1-DB99-E555CA62F5C7}"/>
+              </a:ext>
+            </a:extLst>
+          </p:cNvPr>
+          <p:cNvSpPr>
+            <a:spLocks noGrp="1" noChangeArrowheads="1"/>
           </p:cNvSpPr>
           <p:nvPr>
             <p:ph idx="1"/>
           </p:nvPr>
         </p:nvSpPr>
-        <p:spPr/>
-        <p:txBody>
-          <a:bodyPr/>
-          <a:lstStyle/>
-          <a:p>
-            <a:endParaRPr lang="zh-CN" altLang="en-US"/>
+        <p:spPr bwMode="auto">
+          <a:xfrm>
+            <a:off x="521208" y="2261670"/>
+            <a:ext cx="11149584" cy="4401205"/>
+          </a:xfrm>
+          <a:prstGeom prst="rect">
+            <a:avLst/>
+          </a:prstGeom>
+          <a:noFill/>
+          <a:ln>
+            <a:noFill/>
+          </a:ln>
+          <a:effectLst/>
+          <a:extLst>
+            <a:ext uri="{909E8E84-426E-40DD-AFC4-6F175D3DCCD1}">
+              <a14:hiddenFill xmlns:a14="http://schemas.microsoft.com/office/drawing/2010/main">
+                <a:solidFill>
+                  <a:schemeClr val="accent1"/>
+                </a:solidFill>
+              </a14:hiddenFill>
+            </a:ext>
+            <a:ext uri="{91240B29-F687-4F45-9708-019B960494DF}">
+              <a14:hiddenLine xmlns:a14="http://schemas.microsoft.com/office/drawing/2010/main" w="9525">
+                <a:solidFill>
+                  <a:schemeClr val="tx1"/>
+                </a:solidFill>
+                <a:miter lim="800000"/>
+                <a:headEnd/>
+                <a:tailEnd/>
+              </a14:hiddenLine>
+            </a:ext>
+            <a:ext uri="{AF507438-7753-43E0-B8FC-AC1667EBCBE1}">
+              <a14:hiddenEffects xmlns:a14="http://schemas.microsoft.com/office/drawing/2010/main">
+                <a:effectLst>
+                  <a:outerShdw dist="35921" dir="2700000" algn="ctr" rotWithShape="0">
+                    <a:schemeClr val="bg2"/>
+                  </a:outerShdw>
+                </a:effectLst>
+              </a14:hiddenEffects>
+            </a:ext>
+          </a:extLst>
+        </p:spPr>
+        <p:txBody>
+          <a:bodyPr vert="horz" wrap="square" lIns="91440" tIns="45720" rIns="91440" bIns="45720" numCol="1" anchor="ctr" anchorCtr="0" compatLnSpc="1">
+            <a:prstTxWarp prst="textNoShape">
+              <a:avLst/>
+            </a:prstTxWarp>
+            <a:spAutoFit/>
+          </a:bodyPr>
+          <a:lstStyle>
+            <a:lvl1pPr eaLnBrk="0" fontAlgn="base" hangingPunct="0">
+              <a:spcBef>
+                <a:spcPct val="0"/>
+              </a:spcBef>
+              <a:spcAft>
+                <a:spcPct val="0"/>
+              </a:spcAft>
+              <a:defRPr>
+                <a:solidFill>
+                  <a:schemeClr val="tx1"/>
+                </a:solidFill>
+                <a:latin typeface="Arial" panose="020B0604020202020204" pitchFamily="34" charset="0"/>
+              </a:defRPr>
+            </a:lvl1pPr>
+            <a:lvl2pPr eaLnBrk="0" fontAlgn="base" hangingPunct="0">
+              <a:spcBef>
+                <a:spcPct val="0"/>
+              </a:spcBef>
+              <a:spcAft>
+                <a:spcPct val="0"/>
+              </a:spcAft>
+              <a:defRPr>
+                <a:solidFill>
+                  <a:schemeClr val="tx1"/>
+                </a:solidFill>
+                <a:latin typeface="Arial" panose="020B0604020202020204" pitchFamily="34" charset="0"/>
+              </a:defRPr>
+            </a:lvl2pPr>
+            <a:lvl3pPr eaLnBrk="0" fontAlgn="base" hangingPunct="0">
+              <a:spcBef>
+                <a:spcPct val="0"/>
+              </a:spcBef>
+              <a:spcAft>
+                <a:spcPct val="0"/>
+              </a:spcAft>
+              <a:defRPr>
+                <a:solidFill>
+                  <a:schemeClr val="tx1"/>
+                </a:solidFill>
+                <a:latin typeface="Arial" panose="020B0604020202020204" pitchFamily="34" charset="0"/>
+              </a:defRPr>
+            </a:lvl3pPr>
+            <a:lvl4pPr eaLnBrk="0" fontAlgn="base" hangingPunct="0">
+              <a:spcBef>
+                <a:spcPct val="0"/>
+              </a:spcBef>
+              <a:spcAft>
+                <a:spcPct val="0"/>
+              </a:spcAft>
+              <a:defRPr>
+                <a:solidFill>
+                  <a:schemeClr val="tx1"/>
+                </a:solidFill>
+                <a:latin typeface="Arial" panose="020B0604020202020204" pitchFamily="34" charset="0"/>
+              </a:defRPr>
+            </a:lvl4pPr>
+            <a:lvl5pPr eaLnBrk="0" fontAlgn="base" hangingPunct="0">
+              <a:spcBef>
+                <a:spcPct val="0"/>
+              </a:spcBef>
+              <a:spcAft>
+                <a:spcPct val="0"/>
+              </a:spcAft>
+              <a:defRPr>
+                <a:solidFill>
+                  <a:schemeClr val="tx1"/>
+                </a:solidFill>
+                <a:latin typeface="Arial" panose="020B0604020202020204" pitchFamily="34" charset="0"/>
+              </a:defRPr>
+            </a:lvl5pPr>
+            <a:lvl6pPr eaLnBrk="0" fontAlgn="base" hangingPunct="0">
+              <a:spcBef>
+                <a:spcPct val="0"/>
+              </a:spcBef>
+              <a:spcAft>
+                <a:spcPct val="0"/>
+              </a:spcAft>
+              <a:defRPr>
+                <a:solidFill>
+                  <a:schemeClr val="tx1"/>
+                </a:solidFill>
+                <a:latin typeface="Arial" panose="020B0604020202020204" pitchFamily="34" charset="0"/>
+              </a:defRPr>
+            </a:lvl6pPr>
+            <a:lvl7pPr eaLnBrk="0" fontAlgn="base" hangingPunct="0">
+              <a:spcBef>
+                <a:spcPct val="0"/>
+              </a:spcBef>
+              <a:spcAft>
+                <a:spcPct val="0"/>
+              </a:spcAft>
+              <a:defRPr>
+                <a:solidFill>
+                  <a:schemeClr val="tx1"/>
+                </a:solidFill>
+                <a:latin typeface="Arial" panose="020B0604020202020204" pitchFamily="34" charset="0"/>
+              </a:defRPr>
+            </a:lvl7pPr>
+            <a:lvl8pPr eaLnBrk="0" fontAlgn="base" hangingPunct="0">
+              <a:spcBef>
+                <a:spcPct val="0"/>
+              </a:spcBef>
+              <a:spcAft>
+                <a:spcPct val="0"/>
+              </a:spcAft>
+              <a:defRPr>
+                <a:solidFill>
+                  <a:schemeClr val="tx1"/>
+                </a:solidFill>
+                <a:latin typeface="Arial" panose="020B0604020202020204" pitchFamily="34" charset="0"/>
+              </a:defRPr>
+            </a:lvl8pPr>
+            <a:lvl9pPr eaLnBrk="0" fontAlgn="base" hangingPunct="0">
+              <a:spcBef>
+                <a:spcPct val="0"/>
+              </a:spcBef>
+              <a:spcAft>
+                <a:spcPct val="0"/>
+              </a:spcAft>
+              <a:defRPr>
+                <a:solidFill>
+                  <a:schemeClr val="tx1"/>
+                </a:solidFill>
+                <a:latin typeface="Arial" panose="020B0604020202020204" pitchFamily="34" charset="0"/>
+              </a:defRPr>
+            </a:lvl9pPr>
+          </a:lstStyle>
+          <a:p>
+            <a:pPr marL="0" marR="0" lvl="0" indent="0" algn="l" defTabSz="914400" rtl="0" eaLnBrk="0" fontAlgn="base" latinLnBrk="0" hangingPunct="0">
+              <a:lnSpc>
+                <a:spcPct val="100000"/>
+              </a:lnSpc>
+              <a:spcBef>
+                <a:spcPct val="0"/>
+              </a:spcBef>
+              <a:spcAft>
+                <a:spcPct val="0"/>
+              </a:spcAft>
+              <a:buClrTx/>
+              <a:buSzTx/>
+              <a:buFontTx/>
+              <a:buNone/>
+              <a:tabLst/>
+            </a:pPr>
+            <a:r>
+              <a:rPr kumimoji="0" lang="zh-CN" altLang="zh-CN" b="0" i="0" u="none" strike="noStrike" cap="none" normalizeH="0" baseline="0" dirty="0">
+                <a:ln>
+                  <a:noFill/>
+                </a:ln>
+                <a:solidFill>
+                  <a:srgbClr val="333333"/>
+                </a:solidFill>
+                <a:effectLst/>
+                <a:latin typeface="Open Sans" panose="020B0606030504020204" pitchFamily="34" charset="0"/>
+                <a:cs typeface="Open Sans" panose="020B0606030504020204" pitchFamily="34" charset="0"/>
+              </a:rPr>
+              <a:t>怎么办呢？</a:t>
+            </a:r>
+            <a:endParaRPr kumimoji="0" lang="zh-CN" altLang="zh-CN" b="0" i="0" u="none" strike="noStrike" cap="none" normalizeH="0" baseline="0" dirty="0">
+              <a:ln>
+                <a:noFill/>
+              </a:ln>
+              <a:solidFill>
+                <a:schemeClr val="tx1"/>
+              </a:solidFill>
+              <a:effectLst/>
+            </a:endParaRPr>
+          </a:p>
+          <a:p>
+            <a:pPr marL="0" marR="0" lvl="0" indent="0" algn="l" defTabSz="914400" rtl="0" eaLnBrk="0" fontAlgn="base" latinLnBrk="0" hangingPunct="0">
+              <a:lnSpc>
+                <a:spcPct val="100000"/>
+              </a:lnSpc>
+              <a:spcBef>
+                <a:spcPct val="0"/>
+              </a:spcBef>
+              <a:spcAft>
+                <a:spcPct val="0"/>
+              </a:spcAft>
+              <a:buClrTx/>
+              <a:buSzTx/>
+              <a:buFontTx/>
+              <a:buNone/>
+              <a:tabLst/>
+            </a:pPr>
+            <a:r>
+              <a:rPr kumimoji="0" lang="zh-CN" altLang="zh-CN" b="0" i="0" u="none" strike="noStrike" cap="none" normalizeH="0" baseline="0" dirty="0">
+                <a:ln>
+                  <a:noFill/>
+                </a:ln>
+                <a:solidFill>
+                  <a:srgbClr val="333333"/>
+                </a:solidFill>
+                <a:effectLst/>
+                <a:latin typeface="Open Sans" panose="020B0606030504020204" pitchFamily="34" charset="0"/>
+                <a:cs typeface="Open Sans" panose="020B0606030504020204" pitchFamily="34" charset="0"/>
+              </a:rPr>
+              <a:t>增加高考难度，增加考题的灵活性。</a:t>
+            </a:r>
+            <a:endParaRPr kumimoji="0" lang="zh-CN" altLang="zh-CN" b="0" i="0" u="none" strike="noStrike" cap="none" normalizeH="0" baseline="0" dirty="0">
+              <a:ln>
+                <a:noFill/>
+              </a:ln>
+              <a:solidFill>
+                <a:schemeClr val="tx1"/>
+              </a:solidFill>
+              <a:effectLst/>
+            </a:endParaRPr>
+          </a:p>
+          <a:p>
+            <a:pPr marL="0" marR="0" lvl="0" indent="0" algn="l" defTabSz="914400" rtl="0" eaLnBrk="0" fontAlgn="base" latinLnBrk="0" hangingPunct="0">
+              <a:lnSpc>
+                <a:spcPct val="100000"/>
+              </a:lnSpc>
+              <a:spcBef>
+                <a:spcPct val="0"/>
+              </a:spcBef>
+              <a:spcAft>
+                <a:spcPct val="0"/>
+              </a:spcAft>
+              <a:buClrTx/>
+              <a:buSzTx/>
+              <a:buFontTx/>
+              <a:buNone/>
+              <a:tabLst/>
+            </a:pPr>
+            <a:r>
+              <a:rPr kumimoji="0" lang="zh-CN" altLang="zh-CN" b="0" i="0" u="none" strike="noStrike" cap="none" normalizeH="0" baseline="0" dirty="0">
+                <a:ln>
+                  <a:noFill/>
+                </a:ln>
+                <a:solidFill>
+                  <a:srgbClr val="333333"/>
+                </a:solidFill>
+                <a:effectLst/>
+                <a:latin typeface="Open Sans" panose="020B0606030504020204" pitchFamily="34" charset="0"/>
+                <a:cs typeface="Open Sans" panose="020B0606030504020204" pitchFamily="34" charset="0"/>
+              </a:rPr>
+              <a:t>所以你会发现，为什么现在孩子们学的东西都是非常灵活的，不再是过去的死知识。</a:t>
+            </a:r>
+            <a:endParaRPr kumimoji="0" lang="zh-CN" altLang="zh-CN" b="0" i="0" u="none" strike="noStrike" cap="none" normalizeH="0" baseline="0" dirty="0">
+              <a:ln>
+                <a:noFill/>
+              </a:ln>
+              <a:solidFill>
+                <a:schemeClr val="tx1"/>
+              </a:solidFill>
+              <a:effectLst/>
+            </a:endParaRPr>
+          </a:p>
+          <a:p>
+            <a:pPr marL="0" marR="0" lvl="0" indent="0" algn="l" defTabSz="914400" rtl="0" eaLnBrk="0" fontAlgn="base" latinLnBrk="0" hangingPunct="0">
+              <a:lnSpc>
+                <a:spcPct val="100000"/>
+              </a:lnSpc>
+              <a:spcBef>
+                <a:spcPct val="0"/>
+              </a:spcBef>
+              <a:spcAft>
+                <a:spcPct val="0"/>
+              </a:spcAft>
+              <a:buClrTx/>
+              <a:buSzTx/>
+              <a:buFontTx/>
+              <a:buNone/>
+              <a:tabLst/>
+            </a:pPr>
+            <a:r>
+              <a:rPr kumimoji="0" lang="zh-CN" altLang="zh-CN" b="0" i="0" u="none" strike="noStrike" cap="none" normalizeH="0" baseline="0" dirty="0">
+                <a:ln>
+                  <a:noFill/>
+                </a:ln>
+                <a:solidFill>
+                  <a:srgbClr val="333333"/>
+                </a:solidFill>
+                <a:effectLst/>
+                <a:latin typeface="Open Sans" panose="020B0606030504020204" pitchFamily="34" charset="0"/>
+                <a:cs typeface="Open Sans" panose="020B0606030504020204" pitchFamily="34" charset="0"/>
+              </a:rPr>
+              <a:t>所以网上那些叫嚷着要恢复80后的教材的视频，你们还觉得对吗？</a:t>
+            </a:r>
+            <a:endParaRPr kumimoji="0" lang="zh-CN" altLang="zh-CN" b="0" i="0" u="none" strike="noStrike" cap="none" normalizeH="0" baseline="0" dirty="0">
+              <a:ln>
+                <a:noFill/>
+              </a:ln>
+              <a:solidFill>
+                <a:schemeClr val="tx1"/>
+              </a:solidFill>
+              <a:effectLst/>
+            </a:endParaRPr>
+          </a:p>
+          <a:p>
+            <a:pPr marL="0" marR="0" lvl="0" indent="0" algn="l" defTabSz="914400" rtl="0" eaLnBrk="0" fontAlgn="base" latinLnBrk="0" hangingPunct="0">
+              <a:lnSpc>
+                <a:spcPct val="100000"/>
+              </a:lnSpc>
+              <a:spcBef>
+                <a:spcPct val="0"/>
+              </a:spcBef>
+              <a:spcAft>
+                <a:spcPct val="0"/>
+              </a:spcAft>
+              <a:buClrTx/>
+              <a:buSzTx/>
+              <a:buFontTx/>
+              <a:buNone/>
+              <a:tabLst/>
+            </a:pPr>
+            <a:r>
+              <a:rPr kumimoji="0" lang="zh-CN" altLang="zh-CN" b="0" i="0" u="none" strike="noStrike" cap="none" normalizeH="0" baseline="0" dirty="0">
+                <a:ln>
+                  <a:noFill/>
+                </a:ln>
+                <a:solidFill>
+                  <a:srgbClr val="333333"/>
+                </a:solidFill>
+                <a:effectLst/>
+                <a:latin typeface="Open Sans" panose="020B0606030504020204" pitchFamily="34" charset="0"/>
+                <a:cs typeface="Open Sans" panose="020B0606030504020204" pitchFamily="34" charset="0"/>
+              </a:rPr>
+              <a:t>这些自媒体只是迎合了大众的心理，炒流量罢了，没人会真的懂这里面的本质，更不会有人告诉你真相。</a:t>
+            </a:r>
+            <a:endParaRPr kumimoji="0" lang="zh-CN" altLang="zh-CN" b="0" i="0" u="none" strike="noStrike" cap="none" normalizeH="0" baseline="0" dirty="0">
+              <a:ln>
+                <a:noFill/>
+              </a:ln>
+              <a:solidFill>
+                <a:schemeClr val="tx1"/>
+              </a:solidFill>
+              <a:effectLst/>
+            </a:endParaRPr>
+          </a:p>
+          <a:p>
+            <a:pPr marL="0" marR="0" lvl="0" indent="0" algn="l" defTabSz="914400" rtl="0" eaLnBrk="0" fontAlgn="base" latinLnBrk="0" hangingPunct="0">
+              <a:lnSpc>
+                <a:spcPct val="100000"/>
+              </a:lnSpc>
+              <a:spcBef>
+                <a:spcPct val="0"/>
+              </a:spcBef>
+              <a:spcAft>
+                <a:spcPct val="0"/>
+              </a:spcAft>
+              <a:buClrTx/>
+              <a:buSzTx/>
+              <a:buFontTx/>
+              <a:buNone/>
+              <a:tabLst/>
+            </a:pPr>
+            <a:r>
+              <a:rPr kumimoji="0" lang="zh-CN" altLang="zh-CN" b="0" i="0" u="none" strike="noStrike" cap="none" normalizeH="0" baseline="0" dirty="0">
+                <a:ln>
+                  <a:noFill/>
+                </a:ln>
+                <a:solidFill>
+                  <a:srgbClr val="333333"/>
+                </a:solidFill>
+                <a:effectLst/>
+                <a:latin typeface="Open Sans" panose="020B0606030504020204" pitchFamily="34" charset="0"/>
+                <a:cs typeface="Open Sans" panose="020B0606030504020204" pitchFamily="34" charset="0"/>
+              </a:rPr>
+              <a:t>所以国家为什么要双减？</a:t>
+            </a:r>
+            <a:endParaRPr kumimoji="0" lang="zh-CN" altLang="zh-CN" b="0" i="0" u="none" strike="noStrike" cap="none" normalizeH="0" baseline="0" dirty="0">
+              <a:ln>
+                <a:noFill/>
+              </a:ln>
+              <a:solidFill>
+                <a:schemeClr val="tx1"/>
+              </a:solidFill>
+              <a:effectLst/>
+            </a:endParaRPr>
+          </a:p>
+          <a:p>
+            <a:pPr marL="0" marR="0" lvl="0" indent="0" algn="l" defTabSz="914400" rtl="0" eaLnBrk="0" fontAlgn="base" latinLnBrk="0" hangingPunct="0">
+              <a:lnSpc>
+                <a:spcPct val="100000"/>
+              </a:lnSpc>
+              <a:spcBef>
+                <a:spcPct val="0"/>
+              </a:spcBef>
+              <a:spcAft>
+                <a:spcPct val="0"/>
+              </a:spcAft>
+              <a:buClrTx/>
+              <a:buSzTx/>
+              <a:buFontTx/>
+              <a:buNone/>
+              <a:tabLst/>
+            </a:pPr>
+            <a:r>
+              <a:rPr kumimoji="0" lang="zh-CN" altLang="zh-CN" b="0" i="0" u="none" strike="noStrike" cap="none" normalizeH="0" baseline="0" dirty="0">
+                <a:ln>
+                  <a:noFill/>
+                </a:ln>
+                <a:solidFill>
+                  <a:srgbClr val="333333"/>
+                </a:solidFill>
+                <a:effectLst/>
+                <a:latin typeface="Open Sans" panose="020B0606030504020204" pitchFamily="34" charset="0"/>
+                <a:cs typeface="Open Sans" panose="020B0606030504020204" pitchFamily="34" charset="0"/>
+              </a:rPr>
+              <a:t>因为绝大多数的孩子，不是他不聪明，更不是他笨，不是智商低，你别误会了你的孩子。</a:t>
+            </a:r>
+            <a:endParaRPr kumimoji="0" lang="zh-CN" altLang="zh-CN" b="0" i="0" u="none" strike="noStrike" cap="none" normalizeH="0" baseline="0" dirty="0">
+              <a:ln>
+                <a:noFill/>
+              </a:ln>
+              <a:solidFill>
+                <a:schemeClr val="tx1"/>
+              </a:solidFill>
+              <a:effectLst/>
+            </a:endParaRPr>
+          </a:p>
+          <a:p>
+            <a:pPr marL="0" marR="0" lvl="0" indent="0" algn="l" defTabSz="914400" rtl="0" eaLnBrk="0" fontAlgn="base" latinLnBrk="0" hangingPunct="0">
+              <a:lnSpc>
+                <a:spcPct val="100000"/>
+              </a:lnSpc>
+              <a:spcBef>
+                <a:spcPct val="0"/>
+              </a:spcBef>
+              <a:spcAft>
+                <a:spcPct val="0"/>
+              </a:spcAft>
+              <a:buClrTx/>
+              <a:buSzTx/>
+              <a:buFontTx/>
+              <a:buNone/>
+              <a:tabLst/>
+            </a:pPr>
+            <a:r>
+              <a:rPr kumimoji="0" lang="zh-CN" altLang="zh-CN" b="0" i="0" u="none" strike="noStrike" cap="none" normalizeH="0" baseline="0" dirty="0">
+                <a:ln>
+                  <a:noFill/>
+                </a:ln>
+                <a:solidFill>
+                  <a:srgbClr val="333333"/>
+                </a:solidFill>
+                <a:effectLst/>
+                <a:latin typeface="Open Sans" panose="020B0606030504020204" pitchFamily="34" charset="0"/>
+                <a:cs typeface="Open Sans" panose="020B0606030504020204" pitchFamily="34" charset="0"/>
+              </a:rPr>
+              <a:t>而是在这种选拔机制下，国家要的是那极少的真正人才。</a:t>
+            </a:r>
+            <a:endParaRPr kumimoji="0" lang="zh-CN" altLang="zh-CN" b="0" i="0" u="none" strike="noStrike" cap="none" normalizeH="0" baseline="0" dirty="0">
+              <a:ln>
+                <a:noFill/>
+              </a:ln>
+              <a:solidFill>
+                <a:schemeClr val="tx1"/>
+              </a:solidFill>
+              <a:effectLst/>
+            </a:endParaRPr>
+          </a:p>
+          <a:p>
+            <a:pPr marL="0" marR="0" lvl="0" indent="0" algn="l" defTabSz="914400" rtl="0" eaLnBrk="0" fontAlgn="base" latinLnBrk="0" hangingPunct="0">
+              <a:lnSpc>
+                <a:spcPct val="100000"/>
+              </a:lnSpc>
+              <a:spcBef>
+                <a:spcPct val="0"/>
+              </a:spcBef>
+              <a:spcAft>
+                <a:spcPct val="0"/>
+              </a:spcAft>
+              <a:buClrTx/>
+              <a:buSzTx/>
+              <a:buFontTx/>
+              <a:buNone/>
+              <a:tabLst/>
+            </a:pPr>
+            <a:r>
+              <a:rPr kumimoji="0" lang="zh-CN" altLang="zh-CN" b="0" i="0" u="none" strike="noStrike" cap="none" normalizeH="0" baseline="0" dirty="0">
+                <a:ln>
+                  <a:noFill/>
+                </a:ln>
+                <a:solidFill>
+                  <a:srgbClr val="333333"/>
+                </a:solidFill>
+                <a:effectLst/>
+                <a:latin typeface="Open Sans" panose="020B0606030504020204" pitchFamily="34" charset="0"/>
+                <a:cs typeface="Open Sans" panose="020B0606030504020204" pitchFamily="34" charset="0"/>
+              </a:rPr>
+              <a:t>作为普通的娃来说，没必要卷。</a:t>
+            </a:r>
+            <a:endParaRPr kumimoji="0" lang="zh-CN" altLang="zh-CN" b="0" i="0" u="none" strike="noStrike" cap="none" normalizeH="0" baseline="0" dirty="0">
+              <a:ln>
+                <a:noFill/>
+              </a:ln>
+              <a:solidFill>
+                <a:schemeClr val="tx1"/>
+              </a:solidFill>
+              <a:effectLst/>
+            </a:endParaRPr>
+          </a:p>
+          <a:p>
+            <a:pPr marL="0" marR="0" lvl="0" indent="0" algn="l" defTabSz="914400" rtl="0" eaLnBrk="0" fontAlgn="base" latinLnBrk="0" hangingPunct="0">
+              <a:lnSpc>
+                <a:spcPct val="100000"/>
+              </a:lnSpc>
+              <a:spcBef>
+                <a:spcPct val="0"/>
+              </a:spcBef>
+              <a:spcAft>
+                <a:spcPct val="0"/>
+              </a:spcAft>
+              <a:buClrTx/>
+              <a:buSzTx/>
+              <a:buFontTx/>
+              <a:buNone/>
+              <a:tabLst/>
+            </a:pPr>
+            <a:r>
+              <a:rPr kumimoji="0" lang="zh-CN" altLang="zh-CN" b="0" i="0" u="none" strike="noStrike" cap="none" normalizeH="0" baseline="0" dirty="0">
+                <a:ln>
+                  <a:noFill/>
+                </a:ln>
+                <a:solidFill>
+                  <a:srgbClr val="333333"/>
+                </a:solidFill>
+                <a:effectLst/>
+                <a:latin typeface="Open Sans" panose="020B0606030504020204" pitchFamily="34" charset="0"/>
+                <a:cs typeface="Open Sans" panose="020B0606030504020204" pitchFamily="34" charset="0"/>
+              </a:rPr>
+              <a:t>因为再卷，国家也不好筛选人才，你还累，没有意义。</a:t>
+            </a:r>
+            <a:endParaRPr kumimoji="0" lang="zh-CN" altLang="zh-CN" b="0" i="0" u="none" strike="noStrike" cap="none" normalizeH="0" baseline="0" dirty="0">
+              <a:ln>
+                <a:noFill/>
+              </a:ln>
+              <a:solidFill>
+                <a:schemeClr val="tx1"/>
+              </a:solidFill>
+              <a:effectLst/>
+            </a:endParaRPr>
+          </a:p>
+          <a:p>
+            <a:pPr marL="0" marR="0" lvl="0" indent="0" algn="l" defTabSz="914400" rtl="0" eaLnBrk="0" fontAlgn="base" latinLnBrk="0" hangingPunct="0">
+              <a:lnSpc>
+                <a:spcPct val="100000"/>
+              </a:lnSpc>
+              <a:spcBef>
+                <a:spcPct val="0"/>
+              </a:spcBef>
+              <a:spcAft>
+                <a:spcPct val="0"/>
+              </a:spcAft>
+              <a:buClrTx/>
+              <a:buSzTx/>
+              <a:buFontTx/>
+              <a:buNone/>
+              <a:tabLst/>
+            </a:pPr>
+            <a:r>
+              <a:rPr kumimoji="0" lang="zh-CN" altLang="zh-CN" b="0" i="0" u="none" strike="noStrike" cap="none" normalizeH="0" baseline="0" dirty="0">
+                <a:ln>
+                  <a:noFill/>
+                </a:ln>
+                <a:solidFill>
+                  <a:srgbClr val="333333"/>
+                </a:solidFill>
+                <a:effectLst/>
+                <a:latin typeface="Open Sans" panose="020B0606030504020204" pitchFamily="34" charset="0"/>
+                <a:cs typeface="Open Sans" panose="020B0606030504020204" pitchFamily="34" charset="0"/>
+              </a:rPr>
+              <a:t>所以现在的教育改革主流方向，就是让孩子们更轻松些，但学习难度却上了层次。</a:t>
+            </a:r>
+            <a:endParaRPr kumimoji="0" lang="zh-CN" altLang="zh-CN" b="0" i="0" u="none" strike="noStrike" cap="none" normalizeH="0" baseline="0" dirty="0">
+              <a:ln>
+                <a:noFill/>
+              </a:ln>
+              <a:solidFill>
+                <a:schemeClr val="tx1"/>
+              </a:solidFill>
+              <a:effectLst/>
+            </a:endParaRPr>
+          </a:p>
+          <a:p>
+            <a:pPr marL="0" marR="0" lvl="0" indent="0" algn="l" defTabSz="914400" rtl="0" eaLnBrk="0" fontAlgn="base" latinLnBrk="0" hangingPunct="0">
+              <a:lnSpc>
+                <a:spcPct val="100000"/>
+              </a:lnSpc>
+              <a:spcBef>
+                <a:spcPct val="0"/>
+              </a:spcBef>
+              <a:spcAft>
+                <a:spcPct val="0"/>
+              </a:spcAft>
+              <a:buClrTx/>
+              <a:buSzTx/>
+              <a:buFontTx/>
+              <a:buNone/>
+              <a:tabLst/>
+            </a:pPr>
+            <a:r>
+              <a:rPr kumimoji="0" lang="zh-CN" altLang="zh-CN" b="0" i="0" u="none" strike="noStrike" cap="none" normalizeH="0" baseline="0" dirty="0">
+                <a:ln>
+                  <a:noFill/>
+                </a:ln>
+                <a:solidFill>
+                  <a:srgbClr val="333333"/>
+                </a:solidFill>
+                <a:effectLst/>
+                <a:latin typeface="Open Sans" panose="020B0606030504020204" pitchFamily="34" charset="0"/>
+                <a:cs typeface="Open Sans" panose="020B0606030504020204" pitchFamily="34" charset="0"/>
+              </a:rPr>
+              <a:t>这才是真相，你现在明白了吗？</a:t>
+            </a:r>
+            <a:endParaRPr kumimoji="0" lang="zh-CN" altLang="zh-CN" b="0" i="0" u="none" strike="noStrike" cap="none" normalizeH="0" baseline="0" dirty="0">
+              <a:ln>
+                <a:noFill/>
+              </a:ln>
+              <a:solidFill>
+                <a:schemeClr val="tx1"/>
+              </a:solidFill>
+              <a:effectLst/>
+            </a:endParaRPr>
+          </a:p>
+          <a:p>
+            <a:pPr marL="0" marR="0" lvl="0" indent="0" algn="l" defTabSz="914400" rtl="0" eaLnBrk="0" fontAlgn="base" latinLnBrk="0" hangingPunct="0">
+              <a:lnSpc>
+                <a:spcPct val="100000"/>
+              </a:lnSpc>
+              <a:spcBef>
+                <a:spcPct val="0"/>
+              </a:spcBef>
+              <a:spcAft>
+                <a:spcPct val="0"/>
+              </a:spcAft>
+              <a:buClrTx/>
+              <a:buSzTx/>
+              <a:buFontTx/>
+              <a:buNone/>
+              <a:tabLst/>
+            </a:pPr>
+            <a:r>
+              <a:rPr kumimoji="0" lang="zh-CN" altLang="zh-CN" b="0" i="0" u="none" strike="noStrike" cap="none" normalizeH="0" baseline="0" dirty="0">
+                <a:ln>
+                  <a:noFill/>
+                </a:ln>
+                <a:solidFill>
+                  <a:srgbClr val="333333"/>
+                </a:solidFill>
+                <a:effectLst/>
+                <a:latin typeface="Open Sans" panose="020B0606030504020204" pitchFamily="34" charset="0"/>
+                <a:cs typeface="Open Sans" panose="020B0606030504020204" pitchFamily="34" charset="0"/>
+              </a:rPr>
+              <a:t>如果还执意要卷，那么大概率会导致孩子的心理健康问题。</a:t>
+            </a:r>
+            <a:endParaRPr kumimoji="0" lang="zh-CN" altLang="zh-CN" b="0" i="0" u="none" strike="noStrike" cap="none" normalizeH="0" baseline="0" dirty="0">
+              <a:ln>
+                <a:noFill/>
+              </a:ln>
+              <a:solidFill>
+                <a:schemeClr val="tx1"/>
+              </a:solidFill>
+              <a:effectLst/>
+            </a:endParaRPr>
           </a:p>
         </p:txBody>
       </p:sp>
@@ -4504,7 +5526,7 @@
 </p:sld>
 </file>
 
-<file path=ppt/slides/slide13.xml><?xml version="1.0" encoding="utf-8"?>
+<file path=ppt/slides/slide15.xml><?xml version="1.0" encoding="utf-8"?>
 <p:sld xmlns:a="http://schemas.openxmlformats.org/drawingml/2006/main" xmlns:r="http://schemas.openxmlformats.org/officeDocument/2006/relationships" xmlns:p="http://schemas.openxmlformats.org/presentationml/2006/main">
   <p:cSld>
     <p:spTree>
@@ -4543,8 +5565,8 @@
           <a:lstStyle/>
           <a:p>
             <a:r>
-              <a:rPr lang="zh-CN" altLang="en-US" dirty="0"/>
-              <a:t>爱和原生家庭之谬误</a:t>
+              <a:rPr lang="zh-CN" altLang="en-US" sz="4400" dirty="0"/>
+              <a:t>爱和原生家庭之谬误（一）</a:t>
             </a:r>
           </a:p>
         </p:txBody>
@@ -4565,7 +5587,12 @@
             <p:ph idx="1"/>
           </p:nvPr>
         </p:nvSpPr>
-        <p:spPr/>
+        <p:spPr>
+          <a:xfrm>
+            <a:off x="521208" y="1971675"/>
+            <a:ext cx="11155680" cy="4374261"/>
+          </a:xfrm>
+        </p:spPr>
         <p:txBody>
           <a:bodyPr/>
           <a:lstStyle/>
@@ -4574,7 +5601,7 @@
               <a:buNone/>
             </a:pPr>
             <a:r>
-              <a:rPr lang="zh-CN" altLang="en-US" dirty="0"/>
+              <a:rPr lang="zh-CN" altLang="en-US" sz="1800" dirty="0"/>
               <a:t>客体关系流派和自体心理学。</a:t>
             </a:r>
           </a:p>
@@ -4582,14 +5609,8 @@
             <a:pPr marL="0" indent="0">
               <a:buNone/>
             </a:pPr>
-            <a:endParaRPr lang="zh-CN" altLang="en-US" dirty="0"/>
-          </a:p>
-          <a:p>
-            <a:pPr marL="0" indent="0">
-              <a:buNone/>
-            </a:pPr>
-            <a:r>
-              <a:rPr lang="zh-CN" altLang="en-US" dirty="0"/>
+            <a:r>
+              <a:rPr lang="zh-CN" altLang="en-US" sz="1800" dirty="0"/>
               <a:t>客体关系是指母婴关系，研究人员发现没有处理母婴关系，比如母亲对婴儿的照料不够等等，会导致婴儿出现问题，比如说自卑。</a:t>
             </a:r>
           </a:p>
@@ -4597,14 +5618,8 @@
             <a:pPr marL="0" indent="0">
               <a:buNone/>
             </a:pPr>
-            <a:endParaRPr lang="zh-CN" altLang="en-US" dirty="0"/>
-          </a:p>
-          <a:p>
-            <a:pPr marL="0" indent="0">
-              <a:buNone/>
-            </a:pPr>
-            <a:r>
-              <a:rPr lang="zh-CN" altLang="en-US" dirty="0"/>
+            <a:r>
+              <a:rPr lang="zh-CN" altLang="en-US" sz="1800" dirty="0"/>
               <a:t>自体心理学也有类似的发现，只不过是指婴儿自已，就像照镜子一样看自已，如果过度自卑，或过度自恋，都会产生问题。</a:t>
             </a:r>
           </a:p>
@@ -4612,38 +5627,32 @@
             <a:pPr marL="0" indent="0">
               <a:buNone/>
             </a:pPr>
-            <a:endParaRPr lang="zh-CN" altLang="en-US" dirty="0"/>
-          </a:p>
-          <a:p>
-            <a:pPr marL="0" indent="0">
-              <a:buNone/>
-            </a:pPr>
-            <a:r>
-              <a:rPr lang="zh-CN" altLang="en-US" dirty="0"/>
+            <a:r>
+              <a:rPr lang="zh-CN" altLang="en-US" sz="1800" dirty="0"/>
               <a:t>但是不管是前者，还是后者，研究对象都是在</a:t>
             </a:r>
             <a:r>
-              <a:rPr lang="en-US" altLang="zh-CN" dirty="0"/>
+              <a:rPr lang="en-US" altLang="zh-CN" sz="1800" dirty="0"/>
               <a:t>3</a:t>
             </a:r>
             <a:r>
-              <a:rPr lang="zh-CN" altLang="en-US" dirty="0"/>
+              <a:rPr lang="zh-CN" altLang="en-US" sz="1800" dirty="0"/>
               <a:t>岁以内的，有些书上可能写</a:t>
             </a:r>
             <a:r>
-              <a:rPr lang="en-US" altLang="zh-CN" dirty="0"/>
+              <a:rPr lang="en-US" altLang="zh-CN" sz="1800" dirty="0"/>
               <a:t>5</a:t>
             </a:r>
             <a:r>
-              <a:rPr lang="zh-CN" altLang="en-US" dirty="0"/>
+              <a:rPr lang="zh-CN" altLang="en-US" sz="1800" dirty="0"/>
               <a:t>岁，最多</a:t>
             </a:r>
             <a:r>
-              <a:rPr lang="en-US" altLang="zh-CN" dirty="0"/>
+              <a:rPr lang="en-US" altLang="zh-CN" sz="1800" dirty="0"/>
               <a:t>7</a:t>
             </a:r>
             <a:r>
-              <a:rPr lang="zh-CN" altLang="en-US" dirty="0"/>
+              <a:rPr lang="zh-CN" altLang="en-US" sz="1800" dirty="0"/>
               <a:t>岁之前。</a:t>
             </a:r>
           </a:p>
@@ -4651,14 +5660,8 @@
             <a:pPr marL="0" indent="0">
               <a:buNone/>
             </a:pPr>
-            <a:endParaRPr lang="zh-CN" altLang="en-US" dirty="0"/>
-          </a:p>
-          <a:p>
-            <a:pPr marL="0" indent="0">
-              <a:buNone/>
-            </a:pPr>
-            <a:r>
-              <a:rPr lang="zh-CN" altLang="en-US" dirty="0"/>
+            <a:r>
+              <a:rPr lang="zh-CN" altLang="en-US" sz="1800" dirty="0"/>
               <a:t>实际上这些都是指孩子非常小的时候，需要母亲照顾的时候。</a:t>
             </a:r>
           </a:p>
@@ -4666,14 +5669,8 @@
             <a:pPr marL="0" indent="0">
               <a:buNone/>
             </a:pPr>
-            <a:endParaRPr lang="zh-CN" altLang="en-US" dirty="0"/>
-          </a:p>
-          <a:p>
-            <a:pPr marL="0" indent="0">
-              <a:buNone/>
-            </a:pPr>
-            <a:r>
-              <a:rPr lang="zh-CN" altLang="en-US" dirty="0"/>
+            <a:r>
+              <a:rPr lang="zh-CN" altLang="en-US" sz="1800" dirty="0"/>
               <a:t>这个母亲，并不一定是生理上的母亲，也可以是其他任何监护人，这里指的是母亲角色。</a:t>
             </a:r>
           </a:p>
@@ -4681,14 +5678,8 @@
             <a:pPr marL="0" indent="0">
               <a:buNone/>
             </a:pPr>
-            <a:endParaRPr lang="zh-CN" altLang="en-US" dirty="0"/>
-          </a:p>
-          <a:p>
-            <a:pPr marL="0" indent="0">
-              <a:buNone/>
-            </a:pPr>
-            <a:r>
-              <a:rPr lang="zh-CN" altLang="en-US" dirty="0"/>
+            <a:r>
+              <a:rPr lang="zh-CN" altLang="en-US" sz="1800" dirty="0"/>
               <a:t>比如有的孩子是奶奶照顾的，奶奶就是担任这个孩子的母亲角色。</a:t>
             </a:r>
           </a:p>
@@ -4696,22 +5687,16 @@
             <a:pPr marL="0" indent="0">
               <a:buNone/>
             </a:pPr>
-            <a:endParaRPr lang="zh-CN" altLang="en-US" dirty="0"/>
-          </a:p>
-          <a:p>
-            <a:pPr marL="0" indent="0">
-              <a:buNone/>
-            </a:pPr>
-            <a:r>
-              <a:rPr lang="zh-CN" altLang="en-US" dirty="0"/>
+            <a:r>
+              <a:rPr lang="zh-CN" altLang="en-US" sz="1800" dirty="0"/>
               <a:t>因此我们说，市面上讲的什么原生家庭之类的理论，或是其他的说法，他们都是照搬这些理论，但是却没有告诉你，其实那是指孩子</a:t>
             </a:r>
             <a:r>
-              <a:rPr lang="en-US" altLang="zh-CN" dirty="0"/>
+              <a:rPr lang="en-US" altLang="zh-CN" sz="1800" dirty="0"/>
               <a:t>3</a:t>
             </a:r>
             <a:r>
-              <a:rPr lang="zh-CN" altLang="en-US" dirty="0"/>
+              <a:rPr lang="zh-CN" altLang="en-US" sz="1800" dirty="0"/>
               <a:t>岁之前的事。</a:t>
             </a:r>
           </a:p>
@@ -4719,557 +5704,19 @@
             <a:pPr marL="0" indent="0">
               <a:buNone/>
             </a:pPr>
-            <a:endParaRPr lang="zh-CN" altLang="en-US" dirty="0"/>
-          </a:p>
-          <a:p>
-            <a:pPr marL="0" indent="0">
-              <a:buNone/>
-            </a:pPr>
-            <a:endParaRPr lang="zh-CN" altLang="en-US" dirty="0"/>
-          </a:p>
-          <a:p>
-            <a:pPr marL="0" indent="0">
-              <a:buNone/>
-            </a:pPr>
-            <a:endParaRPr lang="zh-CN" altLang="en-US" dirty="0"/>
-          </a:p>
-          <a:p>
-            <a:pPr marL="0" indent="0">
-              <a:buNone/>
-            </a:pPr>
-            <a:r>
-              <a:rPr lang="zh-CN" altLang="en-US" dirty="0"/>
-              <a:t>那么有人就说了，给孩子爱总没有错吧？</a:t>
-            </a:r>
-          </a:p>
-          <a:p>
-            <a:pPr marL="0" indent="0">
-              <a:buNone/>
-            </a:pPr>
-            <a:endParaRPr lang="zh-CN" altLang="en-US" dirty="0"/>
-          </a:p>
-          <a:p>
-            <a:pPr marL="0" indent="0">
-              <a:buNone/>
-            </a:pPr>
-            <a:r>
-              <a:rPr lang="zh-CN" altLang="en-US" dirty="0"/>
-              <a:t>实际上前面也说了，在孩子</a:t>
-            </a:r>
-            <a:r>
-              <a:rPr lang="en-US" altLang="zh-CN" dirty="0"/>
-              <a:t>3</a:t>
-            </a:r>
-            <a:r>
-              <a:rPr lang="zh-CN" altLang="en-US" dirty="0"/>
-              <a:t>岁之前，要确保对孩子的照料要到位，给的爱只要保证其拥有一定的安全感即可。</a:t>
-            </a:r>
-          </a:p>
-          <a:p>
-            <a:pPr marL="0" indent="0">
-              <a:buNone/>
-            </a:pPr>
-            <a:endParaRPr lang="zh-CN" altLang="en-US" dirty="0"/>
-          </a:p>
-          <a:p>
-            <a:pPr marL="0" indent="0">
-              <a:buNone/>
-            </a:pPr>
-            <a:r>
-              <a:rPr lang="zh-CN" altLang="en-US" dirty="0"/>
-              <a:t>但是</a:t>
-            </a:r>
-            <a:r>
-              <a:rPr lang="en-US" altLang="zh-CN" dirty="0"/>
-              <a:t>3</a:t>
-            </a:r>
-            <a:r>
-              <a:rPr lang="zh-CN" altLang="en-US" dirty="0"/>
-              <a:t>岁之后，我们就不能再谈爱了。</a:t>
-            </a:r>
-          </a:p>
-          <a:p>
-            <a:pPr marL="0" indent="0">
-              <a:buNone/>
-            </a:pPr>
-            <a:endParaRPr lang="zh-CN" altLang="en-US" dirty="0"/>
-          </a:p>
-          <a:p>
-            <a:pPr marL="0" indent="0">
-              <a:buNone/>
-            </a:pPr>
-            <a:r>
-              <a:rPr lang="zh-CN" altLang="en-US" dirty="0"/>
-              <a:t>并不是说不给孩子爱，而是要适当地给爱，甚至可以不给爱。</a:t>
-            </a:r>
-          </a:p>
-          <a:p>
-            <a:pPr marL="0" indent="0">
-              <a:buNone/>
-            </a:pPr>
-            <a:endParaRPr lang="zh-CN" altLang="en-US" dirty="0"/>
-          </a:p>
-          <a:p>
-            <a:pPr marL="0" indent="0">
-              <a:buNone/>
-            </a:pPr>
-            <a:r>
-              <a:rPr lang="zh-CN" altLang="en-US" dirty="0"/>
-              <a:t>为什么呢？</a:t>
-            </a:r>
-          </a:p>
-          <a:p>
-            <a:pPr marL="0" indent="0">
-              <a:buNone/>
-            </a:pPr>
-            <a:endParaRPr lang="zh-CN" altLang="en-US" dirty="0"/>
-          </a:p>
-          <a:p>
-            <a:pPr marL="0" indent="0">
-              <a:buNone/>
-            </a:pPr>
-            <a:endParaRPr lang="zh-CN" altLang="en-US" dirty="0"/>
-          </a:p>
-          <a:p>
-            <a:pPr marL="0" indent="0">
-              <a:buNone/>
-            </a:pPr>
-            <a:endParaRPr lang="zh-CN" altLang="en-US" dirty="0"/>
-          </a:p>
-          <a:p>
-            <a:pPr marL="0" indent="0">
-              <a:buNone/>
-            </a:pPr>
-            <a:r>
-              <a:rPr lang="zh-CN" altLang="en-US" dirty="0"/>
-              <a:t>我们要知道，人是一种社群生物。</a:t>
-            </a:r>
-          </a:p>
-          <a:p>
-            <a:pPr marL="0" indent="0">
-              <a:buNone/>
-            </a:pPr>
-            <a:endParaRPr lang="zh-CN" altLang="en-US" dirty="0"/>
-          </a:p>
-          <a:p>
-            <a:pPr marL="0" indent="0">
-              <a:buNone/>
-            </a:pPr>
-            <a:r>
-              <a:rPr lang="zh-CN" altLang="en-US" dirty="0"/>
-              <a:t>人类是以社会群体这样的形式生存在这个世界上的。</a:t>
-            </a:r>
-          </a:p>
-          <a:p>
-            <a:pPr marL="0" indent="0">
-              <a:buNone/>
-            </a:pPr>
-            <a:endParaRPr lang="zh-CN" altLang="en-US" dirty="0"/>
-          </a:p>
-          <a:p>
-            <a:pPr marL="0" indent="0">
-              <a:buNone/>
-            </a:pPr>
-            <a:r>
-              <a:rPr lang="zh-CN" altLang="en-US" dirty="0"/>
-              <a:t>因此，人最终是要进入社会的。</a:t>
-            </a:r>
-          </a:p>
-          <a:p>
-            <a:pPr marL="0" indent="0">
-              <a:buNone/>
-            </a:pPr>
-            <a:endParaRPr lang="zh-CN" altLang="en-US" dirty="0"/>
-          </a:p>
-          <a:p>
-            <a:pPr marL="0" indent="0">
-              <a:buNone/>
-            </a:pPr>
-            <a:r>
-              <a:rPr lang="zh-CN" altLang="en-US" dirty="0"/>
-              <a:t>孩子在</a:t>
-            </a:r>
-            <a:r>
-              <a:rPr lang="en-US" altLang="zh-CN" dirty="0"/>
-              <a:t>3</a:t>
-            </a:r>
-            <a:r>
-              <a:rPr lang="zh-CN" altLang="en-US" dirty="0"/>
-              <a:t>岁之后，就已经开始进入社会了。</a:t>
-            </a:r>
-          </a:p>
-          <a:p>
-            <a:pPr marL="0" indent="0">
-              <a:buNone/>
-            </a:pPr>
-            <a:endParaRPr lang="zh-CN" altLang="en-US" dirty="0"/>
-          </a:p>
-          <a:p>
-            <a:pPr marL="0" indent="0">
-              <a:buNone/>
-            </a:pPr>
-            <a:r>
-              <a:rPr lang="en-US" altLang="zh-CN" dirty="0"/>
-              <a:t>3</a:t>
-            </a:r>
-            <a:r>
-              <a:rPr lang="zh-CN" altLang="en-US" dirty="0"/>
-              <a:t>岁之后，孩子会上幼儿园，这时他就会接触到家庭以外的人，老师和其他小朋友。</a:t>
-            </a:r>
-          </a:p>
-          <a:p>
-            <a:pPr marL="0" indent="0">
-              <a:buNone/>
-            </a:pPr>
-            <a:endParaRPr lang="zh-CN" altLang="en-US" dirty="0"/>
-          </a:p>
-          <a:p>
-            <a:pPr marL="0" indent="0">
-              <a:buNone/>
-            </a:pPr>
-            <a:r>
-              <a:rPr lang="zh-CN" altLang="en-US" dirty="0"/>
-              <a:t>这个时候，对于孩子来说，家庭父母的影响就会慢慢减少，家庭外的人对他的影响就会慢慢变大。</a:t>
-            </a:r>
-          </a:p>
-          <a:p>
-            <a:pPr marL="0" indent="0">
-              <a:buNone/>
-            </a:pPr>
-            <a:endParaRPr lang="zh-CN" altLang="en-US" dirty="0"/>
-          </a:p>
-          <a:p>
-            <a:pPr marL="0" indent="0">
-              <a:buNone/>
-            </a:pPr>
-            <a:r>
-              <a:rPr lang="zh-CN" altLang="en-US" dirty="0"/>
-              <a:t>在解决好安全感问题之后，孩子就会尝试走向家庭外。</a:t>
-            </a:r>
-          </a:p>
-          <a:p>
-            <a:pPr marL="0" indent="0">
-              <a:buNone/>
-            </a:pPr>
-            <a:endParaRPr lang="zh-CN" altLang="en-US" dirty="0"/>
-          </a:p>
-          <a:p>
-            <a:pPr marL="0" indent="0">
-              <a:buNone/>
-            </a:pPr>
-            <a:r>
-              <a:rPr lang="zh-CN" altLang="en-US" dirty="0"/>
-              <a:t>在这个过程中，越是在家庭中讲爱，越可能会给孩子帮倒忙。</a:t>
-            </a:r>
-          </a:p>
-          <a:p>
-            <a:pPr marL="0" indent="0">
-              <a:buNone/>
-            </a:pPr>
-            <a:endParaRPr lang="zh-CN" altLang="en-US" dirty="0"/>
-          </a:p>
-          <a:p>
-            <a:pPr marL="0" indent="0">
-              <a:buNone/>
-            </a:pPr>
-            <a:r>
-              <a:rPr lang="zh-CN" altLang="en-US" dirty="0"/>
-              <a:t>我们当家长的都有一个体会，就会孩子越大越不听自已的了。</a:t>
-            </a:r>
-          </a:p>
-          <a:p>
-            <a:pPr marL="0" indent="0">
-              <a:buNone/>
-            </a:pPr>
-            <a:endParaRPr lang="zh-CN" altLang="en-US" dirty="0"/>
-          </a:p>
-          <a:p>
-            <a:pPr marL="0" indent="0">
-              <a:buNone/>
-            </a:pPr>
-            <a:r>
-              <a:rPr lang="zh-CN" altLang="en-US" dirty="0"/>
-              <a:t>其实就是这个原因。</a:t>
-            </a:r>
-          </a:p>
-          <a:p>
-            <a:pPr marL="0" indent="0">
-              <a:buNone/>
-            </a:pPr>
-            <a:endParaRPr lang="zh-CN" altLang="en-US" dirty="0"/>
-          </a:p>
-          <a:p>
-            <a:pPr marL="0" indent="0">
-              <a:buNone/>
-            </a:pPr>
-            <a:r>
-              <a:rPr lang="zh-CN" altLang="en-US" dirty="0"/>
-              <a:t>因为人只会听群体的，不会听一个已经确认是安全环境下的人的话的。</a:t>
-            </a:r>
-          </a:p>
-          <a:p>
-            <a:pPr marL="0" indent="0">
-              <a:buNone/>
-            </a:pPr>
-            <a:endParaRPr lang="zh-CN" altLang="en-US" dirty="0"/>
-          </a:p>
-          <a:p>
-            <a:pPr marL="0" indent="0">
-              <a:buNone/>
-            </a:pPr>
-            <a:r>
-              <a:rPr lang="zh-CN" altLang="en-US" dirty="0"/>
-              <a:t>请记住，任何的社群生物，他都只会听从那个不安全环境下群体的话。</a:t>
-            </a:r>
-          </a:p>
-          <a:p>
-            <a:pPr marL="0" indent="0">
-              <a:buNone/>
-            </a:pPr>
-            <a:endParaRPr lang="zh-CN" altLang="en-US" dirty="0"/>
-          </a:p>
-          <a:p>
-            <a:pPr marL="0" indent="0">
-              <a:buNone/>
-            </a:pPr>
-            <a:endParaRPr lang="zh-CN" altLang="en-US" dirty="0"/>
-          </a:p>
-          <a:p>
-            <a:pPr marL="0" indent="0">
-              <a:buNone/>
-            </a:pPr>
-            <a:endParaRPr lang="zh-CN" altLang="en-US" dirty="0"/>
-          </a:p>
-          <a:p>
-            <a:pPr marL="0" indent="0">
-              <a:buNone/>
-            </a:pPr>
-            <a:r>
-              <a:rPr lang="zh-CN" altLang="en-US" dirty="0"/>
-              <a:t>你父母给孩子爱，爱得越多，越容易娇生惯养。</a:t>
-            </a:r>
-          </a:p>
-          <a:p>
-            <a:pPr marL="0" indent="0">
-              <a:buNone/>
-            </a:pPr>
-            <a:endParaRPr lang="zh-CN" altLang="en-US" dirty="0"/>
-          </a:p>
-          <a:p>
-            <a:pPr marL="0" indent="0">
-              <a:buNone/>
-            </a:pPr>
-            <a:r>
-              <a:rPr lang="zh-CN" altLang="en-US" dirty="0"/>
-              <a:t>道德经讲，反者道之动，弱者道之用。</a:t>
-            </a:r>
-          </a:p>
-          <a:p>
-            <a:pPr marL="0" indent="0">
-              <a:buNone/>
-            </a:pPr>
-            <a:endParaRPr lang="zh-CN" altLang="en-US" dirty="0"/>
-          </a:p>
-          <a:p>
-            <a:pPr marL="0" indent="0">
-              <a:buNone/>
-            </a:pPr>
-            <a:r>
-              <a:rPr lang="zh-CN" altLang="en-US" dirty="0"/>
-              <a:t>任何事物都是向其反方向发展的。</a:t>
-            </a:r>
-          </a:p>
-          <a:p>
-            <a:pPr marL="0" indent="0">
-              <a:buNone/>
-            </a:pPr>
-            <a:endParaRPr lang="zh-CN" altLang="en-US" dirty="0"/>
-          </a:p>
-          <a:p>
-            <a:pPr marL="0" indent="0">
-              <a:buNone/>
-            </a:pPr>
-            <a:r>
-              <a:rPr lang="zh-CN" altLang="en-US" dirty="0"/>
-              <a:t>你给孩子爱，只要一过度，那么他就会朝着反方向发展。</a:t>
-            </a:r>
-          </a:p>
-          <a:p>
-            <a:pPr marL="0" indent="0">
-              <a:buNone/>
-            </a:pPr>
-            <a:endParaRPr lang="zh-CN" altLang="en-US" dirty="0"/>
-          </a:p>
-          <a:p>
-            <a:pPr marL="0" indent="0">
-              <a:buNone/>
-            </a:pPr>
-            <a:r>
-              <a:rPr lang="zh-CN" altLang="en-US" dirty="0"/>
-              <a:t>古代就有恩生于害，害生于恩的老话。</a:t>
-            </a:r>
-          </a:p>
-          <a:p>
-            <a:pPr marL="0" indent="0">
-              <a:buNone/>
-            </a:pPr>
-            <a:endParaRPr lang="zh-CN" altLang="en-US" dirty="0"/>
-          </a:p>
-          <a:p>
-            <a:pPr marL="0" indent="0">
-              <a:buNone/>
-            </a:pPr>
-            <a:r>
-              <a:rPr lang="zh-CN" altLang="en-US" dirty="0"/>
-              <a:t>所以我们家长一定要懂这里的道理，一定要看清网络上说的，给孩子爱，孩子的爱不够，要完全接纳孩子，这类的谎言。</a:t>
-            </a:r>
-          </a:p>
-          <a:p>
-            <a:pPr marL="0" indent="0">
-              <a:buNone/>
-            </a:pPr>
-            <a:endParaRPr lang="zh-CN" altLang="en-US" dirty="0"/>
-          </a:p>
-          <a:p>
-            <a:pPr marL="0" indent="0">
-              <a:buNone/>
-            </a:pPr>
-            <a:endParaRPr lang="zh-CN" altLang="en-US" dirty="0"/>
-          </a:p>
-          <a:p>
-            <a:pPr marL="0" indent="0">
-              <a:buNone/>
-            </a:pPr>
-            <a:endParaRPr lang="zh-CN" altLang="en-US" dirty="0"/>
-          </a:p>
-          <a:p>
-            <a:pPr marL="0" indent="0">
-              <a:buNone/>
-            </a:pPr>
-            <a:r>
-              <a:rPr lang="zh-CN" altLang="en-US" dirty="0"/>
-              <a:t>原生家庭的概念，它是一个不严谨不专业的词，在世界任何一本大学教材中都不存在。</a:t>
-            </a:r>
-          </a:p>
-          <a:p>
-            <a:pPr marL="0" indent="0">
-              <a:buNone/>
-            </a:pPr>
-            <a:endParaRPr lang="zh-CN" altLang="en-US" dirty="0"/>
-          </a:p>
-          <a:p>
-            <a:pPr marL="0" indent="0">
-              <a:buNone/>
-            </a:pPr>
-            <a:r>
-              <a:rPr lang="zh-CN" altLang="en-US" dirty="0"/>
-              <a:t>其实网络上流传的原生家庭概念，实际是指父母对待孩子的教养方式。</a:t>
-            </a:r>
-          </a:p>
-          <a:p>
-            <a:pPr marL="0" indent="0">
-              <a:buNone/>
-            </a:pPr>
-            <a:endParaRPr lang="zh-CN" altLang="en-US" dirty="0"/>
-          </a:p>
-          <a:p>
-            <a:pPr marL="0" indent="0">
-              <a:buNone/>
-            </a:pPr>
-            <a:r>
-              <a:rPr lang="zh-CN" altLang="en-US" dirty="0"/>
-              <a:t>当然后来又混合杂糅了家庭经济条件都乱七八糟的东西。</a:t>
-            </a:r>
-          </a:p>
-          <a:p>
-            <a:pPr marL="0" indent="0">
-              <a:buNone/>
-            </a:pPr>
-            <a:endParaRPr lang="zh-CN" altLang="en-US" dirty="0"/>
-          </a:p>
-          <a:p>
-            <a:pPr marL="0" indent="0">
-              <a:buNone/>
-            </a:pPr>
-            <a:r>
-              <a:rPr lang="zh-CN" altLang="en-US" dirty="0"/>
-              <a:t>实际上父母的教养方式，并不是我们必须刻意要关注的东西。</a:t>
-            </a:r>
-          </a:p>
-          <a:p>
-            <a:pPr marL="0" indent="0">
-              <a:buNone/>
-            </a:pPr>
-            <a:endParaRPr lang="zh-CN" altLang="en-US" dirty="0"/>
-          </a:p>
-          <a:p>
-            <a:pPr marL="0" indent="0">
-              <a:buNone/>
-            </a:pPr>
-            <a:r>
-              <a:rPr lang="zh-CN" altLang="en-US" dirty="0"/>
-              <a:t>什么意思呢？</a:t>
-            </a:r>
-          </a:p>
-          <a:p>
-            <a:pPr marL="0" indent="0">
-              <a:buNone/>
-            </a:pPr>
-            <a:endParaRPr lang="zh-CN" altLang="en-US" dirty="0"/>
-          </a:p>
-          <a:p>
-            <a:pPr marL="0" indent="0">
-              <a:buNone/>
-            </a:pPr>
-            <a:r>
-              <a:rPr lang="zh-CN" altLang="en-US" dirty="0"/>
-              <a:t>就是说，父母是采取打骂，还是温柔对待，都不是关键问题。</a:t>
-            </a:r>
-          </a:p>
-          <a:p>
-            <a:pPr marL="0" indent="0">
-              <a:buNone/>
-            </a:pPr>
-            <a:endParaRPr lang="zh-CN" altLang="en-US" dirty="0"/>
-          </a:p>
-          <a:p>
-            <a:pPr marL="0" indent="0">
-              <a:buNone/>
-            </a:pPr>
-            <a:r>
-              <a:rPr lang="zh-CN" altLang="en-US" dirty="0"/>
-              <a:t>这些形式不决定孩子一定会有所改变，或将来会按照你设想的方向发展。</a:t>
-            </a:r>
-          </a:p>
-          <a:p>
-            <a:pPr marL="0" indent="0">
-              <a:buNone/>
-            </a:pPr>
-            <a:endParaRPr lang="zh-CN" altLang="en-US" dirty="0"/>
-          </a:p>
-          <a:p>
-            <a:pPr marL="0" indent="0">
-              <a:buNone/>
-            </a:pPr>
-            <a:r>
-              <a:rPr lang="zh-CN" altLang="en-US" dirty="0"/>
-              <a:t>因为关键决定因素不是这些，而是另一个东西。</a:t>
-            </a:r>
-          </a:p>
-          <a:p>
-            <a:pPr marL="0" indent="0">
-              <a:buNone/>
-            </a:pPr>
-            <a:endParaRPr lang="zh-CN" altLang="en-US" dirty="0"/>
-          </a:p>
-          <a:p>
-            <a:pPr marL="0" indent="0">
-              <a:buNone/>
-            </a:pPr>
-            <a:r>
-              <a:rPr lang="zh-CN" altLang="en-US" dirty="0"/>
-              <a:t>这个东西，叫作社会环境影响。</a:t>
-            </a:r>
+            <a:endParaRPr lang="zh-CN" altLang="en-US" sz="1800" dirty="0"/>
+          </a:p>
+          <a:p>
+            <a:pPr marL="0" indent="0">
+              <a:buNone/>
+            </a:pPr>
+            <a:endParaRPr lang="zh-CN" altLang="en-US" sz="1800" dirty="0"/>
+          </a:p>
+          <a:p>
+            <a:pPr marL="0" indent="0">
+              <a:buNone/>
+            </a:pPr>
+            <a:endParaRPr lang="zh-CN" altLang="en-US" sz="1800" dirty="0"/>
           </a:p>
         </p:txBody>
       </p:sp>
@@ -5286,7 +5733,7 @@
 </p:sld>
 </file>
 
-<file path=ppt/slides/slide14.xml><?xml version="1.0" encoding="utf-8"?>
+<file path=ppt/slides/slide16.xml><?xml version="1.0" encoding="utf-8"?>
 <p:sld xmlns:a="http://schemas.openxmlformats.org/drawingml/2006/main" xmlns:r="http://schemas.openxmlformats.org/officeDocument/2006/relationships" xmlns:p="http://schemas.openxmlformats.org/presentationml/2006/main">
   <p:cSld>
     <p:spTree>
@@ -5331,8 +5778,8 @@
           <a:lstStyle/>
           <a:p>
             <a:r>
-              <a:rPr lang="zh-CN" altLang="en-US" dirty="0"/>
-              <a:t>爱和原生家庭之谬误</a:t>
+              <a:rPr lang="zh-CN" altLang="en-US" sz="4400" dirty="0"/>
+              <a:t>爱和原生家庭之谬误（二）</a:t>
             </a:r>
           </a:p>
         </p:txBody>
@@ -5357,6 +5804,91 @@
         <p:txBody>
           <a:bodyPr/>
           <a:lstStyle/>
+          <a:p>
+            <a:pPr marL="0" indent="0">
+              <a:buNone/>
+            </a:pPr>
+            <a:r>
+              <a:rPr lang="zh-CN" altLang="en-US" dirty="0"/>
+              <a:t>那么有人就说了，给孩子爱总没有错吧？</a:t>
+            </a:r>
+          </a:p>
+          <a:p>
+            <a:pPr marL="0" indent="0">
+              <a:buNone/>
+            </a:pPr>
+            <a:r>
+              <a:rPr lang="zh-CN" altLang="en-US" dirty="0"/>
+              <a:t>实际上前面也说了，在孩子</a:t>
+            </a:r>
+            <a:r>
+              <a:rPr lang="en-US" altLang="zh-CN" dirty="0"/>
+              <a:t>3</a:t>
+            </a:r>
+            <a:r>
+              <a:rPr lang="zh-CN" altLang="en-US" dirty="0"/>
+              <a:t>岁之前，要确保对孩子的照料要到位，给的爱只要保证其拥有一定的安全感即可。</a:t>
+            </a:r>
+          </a:p>
+          <a:p>
+            <a:pPr marL="0" indent="0">
+              <a:buNone/>
+            </a:pPr>
+            <a:r>
+              <a:rPr lang="zh-CN" altLang="en-US" dirty="0"/>
+              <a:t>但是</a:t>
+            </a:r>
+            <a:r>
+              <a:rPr lang="en-US" altLang="zh-CN" dirty="0"/>
+              <a:t>3</a:t>
+            </a:r>
+            <a:r>
+              <a:rPr lang="zh-CN" altLang="en-US" dirty="0"/>
+              <a:t>岁之后，我们就不能再谈爱了。</a:t>
+            </a:r>
+          </a:p>
+          <a:p>
+            <a:pPr marL="0" indent="0">
+              <a:buNone/>
+            </a:pPr>
+            <a:r>
+              <a:rPr lang="zh-CN" altLang="en-US" dirty="0"/>
+              <a:t>并不是说不给孩子爱，而是要适当地给爱，甚至可以不给爱。</a:t>
+            </a:r>
+          </a:p>
+          <a:p>
+            <a:pPr marL="0" indent="0">
+              <a:buNone/>
+            </a:pPr>
+            <a:endParaRPr lang="en-US" altLang="zh-CN" dirty="0"/>
+          </a:p>
+          <a:p>
+            <a:pPr marL="0" indent="0">
+              <a:buNone/>
+            </a:pPr>
+            <a:r>
+              <a:rPr lang="zh-CN" altLang="en-US" dirty="0"/>
+              <a:t>为什么呢？</a:t>
+            </a:r>
+          </a:p>
+          <a:p>
+            <a:pPr marL="0" indent="0">
+              <a:buNone/>
+            </a:pPr>
+            <a:endParaRPr lang="zh-CN" altLang="en-US" dirty="0"/>
+          </a:p>
+          <a:p>
+            <a:pPr marL="0" indent="0">
+              <a:buNone/>
+            </a:pPr>
+            <a:endParaRPr lang="zh-CN" altLang="en-US" dirty="0"/>
+          </a:p>
+          <a:p>
+            <a:pPr marL="0" indent="0">
+              <a:buNone/>
+            </a:pPr>
+            <a:endParaRPr lang="zh-CN" altLang="en-US" dirty="0"/>
+          </a:p>
           <a:p>
             <a:pPr marL="0" indent="0">
               <a:buNone/>
@@ -5378,7 +5910,7 @@
 </p:sld>
 </file>
 
-<file path=ppt/slides/slide15.xml><?xml version="1.0" encoding="utf-8"?>
+<file path=ppt/slides/slide17.xml><?xml version="1.0" encoding="utf-8"?>
 <p:sld xmlns:a="http://schemas.openxmlformats.org/drawingml/2006/main" xmlns:r="http://schemas.openxmlformats.org/officeDocument/2006/relationships" xmlns:p="http://schemas.openxmlformats.org/presentationml/2006/main">
   <p:cSld>
     <p:spTree>
@@ -5423,8 +5955,8 @@
           <a:lstStyle/>
           <a:p>
             <a:r>
-              <a:rPr lang="zh-CN" altLang="en-US" dirty="0"/>
-              <a:t>爱和原生家庭之谬误</a:t>
+              <a:rPr lang="zh-CN" altLang="en-US" sz="4400" dirty="0"/>
+              <a:t>爱和原生家庭之谬误（三）</a:t>
             </a:r>
           </a:p>
         </p:txBody>
@@ -5445,7 +5977,12 @@
             <p:ph idx="1"/>
           </p:nvPr>
         </p:nvSpPr>
-        <p:spPr/>
+        <p:spPr>
+          <a:xfrm>
+            <a:off x="521208" y="1814513"/>
+            <a:ext cx="11155680" cy="4914900"/>
+          </a:xfrm>
+        </p:spPr>
         <p:txBody>
           <a:bodyPr/>
           <a:lstStyle/>
@@ -5453,7 +5990,137 @@
             <a:pPr marL="0" indent="0">
               <a:buNone/>
             </a:pPr>
-            <a:endParaRPr lang="zh-CN" altLang="en-US" dirty="0"/>
+            <a:r>
+              <a:rPr lang="zh-CN" altLang="en-US" sz="1800" dirty="0"/>
+              <a:t>我们要知道，人是一种社群生物。人类是以社会群体这样的形式生存在这个世界上的。</a:t>
+            </a:r>
+          </a:p>
+          <a:p>
+            <a:pPr marL="0" indent="0">
+              <a:buNone/>
+            </a:pPr>
+            <a:r>
+              <a:rPr lang="zh-CN" altLang="en-US" sz="1800" dirty="0"/>
+              <a:t>因此，人最终是要进入社会的。</a:t>
+            </a:r>
+          </a:p>
+          <a:p>
+            <a:pPr marL="0" indent="0">
+              <a:buNone/>
+            </a:pPr>
+            <a:r>
+              <a:rPr lang="zh-CN" altLang="en-US" sz="1800" dirty="0"/>
+              <a:t>孩子在</a:t>
+            </a:r>
+            <a:r>
+              <a:rPr lang="en-US" altLang="zh-CN" sz="1800" dirty="0"/>
+              <a:t>3</a:t>
+            </a:r>
+            <a:r>
+              <a:rPr lang="zh-CN" altLang="en-US" sz="1800" dirty="0"/>
+              <a:t>岁之后，就已经开始进入社会了。</a:t>
+            </a:r>
+            <a:r>
+              <a:rPr lang="en-US" altLang="zh-CN" sz="1800" dirty="0"/>
+              <a:t>3</a:t>
+            </a:r>
+            <a:r>
+              <a:rPr lang="zh-CN" altLang="en-US" sz="1800" dirty="0"/>
+              <a:t>岁之后，孩子会上幼儿园，这时他就会接触到家庭以外的人，老师和其他小朋友。</a:t>
+            </a:r>
+          </a:p>
+          <a:p>
+            <a:pPr marL="0" indent="0">
+              <a:buNone/>
+            </a:pPr>
+            <a:r>
+              <a:rPr lang="zh-CN" altLang="en-US" sz="1800" dirty="0"/>
+              <a:t>这个时候，对于孩子来说，家庭父母的影响就会慢慢减少，家庭外的人对他的影响就会慢慢变大。</a:t>
+            </a:r>
+          </a:p>
+          <a:p>
+            <a:pPr marL="0" indent="0">
+              <a:buNone/>
+            </a:pPr>
+            <a:r>
+              <a:rPr lang="zh-CN" altLang="en-US" sz="1800" dirty="0"/>
+              <a:t>在解决好安全感问题之后，孩子就会尝试走向家庭外。</a:t>
+            </a:r>
+          </a:p>
+          <a:p>
+            <a:pPr marL="0" indent="0">
+              <a:buNone/>
+            </a:pPr>
+            <a:r>
+              <a:rPr lang="zh-CN" altLang="en-US" sz="1800" dirty="0"/>
+              <a:t>在这个过程中，越是在家庭中讲爱，越可能会给孩子帮倒忙。</a:t>
+            </a:r>
+          </a:p>
+          <a:p>
+            <a:pPr marL="0" indent="0">
+              <a:buNone/>
+            </a:pPr>
+            <a:r>
+              <a:rPr lang="zh-CN" altLang="en-US" sz="1800" dirty="0"/>
+              <a:t>我们当家长的都有一个体会，就会孩子越大越不听自已的了。</a:t>
+            </a:r>
+          </a:p>
+          <a:p>
+            <a:pPr marL="0" indent="0">
+              <a:buNone/>
+            </a:pPr>
+            <a:r>
+              <a:rPr lang="zh-CN" altLang="en-US" sz="1800" dirty="0"/>
+              <a:t>其实就是这个原因。</a:t>
+            </a:r>
+          </a:p>
+          <a:p>
+            <a:pPr marL="0" indent="0">
+              <a:buNone/>
+            </a:pPr>
+            <a:r>
+              <a:rPr lang="zh-CN" altLang="en-US" sz="1800" dirty="0"/>
+              <a:t>因为人只会听群体的，不会听一个已经确认是安全环境下的人的话的。</a:t>
+            </a:r>
+          </a:p>
+          <a:p>
+            <a:pPr marL="0" indent="0">
+              <a:buNone/>
+            </a:pPr>
+            <a:r>
+              <a:rPr lang="zh-CN" altLang="en-US" sz="1800" dirty="0"/>
+              <a:t>请记住，任何的社群生物，他都只会听从那个不安全环境下群体的话。</a:t>
+            </a:r>
+          </a:p>
+          <a:p>
+            <a:pPr marL="0" indent="0">
+              <a:buNone/>
+            </a:pPr>
+            <a:endParaRPr lang="zh-CN" altLang="en-US" sz="1800" dirty="0"/>
+          </a:p>
+          <a:p>
+            <a:pPr marL="0" indent="0">
+              <a:buNone/>
+            </a:pPr>
+            <a:endParaRPr lang="zh-CN" altLang="en-US" sz="1800" dirty="0"/>
+          </a:p>
+          <a:p>
+            <a:pPr marL="0" indent="0">
+              <a:buNone/>
+            </a:pPr>
+            <a:endParaRPr lang="zh-CN" altLang="en-US" sz="1800" dirty="0"/>
+          </a:p>
+          <a:p>
+            <a:pPr marL="0" indent="0">
+              <a:buNone/>
+            </a:pPr>
+            <a:endParaRPr lang="zh-CN" altLang="en-US" sz="1800" dirty="0"/>
+          </a:p>
+          <a:p>
+            <a:pPr marL="0" indent="0">
+              <a:buNone/>
+            </a:pPr>
+            <a:endParaRPr lang="zh-CN" altLang="en-US" sz="1800" dirty="0"/>
           </a:p>
         </p:txBody>
       </p:sp>
@@ -5470,7 +6137,7 @@
 </p:sld>
 </file>
 
-<file path=ppt/slides/slide16.xml><?xml version="1.0" encoding="utf-8"?>
+<file path=ppt/slides/slide18.xml><?xml version="1.0" encoding="utf-8"?>
 <p:sld xmlns:a="http://schemas.openxmlformats.org/drawingml/2006/main" xmlns:r="http://schemas.openxmlformats.org/officeDocument/2006/relationships" xmlns:p="http://schemas.openxmlformats.org/presentationml/2006/main">
   <p:cSld>
     <p:spTree>
@@ -5515,8 +6182,8 @@
           <a:lstStyle/>
           <a:p>
             <a:r>
-              <a:rPr lang="zh-CN" altLang="en-US" dirty="0"/>
-              <a:t>爱和原生家庭之谬误</a:t>
+              <a:rPr lang="zh-CN" altLang="en-US" sz="4400" dirty="0"/>
+              <a:t>爱和原生家庭之谬误（四）</a:t>
             </a:r>
           </a:p>
         </p:txBody>
@@ -5541,6 +6208,78 @@
         <p:txBody>
           <a:bodyPr/>
           <a:lstStyle/>
+          <a:p>
+            <a:pPr marL="0" indent="0">
+              <a:buNone/>
+            </a:pPr>
+            <a:r>
+              <a:rPr lang="zh-CN" altLang="en-US" dirty="0"/>
+              <a:t>你父母给孩子爱，爱得越多，越容易娇生惯养。</a:t>
+            </a:r>
+          </a:p>
+          <a:p>
+            <a:pPr marL="0" indent="0">
+              <a:buNone/>
+            </a:pPr>
+            <a:r>
+              <a:rPr lang="zh-CN" altLang="en-US" dirty="0"/>
+              <a:t>道德经讲，反者道之动，弱者道之用。</a:t>
+            </a:r>
+          </a:p>
+          <a:p>
+            <a:pPr marL="0" indent="0">
+              <a:buNone/>
+            </a:pPr>
+            <a:r>
+              <a:rPr lang="zh-CN" altLang="en-US" dirty="0"/>
+              <a:t>任何事物都是向其反方向发展的。</a:t>
+            </a:r>
+          </a:p>
+          <a:p>
+            <a:pPr marL="0" indent="0">
+              <a:buNone/>
+            </a:pPr>
+            <a:r>
+              <a:rPr lang="zh-CN" altLang="en-US" dirty="0"/>
+              <a:t>你给孩子爱，只要一过度，那么他就会朝着反方向发展。</a:t>
+            </a:r>
+          </a:p>
+          <a:p>
+            <a:pPr marL="0" indent="0">
+              <a:buNone/>
+            </a:pPr>
+            <a:r>
+              <a:rPr lang="zh-CN" altLang="en-US" dirty="0"/>
+              <a:t>古代就有恩生于害，害生于恩的老话。</a:t>
+            </a:r>
+          </a:p>
+          <a:p>
+            <a:pPr marL="0" indent="0">
+              <a:buNone/>
+            </a:pPr>
+            <a:r>
+              <a:rPr lang="zh-CN" altLang="en-US" dirty="0"/>
+              <a:t>所以我们家长一定要懂这里的道理，一定要看清网络上说的，给孩子爱，孩子的爱不够，要完全接纳孩子，这类的谎言。</a:t>
+            </a:r>
+          </a:p>
+          <a:p>
+            <a:pPr marL="0" indent="0">
+              <a:buNone/>
+            </a:pPr>
+            <a:endParaRPr lang="zh-CN" altLang="en-US" dirty="0"/>
+          </a:p>
+          <a:p>
+            <a:pPr marL="0" indent="0">
+              <a:buNone/>
+            </a:pPr>
+            <a:endParaRPr lang="zh-CN" altLang="en-US" dirty="0"/>
+          </a:p>
+          <a:p>
+            <a:pPr marL="0" indent="0">
+              <a:buNone/>
+            </a:pPr>
+            <a:endParaRPr lang="zh-CN" altLang="en-US" dirty="0"/>
+          </a:p>
           <a:p>
             <a:pPr marL="0" indent="0">
               <a:buNone/>
@@ -5562,7 +6301,7 @@
 </p:sld>
 </file>
 
-<file path=ppt/slides/slide17.xml><?xml version="1.0" encoding="utf-8"?>
+<file path=ppt/slides/slide19.xml><?xml version="1.0" encoding="utf-8"?>
 <p:sld xmlns:a="http://schemas.openxmlformats.org/drawingml/2006/main" xmlns:r="http://schemas.openxmlformats.org/officeDocument/2006/relationships" xmlns:p="http://schemas.openxmlformats.org/presentationml/2006/main">
   <p:cSld>
     <p:spTree>
@@ -5607,8 +6346,8 @@
           <a:lstStyle/>
           <a:p>
             <a:r>
-              <a:rPr lang="zh-CN" altLang="en-US" dirty="0"/>
-              <a:t>爱和原生家庭之谬误</a:t>
+              <a:rPr lang="zh-CN" altLang="en-US" sz="4400" dirty="0"/>
+              <a:t>爱和原生家庭之谬误（五）</a:t>
             </a:r>
           </a:p>
         </p:txBody>
@@ -5629,7 +6368,12 @@
             <p:ph idx="1"/>
           </p:nvPr>
         </p:nvSpPr>
-        <p:spPr/>
+        <p:spPr>
+          <a:xfrm>
+            <a:off x="521208" y="2000250"/>
+            <a:ext cx="11155680" cy="4345686"/>
+          </a:xfrm>
+        </p:spPr>
         <p:txBody>
           <a:bodyPr/>
           <a:lstStyle/>
@@ -5637,7 +6381,82 @@
             <a:pPr marL="0" indent="0">
               <a:buNone/>
             </a:pPr>
-            <a:endParaRPr lang="zh-CN" altLang="en-US" dirty="0"/>
+            <a:r>
+              <a:rPr lang="zh-CN" altLang="en-US" dirty="0"/>
+              <a:t>原生家庭的概念，它是一个不严谨不专业的词，在世界任何一本大学教材中都不存在。</a:t>
+            </a:r>
+          </a:p>
+          <a:p>
+            <a:pPr marL="0" indent="0">
+              <a:buNone/>
+            </a:pPr>
+            <a:r>
+              <a:rPr lang="zh-CN" altLang="en-US" dirty="0"/>
+              <a:t>其实网络上流传的原生家庭概念，实际是指父母对待孩子的教养方式。</a:t>
+            </a:r>
+          </a:p>
+          <a:p>
+            <a:pPr marL="0" indent="0">
+              <a:buNone/>
+            </a:pPr>
+            <a:r>
+              <a:rPr lang="zh-CN" altLang="en-US" dirty="0"/>
+              <a:t>当然后来又混合杂糅了家庭经济条件都乱七八糟的东西。</a:t>
+            </a:r>
+          </a:p>
+          <a:p>
+            <a:pPr marL="0" indent="0">
+              <a:buNone/>
+            </a:pPr>
+            <a:r>
+              <a:rPr lang="zh-CN" altLang="en-US" dirty="0"/>
+              <a:t>实际上父母的教养方式，并不是我们必须刻意要关注的东西。</a:t>
+            </a:r>
+          </a:p>
+          <a:p>
+            <a:pPr marL="0" indent="0">
+              <a:buNone/>
+            </a:pPr>
+            <a:r>
+              <a:rPr lang="zh-CN" altLang="en-US" dirty="0"/>
+              <a:t>什么意思呢？</a:t>
+            </a:r>
+          </a:p>
+          <a:p>
+            <a:pPr marL="0" indent="0">
+              <a:buNone/>
+            </a:pPr>
+            <a:r>
+              <a:rPr lang="zh-CN" altLang="en-US" dirty="0"/>
+              <a:t>就是说，父母是采取打骂，还是温柔对待，都不是关键问题。</a:t>
+            </a:r>
+          </a:p>
+          <a:p>
+            <a:pPr marL="0" indent="0">
+              <a:buNone/>
+            </a:pPr>
+            <a:r>
+              <a:rPr lang="zh-CN" altLang="en-US" dirty="0"/>
+              <a:t>这些形式不决定孩子一定会有所改变，或将来会按照你设想的方向发展。</a:t>
+            </a:r>
+          </a:p>
+          <a:p>
+            <a:pPr marL="0" indent="0">
+              <a:buNone/>
+            </a:pPr>
+            <a:r>
+              <a:rPr lang="zh-CN" altLang="en-US" dirty="0"/>
+              <a:t>因为关键决定因素不是这些，而是另一个东西。</a:t>
+            </a:r>
+          </a:p>
+          <a:p>
+            <a:pPr marL="0" indent="0">
+              <a:buNone/>
+            </a:pPr>
+            <a:r>
+              <a:rPr lang="zh-CN" altLang="en-US" dirty="0"/>
+              <a:t>这个东西，叫作社会环境影响。</a:t>
+            </a:r>
           </a:p>
         </p:txBody>
       </p:sp>
@@ -5645,190 +6464,6 @@
     <p:extLst>
       <p:ext uri="{BB962C8B-B14F-4D97-AF65-F5344CB8AC3E}">
         <p14:creationId xmlns:p14="http://schemas.microsoft.com/office/powerpoint/2010/main" val="2390253722"/>
-      </p:ext>
-    </p:extLst>
-  </p:cSld>
-  <p:clrMapOvr>
-    <a:masterClrMapping/>
-  </p:clrMapOvr>
-</p:sld>
-</file>
-
-<file path=ppt/slides/slide18.xml><?xml version="1.0" encoding="utf-8"?>
-<p:sld xmlns:a="http://schemas.openxmlformats.org/drawingml/2006/main" xmlns:r="http://schemas.openxmlformats.org/officeDocument/2006/relationships" xmlns:p="http://schemas.openxmlformats.org/presentationml/2006/main">
-  <p:cSld>
-    <p:spTree>
-      <p:nvGrpSpPr>
-        <p:cNvPr id="1" name="">
-          <a:extLst>
-            <a:ext uri="{FF2B5EF4-FFF2-40B4-BE49-F238E27FC236}">
-              <a16:creationId xmlns:a16="http://schemas.microsoft.com/office/drawing/2014/main" id="{CDB77CDE-2847-6AD7-63A7-7A0509F6562A}"/>
-            </a:ext>
-          </a:extLst>
-        </p:cNvPr>
-        <p:cNvGrpSpPr/>
-        <p:nvPr/>
-      </p:nvGrpSpPr>
-      <p:grpSpPr>
-        <a:xfrm>
-          <a:off x="0" y="0"/>
-          <a:ext cx="0" cy="0"/>
-          <a:chOff x="0" y="0"/>
-          <a:chExt cx="0" cy="0"/>
-        </a:xfrm>
-      </p:grpSpPr>
-      <p:sp>
-        <p:nvSpPr>
-          <p:cNvPr id="2" name="标题 1">
-            <a:extLst>
-              <a:ext uri="{FF2B5EF4-FFF2-40B4-BE49-F238E27FC236}">
-                <a16:creationId xmlns:a16="http://schemas.microsoft.com/office/drawing/2014/main" id="{19CF8A6C-45C1-E9A0-9765-80DF6B5900B9}"/>
-              </a:ext>
-            </a:extLst>
-          </p:cNvPr>
-          <p:cNvSpPr>
-            <a:spLocks noGrp="1"/>
-          </p:cNvSpPr>
-          <p:nvPr>
-            <p:ph type="title"/>
-          </p:nvPr>
-        </p:nvSpPr>
-        <p:spPr/>
-        <p:txBody>
-          <a:bodyPr/>
-          <a:lstStyle/>
-          <a:p>
-            <a:r>
-              <a:rPr lang="zh-CN" altLang="en-US" dirty="0"/>
-              <a:t>爱和原生家庭之谬误</a:t>
-            </a:r>
-          </a:p>
-        </p:txBody>
-      </p:sp>
-      <p:sp>
-        <p:nvSpPr>
-          <p:cNvPr id="3" name="内容占位符 2">
-            <a:extLst>
-              <a:ext uri="{FF2B5EF4-FFF2-40B4-BE49-F238E27FC236}">
-                <a16:creationId xmlns:a16="http://schemas.microsoft.com/office/drawing/2014/main" id="{6B5340F4-8827-A36D-3E32-40B0DD118C1D}"/>
-              </a:ext>
-            </a:extLst>
-          </p:cNvPr>
-          <p:cNvSpPr>
-            <a:spLocks noGrp="1"/>
-          </p:cNvSpPr>
-          <p:nvPr>
-            <p:ph idx="1"/>
-          </p:nvPr>
-        </p:nvSpPr>
-        <p:spPr/>
-        <p:txBody>
-          <a:bodyPr/>
-          <a:lstStyle/>
-          <a:p>
-            <a:pPr marL="0" indent="0">
-              <a:buNone/>
-            </a:pPr>
-            <a:endParaRPr lang="zh-CN" altLang="en-US" dirty="0"/>
-          </a:p>
-        </p:txBody>
-      </p:sp>
-    </p:spTree>
-    <p:extLst>
-      <p:ext uri="{BB962C8B-B14F-4D97-AF65-F5344CB8AC3E}">
-        <p14:creationId xmlns:p14="http://schemas.microsoft.com/office/powerpoint/2010/main" val="4185265121"/>
-      </p:ext>
-    </p:extLst>
-  </p:cSld>
-  <p:clrMapOvr>
-    <a:masterClrMapping/>
-  </p:clrMapOvr>
-</p:sld>
-</file>
-
-<file path=ppt/slides/slide19.xml><?xml version="1.0" encoding="utf-8"?>
-<p:sld xmlns:a="http://schemas.openxmlformats.org/drawingml/2006/main" xmlns:r="http://schemas.openxmlformats.org/officeDocument/2006/relationships" xmlns:p="http://schemas.openxmlformats.org/presentationml/2006/main">
-  <p:cSld>
-    <p:spTree>
-      <p:nvGrpSpPr>
-        <p:cNvPr id="1" name="">
-          <a:extLst>
-            <a:ext uri="{FF2B5EF4-FFF2-40B4-BE49-F238E27FC236}">
-              <a16:creationId xmlns:a16="http://schemas.microsoft.com/office/drawing/2014/main" id="{11CE6DBE-BE82-B84F-F40B-9A748920209B}"/>
-            </a:ext>
-          </a:extLst>
-        </p:cNvPr>
-        <p:cNvGrpSpPr/>
-        <p:nvPr/>
-      </p:nvGrpSpPr>
-      <p:grpSpPr>
-        <a:xfrm>
-          <a:off x="0" y="0"/>
-          <a:ext cx="0" cy="0"/>
-          <a:chOff x="0" y="0"/>
-          <a:chExt cx="0" cy="0"/>
-        </a:xfrm>
-      </p:grpSpPr>
-      <p:sp>
-        <p:nvSpPr>
-          <p:cNvPr id="2" name="标题 1">
-            <a:extLst>
-              <a:ext uri="{FF2B5EF4-FFF2-40B4-BE49-F238E27FC236}">
-                <a16:creationId xmlns:a16="http://schemas.microsoft.com/office/drawing/2014/main" id="{DE25AC38-D058-0CCD-C5AB-99E2653D789F}"/>
-              </a:ext>
-            </a:extLst>
-          </p:cNvPr>
-          <p:cNvSpPr>
-            <a:spLocks noGrp="1"/>
-          </p:cNvSpPr>
-          <p:nvPr>
-            <p:ph type="title"/>
-          </p:nvPr>
-        </p:nvSpPr>
-        <p:spPr/>
-        <p:txBody>
-          <a:bodyPr/>
-          <a:lstStyle/>
-          <a:p>
-            <a:r>
-              <a:rPr lang="zh-CN" altLang="en-US" dirty="0"/>
-              <a:t>爱和原生家庭之谬误</a:t>
-            </a:r>
-          </a:p>
-        </p:txBody>
-      </p:sp>
-      <p:sp>
-        <p:nvSpPr>
-          <p:cNvPr id="3" name="内容占位符 2">
-            <a:extLst>
-              <a:ext uri="{FF2B5EF4-FFF2-40B4-BE49-F238E27FC236}">
-                <a16:creationId xmlns:a16="http://schemas.microsoft.com/office/drawing/2014/main" id="{B279C227-2F61-9882-61CF-B8D84B0B1CB9}"/>
-              </a:ext>
-            </a:extLst>
-          </p:cNvPr>
-          <p:cNvSpPr>
-            <a:spLocks noGrp="1"/>
-          </p:cNvSpPr>
-          <p:nvPr>
-            <p:ph idx="1"/>
-          </p:nvPr>
-        </p:nvSpPr>
-        <p:spPr/>
-        <p:txBody>
-          <a:bodyPr/>
-          <a:lstStyle/>
-          <a:p>
-            <a:pPr marL="0" indent="0">
-              <a:buNone/>
-            </a:pPr>
-            <a:endParaRPr lang="zh-CN" altLang="en-US" dirty="0"/>
-          </a:p>
-        </p:txBody>
-      </p:sp>
-    </p:spTree>
-    <p:extLst>
-      <p:ext uri="{BB962C8B-B14F-4D97-AF65-F5344CB8AC3E}">
-        <p14:creationId xmlns:p14="http://schemas.microsoft.com/office/powerpoint/2010/main" val="81889071"/>
       </p:ext>
     </p:extLst>
   </p:cSld>
@@ -5877,8 +6512,8 @@
           <a:lstStyle/>
           <a:p>
             <a:r>
-              <a:rPr lang="zh-CN" altLang="en-US" dirty="0"/>
-              <a:t>现代心理学的历史发展脉络</a:t>
+              <a:rPr lang="zh-CN" altLang="en-US" sz="4400" dirty="0"/>
+              <a:t>现代心理学的历史发展脉络（一）</a:t>
             </a:r>
           </a:p>
         </p:txBody>
@@ -5909,8 +6544,25 @@
             </a:pPr>
             <a:r>
               <a:rPr lang="zh-CN" altLang="en-US" dirty="0"/>
-              <a:t>改革开放初期，原有的集体组织瓦解，大量工人下岗，心理问题由组织管理向各自管理发展。</a:t>
-            </a:r>
+              <a:t>西方的心理学，早在新中国解放前就有了。</a:t>
+            </a:r>
+            <a:endParaRPr lang="en-US" altLang="zh-CN" dirty="0"/>
+          </a:p>
+          <a:p>
+            <a:pPr marL="0" indent="0">
+              <a:buNone/>
+            </a:pPr>
+            <a:endParaRPr lang="en-US" altLang="zh-CN" dirty="0"/>
+          </a:p>
+          <a:p>
+            <a:pPr marL="0" indent="0">
+              <a:buNone/>
+            </a:pPr>
+            <a:r>
+              <a:rPr lang="zh-CN" altLang="en-US" dirty="0"/>
+              <a:t>蒋介石接受过西方心理学精神分析的治疗。</a:t>
+            </a:r>
+            <a:endParaRPr lang="en-US" altLang="zh-CN" dirty="0"/>
           </a:p>
           <a:p>
             <a:pPr marL="0" indent="0">
@@ -5924,7 +6576,23 @@
             </a:pPr>
             <a:r>
               <a:rPr lang="zh-CN" altLang="en-US" dirty="0"/>
-              <a:t>中国引入西方心理学，虽然在民国时期就已经开始了，但是现代的心理学，却是在前面说的背景下引入的。</a:t>
+              <a:t>中国在</a:t>
+            </a:r>
+            <a:r>
+              <a:rPr lang="en-US" altLang="zh-CN" dirty="0"/>
+              <a:t>80</a:t>
+            </a:r>
+            <a:r>
+              <a:rPr lang="zh-CN" altLang="en-US" dirty="0"/>
+              <a:t>、</a:t>
+            </a:r>
+            <a:r>
+              <a:rPr lang="en-US" altLang="zh-CN" dirty="0"/>
+              <a:t>90</a:t>
+            </a:r>
+            <a:r>
+              <a:rPr lang="zh-CN" altLang="en-US" dirty="0"/>
+              <a:t>年代开始全面引入西方心理学的背景是什么？</a:t>
             </a:r>
           </a:p>
           <a:p>
@@ -5939,7 +6607,7 @@
             </a:pPr>
             <a:r>
               <a:rPr lang="zh-CN" altLang="en-US" dirty="0"/>
-              <a:t>社会转型期的心理危机爆发。</a:t>
+              <a:t>为什么引进西方心理学？</a:t>
             </a:r>
           </a:p>
         </p:txBody>
@@ -5962,10 +6630,211 @@
   <p:cSld>
     <p:spTree>
       <p:nvGrpSpPr>
+        <p:cNvPr id="1" name=""/>
+        <p:cNvGrpSpPr/>
+        <p:nvPr/>
+      </p:nvGrpSpPr>
+      <p:grpSpPr>
+        <a:xfrm>
+          <a:off x="0" y="0"/>
+          <a:ext cx="0" cy="0"/>
+          <a:chOff x="0" y="0"/>
+          <a:chExt cx="0" cy="0"/>
+        </a:xfrm>
+      </p:grpSpPr>
+      <p:sp>
+        <p:nvSpPr>
+          <p:cNvPr id="2" name="标题 1">
+            <a:extLst>
+              <a:ext uri="{FF2B5EF4-FFF2-40B4-BE49-F238E27FC236}">
+                <a16:creationId xmlns:a16="http://schemas.microsoft.com/office/drawing/2014/main" id="{4926CEE7-6DEE-802E-9EB8-874101F50EAD}"/>
+              </a:ext>
+            </a:extLst>
+          </p:cNvPr>
+          <p:cNvSpPr>
+            <a:spLocks noGrp="1"/>
+          </p:cNvSpPr>
+          <p:nvPr>
+            <p:ph type="title"/>
+          </p:nvPr>
+        </p:nvSpPr>
+        <p:spPr/>
+        <p:txBody>
+          <a:bodyPr/>
+          <a:lstStyle/>
+          <a:p>
+            <a:r>
+              <a:rPr lang="zh-CN" altLang="en-US" sz="4400" dirty="0"/>
+              <a:t>儿童青少年教育关键（一）</a:t>
+            </a:r>
+          </a:p>
+        </p:txBody>
+      </p:sp>
+      <p:sp>
+        <p:nvSpPr>
+          <p:cNvPr id="3" name="内容占位符 2">
+            <a:extLst>
+              <a:ext uri="{FF2B5EF4-FFF2-40B4-BE49-F238E27FC236}">
+                <a16:creationId xmlns:a16="http://schemas.microsoft.com/office/drawing/2014/main" id="{3BD1E4F8-725F-2E33-C2EA-0F24968586BD}"/>
+              </a:ext>
+            </a:extLst>
+          </p:cNvPr>
+          <p:cNvSpPr>
+            <a:spLocks noGrp="1"/>
+          </p:cNvSpPr>
+          <p:nvPr>
+            <p:ph idx="1"/>
+          </p:nvPr>
+        </p:nvSpPr>
+        <p:spPr>
+          <a:xfrm>
+            <a:off x="521208" y="1771651"/>
+            <a:ext cx="11155680" cy="4574286"/>
+          </a:xfrm>
+        </p:spPr>
+        <p:txBody>
+          <a:bodyPr/>
+          <a:lstStyle/>
+          <a:p>
+            <a:pPr marL="0" indent="0">
+              <a:buNone/>
+            </a:pPr>
+            <a:r>
+              <a:rPr lang="zh-CN" altLang="en-US" dirty="0"/>
+              <a:t>我来给大家讲一些正规、严谨、科学、靠谱的教育和心理学知识。大家在网上是看不到的。网上</a:t>
+            </a:r>
+            <a:r>
+              <a:rPr lang="en-US" altLang="zh-CN" dirty="0"/>
+              <a:t>99%</a:t>
+            </a:r>
+            <a:r>
+              <a:rPr lang="zh-CN" altLang="en-US" dirty="0"/>
+              <a:t>都是假的。</a:t>
+            </a:r>
+            <a:endParaRPr lang="en-US" altLang="zh-CN" dirty="0"/>
+          </a:p>
+          <a:p>
+            <a:pPr marL="0" indent="0">
+              <a:buNone/>
+            </a:pPr>
+            <a:r>
+              <a:rPr lang="zh-CN" altLang="en-US" dirty="0"/>
+              <a:t>上个世纪</a:t>
+            </a:r>
+            <a:r>
+              <a:rPr lang="en-US" altLang="zh-CN" dirty="0"/>
+              <a:t>60</a:t>
+            </a:r>
+            <a:r>
+              <a:rPr lang="zh-CN" altLang="en-US" dirty="0"/>
+              <a:t>年代，由于二战结束，世界各地产生了大量的孤儿。因此研究人员就有机会获得了大量的现成的实验样本。</a:t>
+            </a:r>
+          </a:p>
+          <a:p>
+            <a:pPr marL="0" indent="0">
+              <a:buNone/>
+            </a:pPr>
+            <a:r>
+              <a:rPr lang="zh-CN" altLang="en-US" dirty="0"/>
+              <a:t>这些由战争产生的遗孤，有很多都是双胞胎，其中有不少同卵双胞胎。研究人员就研究观察这此孩子，看看这些孩子的成长到底是由什么因素影响。</a:t>
+            </a:r>
+          </a:p>
+          <a:p>
+            <a:pPr marL="0" indent="0">
+              <a:buNone/>
+            </a:pPr>
+            <a:r>
+              <a:rPr lang="zh-CN" altLang="en-US" dirty="0"/>
+              <a:t>这些孩子数量巨大，有上百万之众，样本数量足够说明问题。这些孩子被分别寄养到不同的家庭中。数十年过去了，最终研究人员得出了惊人的结论。</a:t>
+            </a:r>
+          </a:p>
+          <a:p>
+            <a:pPr marL="0" indent="0">
+              <a:buNone/>
+            </a:pPr>
+            <a:r>
+              <a:rPr lang="zh-CN" altLang="en-US" dirty="0"/>
+              <a:t>一个人，受到哪些因素影响呢？</a:t>
+            </a:r>
+            <a:endParaRPr lang="en-US" altLang="zh-CN" dirty="0"/>
+          </a:p>
+          <a:p>
+            <a:pPr marL="0" indent="0">
+              <a:buNone/>
+            </a:pPr>
+            <a:r>
+              <a:rPr lang="zh-CN" altLang="en-US" dirty="0"/>
+              <a:t>一个是遗传基因，占</a:t>
+            </a:r>
+            <a:r>
+              <a:rPr lang="en-US" altLang="zh-CN" dirty="0"/>
+              <a:t>60%</a:t>
+            </a:r>
+            <a:r>
+              <a:rPr lang="zh-CN" altLang="en-US" dirty="0"/>
+              <a:t>，年纪大了后甚至占</a:t>
+            </a:r>
+            <a:r>
+              <a:rPr lang="en-US" altLang="zh-CN" dirty="0"/>
+              <a:t>80%</a:t>
+            </a:r>
+            <a:r>
+              <a:rPr lang="zh-CN" altLang="en-US" dirty="0"/>
+              <a:t>以上。二个是环境影响，占</a:t>
+            </a:r>
+            <a:r>
+              <a:rPr lang="en-US" altLang="zh-CN" dirty="0"/>
+              <a:t>35%</a:t>
+            </a:r>
+            <a:r>
+              <a:rPr lang="zh-CN" altLang="en-US" dirty="0"/>
+              <a:t>。剩下不到</a:t>
+            </a:r>
+            <a:r>
+              <a:rPr lang="en-US" altLang="zh-CN" dirty="0"/>
+              <a:t>5%</a:t>
+            </a:r>
+            <a:r>
+              <a:rPr lang="zh-CN" altLang="en-US" dirty="0"/>
+              <a:t>，是其他影响。</a:t>
+            </a:r>
+          </a:p>
+          <a:p>
+            <a:pPr marL="0" indent="0">
+              <a:buNone/>
+            </a:pPr>
+            <a:endParaRPr lang="zh-CN" altLang="en-US" dirty="0"/>
+          </a:p>
+          <a:p>
+            <a:pPr marL="0" indent="0">
+              <a:buNone/>
+            </a:pPr>
+            <a:endParaRPr lang="zh-CN" altLang="en-US" dirty="0"/>
+          </a:p>
+        </p:txBody>
+      </p:sp>
+    </p:spTree>
+    <p:extLst>
+      <p:ext uri="{BB962C8B-B14F-4D97-AF65-F5344CB8AC3E}">
+        <p14:creationId xmlns:p14="http://schemas.microsoft.com/office/powerpoint/2010/main" val="436198922"/>
+      </p:ext>
+    </p:extLst>
+  </p:cSld>
+  <p:clrMapOvr>
+    <a:masterClrMapping/>
+  </p:clrMapOvr>
+</p:sld>
+</file>
+
+<file path=ppt/slides/slide21.xml><?xml version="1.0" encoding="utf-8"?>
+<p:sld xmlns:a="http://schemas.openxmlformats.org/drawingml/2006/main" xmlns:r="http://schemas.openxmlformats.org/officeDocument/2006/relationships" xmlns:p="http://schemas.openxmlformats.org/presentationml/2006/main">
+  <p:cSld>
+    <p:spTree>
+      <p:nvGrpSpPr>
         <p:cNvPr id="1" name="">
           <a:extLst>
             <a:ext uri="{FF2B5EF4-FFF2-40B4-BE49-F238E27FC236}">
-              <a16:creationId xmlns:a16="http://schemas.microsoft.com/office/drawing/2014/main" id="{DFBAB60B-EF0E-CB43-688B-7D8E94E70739}"/>
+              <a16:creationId xmlns:a16="http://schemas.microsoft.com/office/drawing/2014/main" id="{5D4C9217-8C65-5EEE-CDB0-34BF9987679C}"/>
             </a:ext>
           </a:extLst>
         </p:cNvPr>
@@ -5985,7 +6854,7 @@
           <p:cNvPr id="2" name="标题 1">
             <a:extLst>
               <a:ext uri="{FF2B5EF4-FFF2-40B4-BE49-F238E27FC236}">
-                <a16:creationId xmlns:a16="http://schemas.microsoft.com/office/drawing/2014/main" id="{BF8C6E93-42DC-FC61-50E4-AB38D4B245D9}"/>
+                <a16:creationId xmlns:a16="http://schemas.microsoft.com/office/drawing/2014/main" id="{4CEF6739-EB1B-2D28-BF5C-AF11FC5820E1}"/>
               </a:ext>
             </a:extLst>
           </p:cNvPr>
@@ -6002,8 +6871,8 @@
           <a:lstStyle/>
           <a:p>
             <a:r>
-              <a:rPr lang="zh-CN" altLang="en-US" dirty="0"/>
-              <a:t>爱和原生家庭之谬误</a:t>
+              <a:rPr lang="zh-CN" altLang="en-US" sz="4400" dirty="0"/>
+              <a:t>儿童青少年教育关键（二）</a:t>
             </a:r>
           </a:p>
         </p:txBody>
@@ -6013,7 +6882,7 @@
           <p:cNvPr id="3" name="内容占位符 2">
             <a:extLst>
               <a:ext uri="{FF2B5EF4-FFF2-40B4-BE49-F238E27FC236}">
-                <a16:creationId xmlns:a16="http://schemas.microsoft.com/office/drawing/2014/main" id="{D936DDA2-C9CE-4787-A4D4-A34C735F18F9}"/>
+                <a16:creationId xmlns:a16="http://schemas.microsoft.com/office/drawing/2014/main" id="{B72E7B50-E775-E8D6-4912-2E2A1725189A}"/>
               </a:ext>
             </a:extLst>
           </p:cNvPr>
@@ -6024,10 +6893,82 @@
             <p:ph idx="1"/>
           </p:nvPr>
         </p:nvSpPr>
-        <p:spPr/>
+        <p:spPr>
+          <a:xfrm>
+            <a:off x="521208" y="1971675"/>
+            <a:ext cx="11155680" cy="4374261"/>
+          </a:xfrm>
+        </p:spPr>
         <p:txBody>
           <a:bodyPr/>
           <a:lstStyle/>
+          <a:p>
+            <a:pPr marL="0" indent="0">
+              <a:buNone/>
+            </a:pPr>
+            <a:r>
+              <a:rPr lang="zh-CN" altLang="en-US" dirty="0"/>
+              <a:t>即便是同卵双胞胎，在分别放到不同的家庭中，最后也会表现出非常相似非常接近的习惯和行为。</a:t>
+            </a:r>
+          </a:p>
+          <a:p>
+            <a:pPr marL="0" indent="0">
+              <a:buNone/>
+            </a:pPr>
+            <a:r>
+              <a:rPr lang="zh-CN" altLang="en-US" dirty="0"/>
+              <a:t>大家可以去网上查资料，这是真实的科学实验，全世界都有报道过。大家也可以去看一本书</a:t>
+            </a:r>
+            <a:r>
+              <a:rPr lang="en-US" altLang="zh-CN" dirty="0"/>
+              <a:t>《</a:t>
+            </a:r>
+            <a:r>
+              <a:rPr lang="zh-CN" altLang="en-US" dirty="0"/>
+              <a:t>基因蓝图</a:t>
+            </a:r>
+            <a:r>
+              <a:rPr lang="en-US" altLang="zh-CN" dirty="0"/>
+              <a:t>》</a:t>
+            </a:r>
+            <a:r>
+              <a:rPr lang="zh-CN" altLang="en-US" dirty="0"/>
+              <a:t>，里面写得非常清楚。</a:t>
+            </a:r>
+          </a:p>
+          <a:p>
+            <a:pPr marL="0" indent="0">
+              <a:buNone/>
+            </a:pPr>
+            <a:r>
+              <a:rPr lang="zh-CN" altLang="en-US" dirty="0"/>
+              <a:t>这里面已经澄清家庭教养方式对孩子来说并不存在决定性。</a:t>
+            </a:r>
+          </a:p>
+          <a:p>
+            <a:pPr marL="0" indent="0">
+              <a:buNone/>
+            </a:pPr>
+            <a:r>
+              <a:rPr lang="zh-CN" altLang="en-US" dirty="0"/>
+              <a:t>前面说的，除了基因影响之外，环境影响主要是指家庭外的社会环境影响。</a:t>
+            </a:r>
+          </a:p>
+          <a:p>
+            <a:pPr marL="0" indent="0">
+              <a:buNone/>
+            </a:pPr>
+            <a:endParaRPr lang="zh-CN" altLang="en-US" dirty="0"/>
+          </a:p>
+          <a:p>
+            <a:pPr marL="0" indent="0">
+              <a:buNone/>
+            </a:pPr>
+            <a:r>
+              <a:rPr lang="zh-CN" altLang="en-US" dirty="0"/>
+              <a:t>（即便是家庭条件的好坏，也不是必然，宠众望）</a:t>
+            </a:r>
+          </a:p>
           <a:p>
             <a:pPr marL="0" indent="0">
               <a:buNone/>
@@ -6039,1732 +6980,7 @@
     </p:spTree>
     <p:extLst>
       <p:ext uri="{BB962C8B-B14F-4D97-AF65-F5344CB8AC3E}">
-        <p14:creationId xmlns:p14="http://schemas.microsoft.com/office/powerpoint/2010/main" val="3881197912"/>
-      </p:ext>
-    </p:extLst>
-  </p:cSld>
-  <p:clrMapOvr>
-    <a:masterClrMapping/>
-  </p:clrMapOvr>
-</p:sld>
-</file>
-
-<file path=ppt/slides/slide21.xml><?xml version="1.0" encoding="utf-8"?>
-<p:sld xmlns:a="http://schemas.openxmlformats.org/drawingml/2006/main" xmlns:r="http://schemas.openxmlformats.org/officeDocument/2006/relationships" xmlns:p="http://schemas.openxmlformats.org/presentationml/2006/main">
-  <p:cSld>
-    <p:spTree>
-      <p:nvGrpSpPr>
-        <p:cNvPr id="1" name=""/>
-        <p:cNvGrpSpPr/>
-        <p:nvPr/>
-      </p:nvGrpSpPr>
-      <p:grpSpPr>
-        <a:xfrm>
-          <a:off x="0" y="0"/>
-          <a:ext cx="0" cy="0"/>
-          <a:chOff x="0" y="0"/>
-          <a:chExt cx="0" cy="0"/>
-        </a:xfrm>
-      </p:grpSpPr>
-      <p:sp>
-        <p:nvSpPr>
-          <p:cNvPr id="2" name="标题 1">
-            <a:extLst>
-              <a:ext uri="{FF2B5EF4-FFF2-40B4-BE49-F238E27FC236}">
-                <a16:creationId xmlns:a16="http://schemas.microsoft.com/office/drawing/2014/main" id="{4926CEE7-6DEE-802E-9EB8-874101F50EAD}"/>
-              </a:ext>
-            </a:extLst>
-          </p:cNvPr>
-          <p:cNvSpPr>
-            <a:spLocks noGrp="1"/>
-          </p:cNvSpPr>
-          <p:nvPr>
-            <p:ph type="title"/>
-          </p:nvPr>
-        </p:nvSpPr>
-        <p:spPr/>
-        <p:txBody>
-          <a:bodyPr/>
-          <a:lstStyle/>
-          <a:p>
-            <a:r>
-              <a:rPr lang="zh-CN" altLang="en-US" dirty="0"/>
-              <a:t>儿童青少年教育关键</a:t>
-            </a:r>
-          </a:p>
-        </p:txBody>
-      </p:sp>
-      <p:sp>
-        <p:nvSpPr>
-          <p:cNvPr id="3" name="内容占位符 2">
-            <a:extLst>
-              <a:ext uri="{FF2B5EF4-FFF2-40B4-BE49-F238E27FC236}">
-                <a16:creationId xmlns:a16="http://schemas.microsoft.com/office/drawing/2014/main" id="{3BD1E4F8-725F-2E33-C2EA-0F24968586BD}"/>
-              </a:ext>
-            </a:extLst>
-          </p:cNvPr>
-          <p:cNvSpPr>
-            <a:spLocks noGrp="1"/>
-          </p:cNvSpPr>
-          <p:nvPr>
-            <p:ph idx="1"/>
-          </p:nvPr>
-        </p:nvSpPr>
-        <p:spPr/>
-        <p:txBody>
-          <a:bodyPr/>
-          <a:lstStyle/>
-          <a:p>
-            <a:pPr marL="0" indent="0">
-              <a:buNone/>
-            </a:pPr>
-            <a:r>
-              <a:rPr lang="zh-CN" altLang="en-US" dirty="0"/>
-              <a:t>我来给大家讲一些正规、严谨、科学、靠谱的教育和心理学知识。</a:t>
-            </a:r>
-          </a:p>
-          <a:p>
-            <a:pPr marL="0" indent="0">
-              <a:buNone/>
-            </a:pPr>
-            <a:endParaRPr lang="zh-CN" altLang="en-US" dirty="0"/>
-          </a:p>
-          <a:p>
-            <a:pPr marL="0" indent="0">
-              <a:buNone/>
-            </a:pPr>
-            <a:r>
-              <a:rPr lang="zh-CN" altLang="en-US" dirty="0"/>
-              <a:t>大家在网上是看不到的。</a:t>
-            </a:r>
-          </a:p>
-          <a:p>
-            <a:pPr marL="0" indent="0">
-              <a:buNone/>
-            </a:pPr>
-            <a:endParaRPr lang="zh-CN" altLang="en-US" dirty="0"/>
-          </a:p>
-          <a:p>
-            <a:pPr marL="0" indent="0">
-              <a:buNone/>
-            </a:pPr>
-            <a:r>
-              <a:rPr lang="zh-CN" altLang="en-US" dirty="0"/>
-              <a:t>网上</a:t>
-            </a:r>
-            <a:r>
-              <a:rPr lang="en-US" altLang="zh-CN" dirty="0"/>
-              <a:t>99%</a:t>
-            </a:r>
-            <a:r>
-              <a:rPr lang="zh-CN" altLang="en-US" dirty="0"/>
-              <a:t>都是假的。</a:t>
-            </a:r>
-          </a:p>
-          <a:p>
-            <a:pPr marL="0" indent="0">
-              <a:buNone/>
-            </a:pPr>
-            <a:endParaRPr lang="zh-CN" altLang="en-US" dirty="0"/>
-          </a:p>
-          <a:p>
-            <a:pPr marL="0" indent="0">
-              <a:buNone/>
-            </a:pPr>
-            <a:endParaRPr lang="zh-CN" altLang="en-US" dirty="0"/>
-          </a:p>
-          <a:p>
-            <a:pPr marL="0" indent="0">
-              <a:buNone/>
-            </a:pPr>
-            <a:endParaRPr lang="zh-CN" altLang="en-US" dirty="0"/>
-          </a:p>
-          <a:p>
-            <a:pPr marL="0" indent="0">
-              <a:buNone/>
-            </a:pPr>
-            <a:r>
-              <a:rPr lang="zh-CN" altLang="en-US" dirty="0"/>
-              <a:t>上个世纪</a:t>
-            </a:r>
-            <a:r>
-              <a:rPr lang="en-US" altLang="zh-CN" dirty="0"/>
-              <a:t>60</a:t>
-            </a:r>
-            <a:r>
-              <a:rPr lang="zh-CN" altLang="en-US" dirty="0"/>
-              <a:t>年代，由于二战结束，世界各地产生了大量的孤儿。</a:t>
-            </a:r>
-          </a:p>
-          <a:p>
-            <a:pPr marL="0" indent="0">
-              <a:buNone/>
-            </a:pPr>
-            <a:endParaRPr lang="zh-CN" altLang="en-US" dirty="0"/>
-          </a:p>
-          <a:p>
-            <a:pPr marL="0" indent="0">
-              <a:buNone/>
-            </a:pPr>
-            <a:r>
-              <a:rPr lang="zh-CN" altLang="en-US" dirty="0"/>
-              <a:t>因此研究人员就有机会获得了大量的现成的实验样本。</a:t>
-            </a:r>
-          </a:p>
-          <a:p>
-            <a:pPr marL="0" indent="0">
-              <a:buNone/>
-            </a:pPr>
-            <a:endParaRPr lang="zh-CN" altLang="en-US" dirty="0"/>
-          </a:p>
-          <a:p>
-            <a:pPr marL="0" indent="0">
-              <a:buNone/>
-            </a:pPr>
-            <a:r>
-              <a:rPr lang="zh-CN" altLang="en-US" dirty="0"/>
-              <a:t>这些由战争产生的遗孤，有很多都是双胞胎，其中有不少同卵双胞胎。</a:t>
-            </a:r>
-          </a:p>
-          <a:p>
-            <a:pPr marL="0" indent="0">
-              <a:buNone/>
-            </a:pPr>
-            <a:endParaRPr lang="zh-CN" altLang="en-US" dirty="0"/>
-          </a:p>
-          <a:p>
-            <a:pPr marL="0" indent="0">
-              <a:buNone/>
-            </a:pPr>
-            <a:r>
-              <a:rPr lang="zh-CN" altLang="en-US" dirty="0"/>
-              <a:t>研究人员就研究观察这此孩子，看看这些孩子的成长到底是由什么因素影响。</a:t>
-            </a:r>
-          </a:p>
-          <a:p>
-            <a:pPr marL="0" indent="0">
-              <a:buNone/>
-            </a:pPr>
-            <a:endParaRPr lang="zh-CN" altLang="en-US" dirty="0"/>
-          </a:p>
-          <a:p>
-            <a:pPr marL="0" indent="0">
-              <a:buNone/>
-            </a:pPr>
-            <a:r>
-              <a:rPr lang="zh-CN" altLang="en-US" dirty="0"/>
-              <a:t>这些孩子数量巨大，有上百万之众，样本数量足够说明问题。</a:t>
-            </a:r>
-          </a:p>
-          <a:p>
-            <a:pPr marL="0" indent="0">
-              <a:buNone/>
-            </a:pPr>
-            <a:endParaRPr lang="zh-CN" altLang="en-US" dirty="0"/>
-          </a:p>
-          <a:p>
-            <a:pPr marL="0" indent="0">
-              <a:buNone/>
-            </a:pPr>
-            <a:r>
-              <a:rPr lang="zh-CN" altLang="en-US" dirty="0"/>
-              <a:t>这些孩子被分别寄养到不同的家庭中。</a:t>
-            </a:r>
-          </a:p>
-          <a:p>
-            <a:pPr marL="0" indent="0">
-              <a:buNone/>
-            </a:pPr>
-            <a:endParaRPr lang="zh-CN" altLang="en-US" dirty="0"/>
-          </a:p>
-          <a:p>
-            <a:pPr marL="0" indent="0">
-              <a:buNone/>
-            </a:pPr>
-            <a:r>
-              <a:rPr lang="zh-CN" altLang="en-US" dirty="0"/>
-              <a:t>数十年过去了，最终研究人员得出了惊人的结论。</a:t>
-            </a:r>
-          </a:p>
-          <a:p>
-            <a:pPr marL="0" indent="0">
-              <a:buNone/>
-            </a:pPr>
-            <a:endParaRPr lang="zh-CN" altLang="en-US" dirty="0"/>
-          </a:p>
-          <a:p>
-            <a:pPr marL="0" indent="0">
-              <a:buNone/>
-            </a:pPr>
-            <a:r>
-              <a:rPr lang="zh-CN" altLang="en-US" dirty="0"/>
-              <a:t>一个人，受到哪些因素影响呢？</a:t>
-            </a:r>
-          </a:p>
-          <a:p>
-            <a:pPr marL="0" indent="0">
-              <a:buNone/>
-            </a:pPr>
-            <a:endParaRPr lang="zh-CN" altLang="en-US" dirty="0"/>
-          </a:p>
-          <a:p>
-            <a:pPr marL="0" indent="0">
-              <a:buNone/>
-            </a:pPr>
-            <a:r>
-              <a:rPr lang="zh-CN" altLang="en-US" dirty="0"/>
-              <a:t>一个是遗传基因，占</a:t>
-            </a:r>
-            <a:r>
-              <a:rPr lang="en-US" altLang="zh-CN" dirty="0"/>
-              <a:t>60%</a:t>
-            </a:r>
-            <a:r>
-              <a:rPr lang="zh-CN" altLang="en-US" dirty="0"/>
-              <a:t>，年纪大了后甚至占</a:t>
-            </a:r>
-            <a:r>
-              <a:rPr lang="en-US" altLang="zh-CN" dirty="0"/>
-              <a:t>80%</a:t>
-            </a:r>
-            <a:r>
-              <a:rPr lang="zh-CN" altLang="en-US" dirty="0"/>
-              <a:t>以上。</a:t>
-            </a:r>
-          </a:p>
-          <a:p>
-            <a:pPr marL="0" indent="0">
-              <a:buNone/>
-            </a:pPr>
-            <a:endParaRPr lang="zh-CN" altLang="en-US" dirty="0"/>
-          </a:p>
-          <a:p>
-            <a:pPr marL="0" indent="0">
-              <a:buNone/>
-            </a:pPr>
-            <a:r>
-              <a:rPr lang="zh-CN" altLang="en-US" dirty="0"/>
-              <a:t>二个是环境影响，占</a:t>
-            </a:r>
-            <a:r>
-              <a:rPr lang="en-US" altLang="zh-CN" dirty="0"/>
-              <a:t>35%</a:t>
-            </a:r>
-            <a:r>
-              <a:rPr lang="zh-CN" altLang="en-US" dirty="0"/>
-              <a:t>。</a:t>
-            </a:r>
-          </a:p>
-          <a:p>
-            <a:pPr marL="0" indent="0">
-              <a:buNone/>
-            </a:pPr>
-            <a:endParaRPr lang="zh-CN" altLang="en-US" dirty="0"/>
-          </a:p>
-          <a:p>
-            <a:pPr marL="0" indent="0">
-              <a:buNone/>
-            </a:pPr>
-            <a:r>
-              <a:rPr lang="zh-CN" altLang="en-US" dirty="0"/>
-              <a:t>剩下不到</a:t>
-            </a:r>
-            <a:r>
-              <a:rPr lang="en-US" altLang="zh-CN" dirty="0"/>
-              <a:t>5%</a:t>
-            </a:r>
-            <a:r>
-              <a:rPr lang="zh-CN" altLang="en-US" dirty="0"/>
-              <a:t>，是其他影响。</a:t>
-            </a:r>
-          </a:p>
-          <a:p>
-            <a:pPr marL="0" indent="0">
-              <a:buNone/>
-            </a:pPr>
-            <a:endParaRPr lang="zh-CN" altLang="en-US" dirty="0"/>
-          </a:p>
-          <a:p>
-            <a:pPr marL="0" indent="0">
-              <a:buNone/>
-            </a:pPr>
-            <a:endParaRPr lang="zh-CN" altLang="en-US" dirty="0"/>
-          </a:p>
-          <a:p>
-            <a:pPr marL="0" indent="0">
-              <a:buNone/>
-            </a:pPr>
-            <a:endParaRPr lang="zh-CN" altLang="en-US" dirty="0"/>
-          </a:p>
-          <a:p>
-            <a:pPr marL="0" indent="0">
-              <a:buNone/>
-            </a:pPr>
-            <a:r>
-              <a:rPr lang="zh-CN" altLang="en-US" dirty="0"/>
-              <a:t>即便是同卵双胞胎，在分别放到不同的家庭中，最后也会表现出非常相似非常接近的习惯和行为。</a:t>
-            </a:r>
-          </a:p>
-          <a:p>
-            <a:pPr marL="0" indent="0">
-              <a:buNone/>
-            </a:pPr>
-            <a:endParaRPr lang="zh-CN" altLang="en-US" dirty="0"/>
-          </a:p>
-          <a:p>
-            <a:pPr marL="0" indent="0">
-              <a:buNone/>
-            </a:pPr>
-            <a:r>
-              <a:rPr lang="zh-CN" altLang="en-US" dirty="0"/>
-              <a:t>大家可以去网上查资料，这是真实的科学实验，全世界都有报道过。</a:t>
-            </a:r>
-          </a:p>
-          <a:p>
-            <a:pPr marL="0" indent="0">
-              <a:buNone/>
-            </a:pPr>
-            <a:endParaRPr lang="zh-CN" altLang="en-US" dirty="0"/>
-          </a:p>
-          <a:p>
-            <a:pPr marL="0" indent="0">
-              <a:buNone/>
-            </a:pPr>
-            <a:r>
-              <a:rPr lang="zh-CN" altLang="en-US" dirty="0"/>
-              <a:t>大家也可以去看一本书</a:t>
-            </a:r>
-            <a:r>
-              <a:rPr lang="en-US" altLang="zh-CN" dirty="0"/>
-              <a:t>《</a:t>
-            </a:r>
-            <a:r>
-              <a:rPr lang="zh-CN" altLang="en-US" dirty="0"/>
-              <a:t>基因蓝图</a:t>
-            </a:r>
-            <a:r>
-              <a:rPr lang="en-US" altLang="zh-CN" dirty="0"/>
-              <a:t>》</a:t>
-            </a:r>
-            <a:r>
-              <a:rPr lang="zh-CN" altLang="en-US" dirty="0"/>
-              <a:t>，里面写得非常清楚。</a:t>
-            </a:r>
-          </a:p>
-          <a:p>
-            <a:pPr marL="0" indent="0">
-              <a:buNone/>
-            </a:pPr>
-            <a:endParaRPr lang="zh-CN" altLang="en-US" dirty="0"/>
-          </a:p>
-          <a:p>
-            <a:pPr marL="0" indent="0">
-              <a:buNone/>
-            </a:pPr>
-            <a:r>
-              <a:rPr lang="zh-CN" altLang="en-US" dirty="0"/>
-              <a:t>这里面已经澄清家庭教养方式对孩子来说并不存在决定性。</a:t>
-            </a:r>
-          </a:p>
-          <a:p>
-            <a:pPr marL="0" indent="0">
-              <a:buNone/>
-            </a:pPr>
-            <a:endParaRPr lang="zh-CN" altLang="en-US" dirty="0"/>
-          </a:p>
-          <a:p>
-            <a:pPr marL="0" indent="0">
-              <a:buNone/>
-            </a:pPr>
-            <a:r>
-              <a:rPr lang="zh-CN" altLang="en-US" dirty="0"/>
-              <a:t>前面说的，除了基因影响之外，环境影响主要是指家庭外的社会环境影响。</a:t>
-            </a:r>
-          </a:p>
-          <a:p>
-            <a:pPr marL="0" indent="0">
-              <a:buNone/>
-            </a:pPr>
-            <a:endParaRPr lang="zh-CN" altLang="en-US" dirty="0"/>
-          </a:p>
-          <a:p>
-            <a:pPr marL="0" indent="0">
-              <a:buNone/>
-            </a:pPr>
-            <a:endParaRPr lang="zh-CN" altLang="en-US" dirty="0"/>
-          </a:p>
-          <a:p>
-            <a:pPr marL="0" indent="0">
-              <a:buNone/>
-            </a:pPr>
-            <a:endParaRPr lang="zh-CN" altLang="en-US" dirty="0"/>
-          </a:p>
-          <a:p>
-            <a:pPr marL="0" indent="0">
-              <a:buNone/>
-            </a:pPr>
-            <a:r>
-              <a:rPr lang="zh-CN" altLang="en-US" dirty="0"/>
-              <a:t>（即便是家庭条件的好坏，也不是必然，宠众望）</a:t>
-            </a:r>
-          </a:p>
-          <a:p>
-            <a:pPr marL="0" indent="0">
-              <a:buNone/>
-            </a:pPr>
-            <a:endParaRPr lang="zh-CN" altLang="en-US" dirty="0"/>
-          </a:p>
-          <a:p>
-            <a:pPr marL="0" indent="0">
-              <a:buNone/>
-            </a:pPr>
-            <a:endParaRPr lang="zh-CN" altLang="en-US" dirty="0"/>
-          </a:p>
-          <a:p>
-            <a:pPr marL="0" indent="0">
-              <a:buNone/>
-            </a:pPr>
-            <a:endParaRPr lang="zh-CN" altLang="en-US" dirty="0"/>
-          </a:p>
-          <a:p>
-            <a:pPr marL="0" indent="0">
-              <a:buNone/>
-            </a:pPr>
-            <a:endParaRPr lang="zh-CN" altLang="en-US" dirty="0"/>
-          </a:p>
-          <a:p>
-            <a:pPr marL="0" indent="0">
-              <a:buNone/>
-            </a:pPr>
-            <a:endParaRPr lang="zh-CN" altLang="en-US" dirty="0"/>
-          </a:p>
-          <a:p>
-            <a:pPr marL="0" indent="0">
-              <a:buNone/>
-            </a:pPr>
-            <a:r>
-              <a:rPr lang="zh-CN" altLang="en-US" dirty="0"/>
-              <a:t>**家庭的历史变迁**</a:t>
-            </a:r>
-          </a:p>
-          <a:p>
-            <a:pPr marL="0" indent="0">
-              <a:buNone/>
-            </a:pPr>
-            <a:endParaRPr lang="zh-CN" altLang="en-US" dirty="0"/>
-          </a:p>
-          <a:p>
-            <a:pPr marL="0" indent="0">
-              <a:buNone/>
-            </a:pPr>
-            <a:r>
-              <a:rPr lang="zh-CN" altLang="en-US" dirty="0"/>
-              <a:t>在农耕时代，我们是生活在一个什么环境中的呢？</a:t>
-            </a:r>
-          </a:p>
-          <a:p>
-            <a:pPr marL="0" indent="0">
-              <a:buNone/>
-            </a:pPr>
-            <a:endParaRPr lang="zh-CN" altLang="en-US" dirty="0"/>
-          </a:p>
-          <a:p>
-            <a:pPr marL="0" indent="0">
-              <a:buNone/>
-            </a:pPr>
-            <a:r>
-              <a:rPr lang="zh-CN" altLang="en-US" dirty="0"/>
-              <a:t>七大姑八大姨，汉语中有非常多的亲戚的称呼，就说明我们生活在一个大的家族体系中。</a:t>
-            </a:r>
-          </a:p>
-          <a:p>
-            <a:pPr marL="0" indent="0">
-              <a:buNone/>
-            </a:pPr>
-            <a:endParaRPr lang="zh-CN" altLang="en-US" dirty="0"/>
-          </a:p>
-          <a:p>
-            <a:pPr marL="0" indent="0">
-              <a:buNone/>
-            </a:pPr>
-            <a:r>
-              <a:rPr lang="zh-CN" altLang="en-US" dirty="0"/>
-              <a:t>即便你家的亲戚不多，大家也生活在一个村里，八竿子打不着的远房亲戚多少也有几个。</a:t>
-            </a:r>
-          </a:p>
-          <a:p>
-            <a:pPr marL="0" indent="0">
-              <a:buNone/>
-            </a:pPr>
-            <a:endParaRPr lang="zh-CN" altLang="en-US" dirty="0"/>
-          </a:p>
-          <a:p>
-            <a:pPr marL="0" indent="0">
-              <a:buNone/>
-            </a:pPr>
-            <a:r>
-              <a:rPr lang="zh-CN" altLang="en-US" dirty="0"/>
-              <a:t>这种家族式的群居生活，是源自农业耕作需要，因为人多力量大嘛！</a:t>
-            </a:r>
-          </a:p>
-          <a:p>
-            <a:pPr marL="0" indent="0">
-              <a:buNone/>
-            </a:pPr>
-            <a:endParaRPr lang="zh-CN" altLang="en-US" dirty="0"/>
-          </a:p>
-          <a:p>
-            <a:pPr marL="0" indent="0">
-              <a:buNone/>
-            </a:pPr>
-            <a:r>
-              <a:rPr lang="zh-CN" altLang="en-US" dirty="0"/>
-              <a:t>大家都团结在一起，除此之外，还有祖坟、祠堂、家谱等等。</a:t>
-            </a:r>
-          </a:p>
-          <a:p>
-            <a:pPr marL="0" indent="0">
-              <a:buNone/>
-            </a:pPr>
-            <a:endParaRPr lang="zh-CN" altLang="en-US" dirty="0"/>
-          </a:p>
-          <a:p>
-            <a:pPr marL="0" indent="0">
-              <a:buNone/>
-            </a:pPr>
-            <a:r>
-              <a:rPr lang="zh-CN" altLang="en-US" dirty="0"/>
-              <a:t>以前的孩子们，就是在这样的环境中成长起来的。</a:t>
-            </a:r>
-          </a:p>
-          <a:p>
-            <a:pPr marL="0" indent="0">
-              <a:buNone/>
-            </a:pPr>
-            <a:endParaRPr lang="zh-CN" altLang="en-US" dirty="0"/>
-          </a:p>
-          <a:p>
-            <a:pPr marL="0" indent="0">
-              <a:buNone/>
-            </a:pPr>
-            <a:endParaRPr lang="zh-CN" altLang="en-US" dirty="0"/>
-          </a:p>
-          <a:p>
-            <a:pPr marL="0" indent="0">
-              <a:buNone/>
-            </a:pPr>
-            <a:endParaRPr lang="zh-CN" altLang="en-US" dirty="0"/>
-          </a:p>
-          <a:p>
-            <a:pPr marL="0" indent="0">
-              <a:buNone/>
-            </a:pPr>
-            <a:r>
-              <a:rPr lang="zh-CN" altLang="en-US" dirty="0"/>
-              <a:t>好，接下来到了上个世纪</a:t>
-            </a:r>
-            <a:r>
-              <a:rPr lang="en-US" altLang="zh-CN" dirty="0"/>
-              <a:t>80</a:t>
-            </a:r>
-            <a:r>
-              <a:rPr lang="zh-CN" altLang="en-US" dirty="0"/>
-              <a:t>年代之前。</a:t>
-            </a:r>
-          </a:p>
-          <a:p>
-            <a:pPr marL="0" indent="0">
-              <a:buNone/>
-            </a:pPr>
-            <a:endParaRPr lang="zh-CN" altLang="en-US" dirty="0"/>
-          </a:p>
-          <a:p>
-            <a:pPr marL="0" indent="0">
-              <a:buNone/>
-            </a:pPr>
-            <a:r>
-              <a:rPr lang="zh-CN" altLang="en-US" dirty="0"/>
-              <a:t>当时的生活环境是怎么样的呢？</a:t>
-            </a:r>
-          </a:p>
-          <a:p>
-            <a:pPr marL="0" indent="0">
-              <a:buNone/>
-            </a:pPr>
-            <a:endParaRPr lang="zh-CN" altLang="en-US" dirty="0"/>
-          </a:p>
-          <a:p>
-            <a:pPr marL="0" indent="0">
-              <a:buNone/>
-            </a:pPr>
-            <a:r>
-              <a:rPr lang="zh-CN" altLang="en-US" dirty="0"/>
-              <a:t>首先想到的是，家属院，厂办学校，厂办医院，厂办食堂。</a:t>
-            </a:r>
-          </a:p>
-          <a:p>
-            <a:pPr marL="0" indent="0">
-              <a:buNone/>
-            </a:pPr>
-            <a:endParaRPr lang="zh-CN" altLang="en-US" dirty="0"/>
-          </a:p>
-          <a:p>
-            <a:pPr marL="0" indent="0">
-              <a:buNone/>
-            </a:pPr>
-            <a:r>
-              <a:rPr lang="zh-CN" altLang="en-US" dirty="0"/>
-              <a:t>大家都生活在一个集体中。</a:t>
-            </a:r>
-          </a:p>
-          <a:p>
-            <a:pPr marL="0" indent="0">
-              <a:buNone/>
-            </a:pPr>
-            <a:endParaRPr lang="zh-CN" altLang="en-US" dirty="0"/>
-          </a:p>
-          <a:p>
-            <a:pPr marL="0" indent="0">
-              <a:buNone/>
-            </a:pPr>
-            <a:r>
-              <a:rPr lang="zh-CN" altLang="en-US" dirty="0"/>
-              <a:t>什么都是公家的，自已也是公家的人。</a:t>
-            </a:r>
-          </a:p>
-          <a:p>
-            <a:pPr marL="0" indent="0">
-              <a:buNone/>
-            </a:pPr>
-            <a:endParaRPr lang="zh-CN" altLang="en-US" dirty="0"/>
-          </a:p>
-          <a:p>
-            <a:pPr marL="0" indent="0">
-              <a:buNone/>
-            </a:pPr>
-            <a:r>
-              <a:rPr lang="zh-CN" altLang="en-US" dirty="0"/>
-              <a:t>所以说那一辈子爱占小便宜，其实并不是品行不好，而是他们习惯了生活在公家这种环境中。</a:t>
-            </a:r>
-          </a:p>
-          <a:p>
-            <a:pPr marL="0" indent="0">
-              <a:buNone/>
-            </a:pPr>
-            <a:endParaRPr lang="zh-CN" altLang="en-US" dirty="0"/>
-          </a:p>
-          <a:p>
-            <a:pPr marL="0" indent="0">
-              <a:buNone/>
-            </a:pPr>
-            <a:r>
-              <a:rPr lang="zh-CN" altLang="en-US" dirty="0"/>
-              <a:t>谁会说，拿自已家里的东西还不好意思的呢？</a:t>
-            </a:r>
-          </a:p>
-          <a:p>
-            <a:pPr marL="0" indent="0">
-              <a:buNone/>
-            </a:pPr>
-            <a:endParaRPr lang="zh-CN" altLang="en-US" dirty="0"/>
-          </a:p>
-          <a:p>
-            <a:pPr marL="0" indent="0">
-              <a:buNone/>
-            </a:pPr>
-            <a:r>
-              <a:rPr lang="zh-CN" altLang="en-US" dirty="0"/>
-              <a:t>这是那时候养成的习惯，因为就没有个人私人的概念。</a:t>
-            </a:r>
-          </a:p>
-          <a:p>
-            <a:pPr marL="0" indent="0">
-              <a:buNone/>
-            </a:pPr>
-            <a:endParaRPr lang="zh-CN" altLang="en-US" dirty="0"/>
-          </a:p>
-          <a:p>
-            <a:pPr marL="0" indent="0">
-              <a:buNone/>
-            </a:pPr>
-            <a:r>
-              <a:rPr lang="zh-CN" altLang="en-US" dirty="0"/>
-              <a:t>当时的孩子们，就生活在这样的环境中，长辈们可能都是同事或领导，小伙伴们可能都是周围差不多都是一个单位组织的孩子。</a:t>
-            </a:r>
-          </a:p>
-          <a:p>
-            <a:pPr marL="0" indent="0">
-              <a:buNone/>
-            </a:pPr>
-            <a:endParaRPr lang="zh-CN" altLang="en-US" dirty="0"/>
-          </a:p>
-          <a:p>
-            <a:pPr marL="0" indent="0">
-              <a:buNone/>
-            </a:pPr>
-            <a:endParaRPr lang="zh-CN" altLang="en-US" dirty="0"/>
-          </a:p>
-          <a:p>
-            <a:pPr marL="0" indent="0">
-              <a:buNone/>
-            </a:pPr>
-            <a:endParaRPr lang="zh-CN" altLang="en-US" dirty="0"/>
-          </a:p>
-          <a:p>
-            <a:pPr marL="0" indent="0">
-              <a:buNone/>
-            </a:pPr>
-            <a:r>
-              <a:rPr lang="zh-CN" altLang="en-US" dirty="0"/>
-              <a:t>好，现在到了</a:t>
-            </a:r>
-            <a:r>
-              <a:rPr lang="en-US" altLang="zh-CN" dirty="0"/>
-              <a:t>80</a:t>
-            </a:r>
-            <a:r>
-              <a:rPr lang="zh-CN" altLang="en-US" dirty="0"/>
-              <a:t>、</a:t>
-            </a:r>
-            <a:r>
-              <a:rPr lang="en-US" altLang="zh-CN" dirty="0"/>
-              <a:t>90</a:t>
-            </a:r>
-            <a:r>
-              <a:rPr lang="zh-CN" altLang="en-US" dirty="0"/>
-              <a:t>年代。</a:t>
-            </a:r>
-          </a:p>
-          <a:p>
-            <a:pPr marL="0" indent="0">
-              <a:buNone/>
-            </a:pPr>
-            <a:endParaRPr lang="zh-CN" altLang="en-US" dirty="0"/>
-          </a:p>
-          <a:p>
-            <a:pPr marL="0" indent="0">
-              <a:buNone/>
-            </a:pPr>
-            <a:r>
-              <a:rPr lang="en-US" altLang="zh-CN" dirty="0"/>
-              <a:t>72</a:t>
-            </a:r>
-            <a:r>
-              <a:rPr lang="zh-CN" altLang="en-US" dirty="0"/>
-              <a:t>年尼克松访华，</a:t>
-            </a:r>
-            <a:r>
-              <a:rPr lang="en-US" altLang="zh-CN" dirty="0"/>
-              <a:t>79</a:t>
-            </a:r>
-            <a:r>
-              <a:rPr lang="zh-CN" altLang="en-US" dirty="0"/>
-              <a:t>年中美正式建交。</a:t>
-            </a:r>
-          </a:p>
-          <a:p>
-            <a:pPr marL="0" indent="0">
-              <a:buNone/>
-            </a:pPr>
-            <a:endParaRPr lang="zh-CN" altLang="en-US" dirty="0"/>
-          </a:p>
-          <a:p>
-            <a:pPr marL="0" indent="0">
-              <a:buNone/>
-            </a:pPr>
-            <a:r>
-              <a:rPr lang="zh-CN" altLang="en-US" dirty="0"/>
-              <a:t>中美蜜月期，关系好得跟穿一条裤子似的。</a:t>
-            </a:r>
-          </a:p>
-          <a:p>
-            <a:pPr marL="0" indent="0">
-              <a:buNone/>
-            </a:pPr>
-            <a:endParaRPr lang="zh-CN" altLang="en-US" dirty="0"/>
-          </a:p>
-          <a:p>
-            <a:pPr marL="0" indent="0">
-              <a:buNone/>
-            </a:pPr>
-            <a:r>
-              <a:rPr lang="zh-CN" altLang="en-US" dirty="0"/>
-              <a:t>好到什么程度呢？</a:t>
-            </a:r>
-          </a:p>
-          <a:p>
-            <a:pPr marL="0" indent="0">
-              <a:buNone/>
-            </a:pPr>
-            <a:endParaRPr lang="zh-CN" altLang="en-US" dirty="0"/>
-          </a:p>
-          <a:p>
-            <a:pPr marL="0" indent="0">
-              <a:buNone/>
-            </a:pPr>
-            <a:r>
-              <a:rPr lang="zh-CN" altLang="en-US" dirty="0"/>
-              <a:t>据说美国把当时最好的武器都开放售卖给了中国。</a:t>
-            </a:r>
-          </a:p>
-          <a:p>
-            <a:pPr marL="0" indent="0">
-              <a:buNone/>
-            </a:pPr>
-            <a:endParaRPr lang="zh-CN" altLang="en-US" dirty="0"/>
-          </a:p>
-          <a:p>
-            <a:pPr marL="0" indent="0">
-              <a:buNone/>
-            </a:pPr>
-            <a:r>
-              <a:rPr lang="zh-CN" altLang="en-US" dirty="0"/>
-              <a:t>当然，它是为了联合中国去对付苏联。</a:t>
-            </a:r>
-          </a:p>
-          <a:p>
-            <a:pPr marL="0" indent="0">
-              <a:buNone/>
-            </a:pPr>
-            <a:endParaRPr lang="zh-CN" altLang="en-US" dirty="0"/>
-          </a:p>
-          <a:p>
-            <a:pPr marL="0" indent="0">
-              <a:buNone/>
-            </a:pPr>
-            <a:r>
-              <a:rPr lang="zh-CN" altLang="en-US" dirty="0"/>
-              <a:t>当时的越南一看情况有变，你个浓眉大眼的中国也叛变西方帝国主义了，就开始挑事。</a:t>
-            </a:r>
-          </a:p>
-          <a:p>
-            <a:pPr marL="0" indent="0">
-              <a:buNone/>
-            </a:pPr>
-            <a:endParaRPr lang="zh-CN" altLang="en-US" dirty="0"/>
-          </a:p>
-          <a:p>
-            <a:pPr marL="0" indent="0">
-              <a:buNone/>
-            </a:pPr>
-            <a:r>
-              <a:rPr lang="zh-CN" altLang="en-US" dirty="0"/>
-              <a:t>邓公当时说，小朋友不听话，就要打屁股，于是就和美国打了招呼，说我要开始教训小朋友了。</a:t>
-            </a:r>
-          </a:p>
-          <a:p>
-            <a:pPr marL="0" indent="0">
-              <a:buNone/>
-            </a:pPr>
-            <a:endParaRPr lang="zh-CN" altLang="en-US" dirty="0"/>
-          </a:p>
-          <a:p>
-            <a:pPr marL="0" indent="0">
-              <a:buNone/>
-            </a:pPr>
-            <a:r>
-              <a:rPr lang="zh-CN" altLang="en-US" dirty="0"/>
-              <a:t>于是越战爆发，时间点就是</a:t>
-            </a:r>
-            <a:r>
-              <a:rPr lang="en-US" altLang="zh-CN" dirty="0"/>
-              <a:t>80</a:t>
-            </a:r>
-            <a:r>
-              <a:rPr lang="zh-CN" altLang="en-US" dirty="0"/>
-              <a:t>年代。</a:t>
-            </a:r>
-          </a:p>
-          <a:p>
-            <a:pPr marL="0" indent="0">
-              <a:buNone/>
-            </a:pPr>
-            <a:endParaRPr lang="zh-CN" altLang="en-US" dirty="0"/>
-          </a:p>
-          <a:p>
-            <a:pPr marL="0" indent="0">
-              <a:buNone/>
-            </a:pPr>
-            <a:r>
-              <a:rPr lang="zh-CN" altLang="en-US" dirty="0"/>
-              <a:t>当然这些都是政治话题，我们不多说。</a:t>
-            </a:r>
-          </a:p>
-          <a:p>
-            <a:pPr marL="0" indent="0">
-              <a:buNone/>
-            </a:pPr>
-            <a:endParaRPr lang="zh-CN" altLang="en-US" dirty="0"/>
-          </a:p>
-          <a:p>
-            <a:pPr marL="0" indent="0">
-              <a:buNone/>
-            </a:pPr>
-            <a:r>
-              <a:rPr lang="zh-CN" altLang="en-US" dirty="0"/>
-              <a:t>我们只说，中美关系当时是非常好的，美国也用最大的力量帮助中国发展经济。</a:t>
-            </a:r>
-          </a:p>
-          <a:p>
-            <a:pPr marL="0" indent="0">
-              <a:buNone/>
-            </a:pPr>
-            <a:endParaRPr lang="zh-CN" altLang="en-US" dirty="0"/>
-          </a:p>
-          <a:p>
-            <a:pPr marL="0" indent="0">
-              <a:buNone/>
-            </a:pPr>
-            <a:r>
-              <a:rPr lang="zh-CN" altLang="en-US" dirty="0"/>
-              <a:t>于是中国的经济开始飞速发展了，但同时西方的部分思潮也跟着进来了。</a:t>
-            </a:r>
-          </a:p>
-          <a:p>
-            <a:pPr marL="0" indent="0">
-              <a:buNone/>
-            </a:pPr>
-            <a:endParaRPr lang="zh-CN" altLang="en-US" dirty="0"/>
-          </a:p>
-          <a:p>
-            <a:pPr marL="0" indent="0">
-              <a:buNone/>
-            </a:pPr>
-            <a:r>
-              <a:rPr lang="zh-CN" altLang="en-US" dirty="0"/>
-              <a:t>当时就面临着国有企业转型的问题，大量的国有资产转成了私营。</a:t>
-            </a:r>
-          </a:p>
-          <a:p>
-            <a:pPr marL="0" indent="0">
-              <a:buNone/>
-            </a:pPr>
-            <a:endParaRPr lang="zh-CN" altLang="en-US" dirty="0"/>
-          </a:p>
-          <a:p>
-            <a:pPr marL="0" indent="0">
-              <a:buNone/>
-            </a:pPr>
-            <a:r>
-              <a:rPr lang="en-US" altLang="zh-CN" dirty="0"/>
-              <a:t>94</a:t>
-            </a:r>
-            <a:r>
-              <a:rPr lang="zh-CN" altLang="en-US" dirty="0"/>
-              <a:t>年国家出台的分税制改革，让地方政府出现了财政上的困难。</a:t>
-            </a:r>
-          </a:p>
-          <a:p>
-            <a:pPr marL="0" indent="0">
-              <a:buNone/>
-            </a:pPr>
-            <a:endParaRPr lang="zh-CN" altLang="en-US" dirty="0"/>
-          </a:p>
-          <a:p>
-            <a:pPr marL="0" indent="0">
-              <a:buNone/>
-            </a:pPr>
-            <a:r>
-              <a:rPr lang="zh-CN" altLang="en-US" dirty="0"/>
-              <a:t>各种状况频频出现，导致了全国性的大下岗。</a:t>
-            </a:r>
-          </a:p>
-          <a:p>
-            <a:pPr marL="0" indent="0">
-              <a:buNone/>
-            </a:pPr>
-            <a:endParaRPr lang="zh-CN" altLang="en-US" dirty="0"/>
-          </a:p>
-          <a:p>
-            <a:pPr marL="0" indent="0">
-              <a:buNone/>
-            </a:pPr>
-            <a:r>
-              <a:rPr lang="zh-CN" altLang="en-US" dirty="0"/>
-              <a:t>到了</a:t>
-            </a:r>
-            <a:r>
-              <a:rPr lang="en-US" altLang="zh-CN" dirty="0"/>
-              <a:t>90</a:t>
-            </a:r>
-            <a:r>
-              <a:rPr lang="zh-CN" altLang="en-US" dirty="0"/>
-              <a:t>年代末期，已经有很多工人失业。</a:t>
-            </a:r>
-          </a:p>
-          <a:p>
-            <a:pPr marL="0" indent="0">
-              <a:buNone/>
-            </a:pPr>
-            <a:endParaRPr lang="zh-CN" altLang="en-US" dirty="0"/>
-          </a:p>
-          <a:p>
-            <a:pPr marL="0" indent="0">
-              <a:buNone/>
-            </a:pPr>
-            <a:r>
-              <a:rPr lang="zh-CN" altLang="en-US" dirty="0"/>
-              <a:t>失业到什么程度呢？</a:t>
-            </a:r>
-          </a:p>
-          <a:p>
-            <a:pPr marL="0" indent="0">
-              <a:buNone/>
-            </a:pPr>
-            <a:endParaRPr lang="zh-CN" altLang="en-US" dirty="0"/>
-          </a:p>
-          <a:p>
-            <a:pPr marL="0" indent="0">
-              <a:buNone/>
-            </a:pPr>
-            <a:r>
-              <a:rPr lang="zh-CN" altLang="en-US" dirty="0"/>
-              <a:t>据说广东和四川多了很多洗脚城。</a:t>
-            </a:r>
-          </a:p>
-          <a:p>
-            <a:pPr marL="0" indent="0">
-              <a:buNone/>
-            </a:pPr>
-            <a:endParaRPr lang="zh-CN" altLang="en-US" dirty="0"/>
-          </a:p>
-          <a:p>
-            <a:pPr marL="0" indent="0">
-              <a:buNone/>
-            </a:pPr>
-            <a:endParaRPr lang="zh-CN" altLang="en-US" dirty="0"/>
-          </a:p>
-          <a:p>
-            <a:pPr marL="0" indent="0">
-              <a:buNone/>
-            </a:pPr>
-            <a:endParaRPr lang="zh-CN" altLang="en-US" dirty="0"/>
-          </a:p>
-          <a:p>
-            <a:pPr marL="0" indent="0">
-              <a:buNone/>
-            </a:pPr>
-            <a:r>
-              <a:rPr lang="zh-CN" altLang="en-US" dirty="0"/>
-              <a:t>当时，在</a:t>
-            </a:r>
-            <a:r>
-              <a:rPr lang="en-US" altLang="zh-CN" dirty="0"/>
-              <a:t>90</a:t>
-            </a:r>
-            <a:r>
-              <a:rPr lang="zh-CN" altLang="en-US" dirty="0"/>
-              <a:t>年代初，大概</a:t>
-            </a:r>
-            <a:r>
-              <a:rPr lang="en-US" altLang="zh-CN" dirty="0"/>
-              <a:t>91</a:t>
-            </a:r>
-            <a:r>
-              <a:rPr lang="zh-CN" altLang="en-US" dirty="0"/>
-              <a:t>年还是</a:t>
-            </a:r>
-            <a:r>
-              <a:rPr lang="en-US" altLang="zh-CN" dirty="0"/>
-              <a:t>92</a:t>
-            </a:r>
-            <a:r>
-              <a:rPr lang="zh-CN" altLang="en-US" dirty="0"/>
-              <a:t>年，曾仕强曾预言中国将来会成为世界第二大经济体，科技水平会超过西方，压根就没人信。</a:t>
-            </a:r>
-          </a:p>
-          <a:p>
-            <a:pPr marL="0" indent="0">
-              <a:buNone/>
-            </a:pPr>
-            <a:endParaRPr lang="zh-CN" altLang="en-US" dirty="0"/>
-          </a:p>
-          <a:p>
-            <a:pPr marL="0" indent="0">
-              <a:buNone/>
-            </a:pPr>
-            <a:r>
-              <a:rPr lang="zh-CN" altLang="en-US" dirty="0"/>
-              <a:t>直到</a:t>
-            </a:r>
-            <a:r>
-              <a:rPr lang="en-US" altLang="zh-CN" dirty="0"/>
-              <a:t>2000</a:t>
-            </a:r>
-            <a:r>
-              <a:rPr lang="zh-CN" altLang="en-US" dirty="0"/>
-              <a:t>年初，发生了根本性的改变。</a:t>
-            </a:r>
-          </a:p>
-          <a:p>
-            <a:pPr marL="0" indent="0">
-              <a:buNone/>
-            </a:pPr>
-            <a:endParaRPr lang="zh-CN" altLang="en-US" dirty="0"/>
-          </a:p>
-          <a:p>
-            <a:pPr marL="0" indent="0">
-              <a:buNone/>
-            </a:pPr>
-            <a:r>
-              <a:rPr lang="zh-CN" altLang="en-US" dirty="0"/>
-              <a:t>当时中国加入了</a:t>
-            </a:r>
-            <a:r>
-              <a:rPr lang="en-US" altLang="zh-CN" dirty="0"/>
-              <a:t>WTO</a:t>
-            </a:r>
-            <a:r>
-              <a:rPr lang="zh-CN" altLang="en-US" dirty="0"/>
-              <a:t>，并且还有一个重要因素，就是网络的兴起。</a:t>
-            </a:r>
-          </a:p>
-          <a:p>
-            <a:pPr marL="0" indent="0">
-              <a:buNone/>
-            </a:pPr>
-            <a:endParaRPr lang="zh-CN" altLang="en-US" dirty="0"/>
-          </a:p>
-          <a:p>
-            <a:pPr marL="0" indent="0">
-              <a:buNone/>
-            </a:pPr>
-            <a:r>
-              <a:rPr lang="zh-CN" altLang="en-US" dirty="0"/>
-              <a:t>大量的农民工进城。</a:t>
-            </a:r>
-          </a:p>
-          <a:p>
-            <a:pPr marL="0" indent="0">
-              <a:buNone/>
-            </a:pPr>
-            <a:endParaRPr lang="zh-CN" altLang="en-US" dirty="0"/>
-          </a:p>
-          <a:p>
-            <a:pPr marL="0" indent="0">
-              <a:buNone/>
-            </a:pPr>
-            <a:r>
-              <a:rPr lang="zh-CN" altLang="en-US" dirty="0"/>
-              <a:t>进城干什么呢？</a:t>
-            </a:r>
-          </a:p>
-          <a:p>
-            <a:pPr marL="0" indent="0">
-              <a:buNone/>
-            </a:pPr>
-            <a:endParaRPr lang="zh-CN" altLang="en-US" dirty="0"/>
-          </a:p>
-          <a:p>
-            <a:pPr marL="0" indent="0">
-              <a:buNone/>
-            </a:pPr>
-            <a:r>
-              <a:rPr lang="zh-CN" altLang="en-US" dirty="0"/>
-              <a:t>当然是打工赚钱了！</a:t>
-            </a:r>
-          </a:p>
-          <a:p>
-            <a:pPr marL="0" indent="0">
-              <a:buNone/>
-            </a:pPr>
-            <a:endParaRPr lang="zh-CN" altLang="en-US" dirty="0"/>
-          </a:p>
-          <a:p>
-            <a:pPr marL="0" indent="0">
-              <a:buNone/>
-            </a:pPr>
-            <a:r>
-              <a:rPr lang="zh-CN" altLang="en-US" dirty="0"/>
-              <a:t>随着房地产开发以及经济的恢复，城市建设起来了，大家的日子也慢慢好起来了。</a:t>
-            </a:r>
-          </a:p>
-          <a:p>
-            <a:pPr marL="0" indent="0">
-              <a:buNone/>
-            </a:pPr>
-            <a:endParaRPr lang="zh-CN" altLang="en-US" dirty="0"/>
-          </a:p>
-          <a:p>
-            <a:pPr marL="0" indent="0">
-              <a:buNone/>
-            </a:pPr>
-            <a:endParaRPr lang="zh-CN" altLang="en-US" dirty="0"/>
-          </a:p>
-          <a:p>
-            <a:pPr marL="0" indent="0">
-              <a:buNone/>
-            </a:pPr>
-            <a:endParaRPr lang="zh-CN" altLang="en-US" dirty="0"/>
-          </a:p>
-          <a:p>
-            <a:pPr marL="0" indent="0">
-              <a:buNone/>
-            </a:pPr>
-            <a:r>
-              <a:rPr lang="zh-CN" altLang="en-US" dirty="0"/>
-              <a:t>好，说了这么说，大家发现没有。 </a:t>
-            </a:r>
-          </a:p>
-          <a:p>
-            <a:pPr marL="0" indent="0">
-              <a:buNone/>
-            </a:pPr>
-            <a:endParaRPr lang="zh-CN" altLang="en-US" dirty="0"/>
-          </a:p>
-          <a:p>
-            <a:pPr marL="0" indent="0">
-              <a:buNone/>
-            </a:pPr>
-            <a:r>
-              <a:rPr lang="zh-CN" altLang="en-US" dirty="0"/>
-              <a:t>孩子们生活的环境发生了怎样的变化呢？</a:t>
-            </a:r>
-          </a:p>
-          <a:p>
-            <a:pPr marL="0" indent="0">
-              <a:buNone/>
-            </a:pPr>
-            <a:endParaRPr lang="zh-CN" altLang="en-US" dirty="0"/>
-          </a:p>
-          <a:p>
-            <a:pPr marL="0" indent="0">
-              <a:buNone/>
-            </a:pPr>
-            <a:r>
-              <a:rPr lang="zh-CN" altLang="en-US" dirty="0"/>
-              <a:t>过去不管是家族式群居生活也好，还是公家国营集体生活也好，都已经不复存在了。</a:t>
-            </a:r>
-          </a:p>
-          <a:p>
-            <a:pPr marL="0" indent="0">
-              <a:buNone/>
-            </a:pPr>
-            <a:endParaRPr lang="zh-CN" altLang="en-US" dirty="0"/>
-          </a:p>
-          <a:p>
-            <a:pPr marL="0" indent="0">
-              <a:buNone/>
-            </a:pPr>
-            <a:r>
-              <a:rPr lang="zh-CN" altLang="en-US" dirty="0"/>
-              <a:t>取而代之的是，孩子们住在钢筋混凝土的楼房里，大量的留守儿童。</a:t>
-            </a:r>
-          </a:p>
-          <a:p>
-            <a:pPr marL="0" indent="0">
-              <a:buNone/>
-            </a:pPr>
-            <a:endParaRPr lang="zh-CN" altLang="en-US" dirty="0"/>
-          </a:p>
-          <a:p>
-            <a:pPr marL="0" indent="0">
-              <a:buNone/>
-            </a:pPr>
-            <a:r>
-              <a:rPr lang="zh-CN" altLang="en-US" dirty="0"/>
-              <a:t>以前的居住环境已经变成了各自独立生活。</a:t>
-            </a:r>
-          </a:p>
-          <a:p>
-            <a:pPr marL="0" indent="0">
-              <a:buNone/>
-            </a:pPr>
-            <a:endParaRPr lang="zh-CN" altLang="en-US" dirty="0"/>
-          </a:p>
-          <a:p>
-            <a:pPr marL="0" indent="0">
-              <a:buNone/>
-            </a:pPr>
-            <a:r>
-              <a:rPr lang="zh-CN" altLang="en-US" dirty="0"/>
-              <a:t>我们如果能够正确看待这段发展历史，就会立刻发现，过去传统的家庭环境早已土崩瓦解。</a:t>
-            </a:r>
-          </a:p>
-          <a:p>
-            <a:pPr marL="0" indent="0">
-              <a:buNone/>
-            </a:pPr>
-            <a:endParaRPr lang="zh-CN" altLang="en-US" dirty="0"/>
-          </a:p>
-          <a:p>
-            <a:pPr marL="0" indent="0">
-              <a:buNone/>
-            </a:pPr>
-            <a:endParaRPr lang="zh-CN" altLang="en-US" dirty="0"/>
-          </a:p>
-          <a:p>
-            <a:pPr marL="0" indent="0">
-              <a:buNone/>
-            </a:pPr>
-            <a:endParaRPr lang="zh-CN" altLang="en-US" dirty="0"/>
-          </a:p>
-          <a:p>
-            <a:pPr marL="0" indent="0">
-              <a:buNone/>
-            </a:pPr>
-            <a:r>
-              <a:rPr lang="zh-CN" altLang="en-US" dirty="0"/>
-              <a:t>现在一家三口人，爸爸妈妈孩子。</a:t>
-            </a:r>
-          </a:p>
-          <a:p>
-            <a:pPr marL="0" indent="0">
-              <a:buNone/>
-            </a:pPr>
-            <a:endParaRPr lang="zh-CN" altLang="en-US" dirty="0"/>
-          </a:p>
-          <a:p>
-            <a:pPr marL="0" indent="0">
-              <a:buNone/>
-            </a:pPr>
-            <a:r>
-              <a:rPr lang="zh-CN" altLang="en-US" dirty="0"/>
-              <a:t>开一亮，吃完早饭，爸爸到城东上班，妈妈到城西工作，孩子到城南上学。</a:t>
-            </a:r>
-          </a:p>
-          <a:p>
-            <a:pPr marL="0" indent="0">
-              <a:buNone/>
-            </a:pPr>
-            <a:endParaRPr lang="zh-CN" altLang="en-US" dirty="0"/>
-          </a:p>
-          <a:p>
-            <a:pPr marL="0" indent="0">
-              <a:buNone/>
-            </a:pPr>
-            <a:r>
-              <a:rPr lang="zh-CN" altLang="en-US" dirty="0"/>
-              <a:t>晚上很晚才能回到家。</a:t>
-            </a:r>
-          </a:p>
-          <a:p>
-            <a:pPr marL="0" indent="0">
-              <a:buNone/>
-            </a:pPr>
-            <a:endParaRPr lang="zh-CN" altLang="en-US" dirty="0"/>
-          </a:p>
-          <a:p>
-            <a:pPr marL="0" indent="0">
-              <a:buNone/>
-            </a:pPr>
-            <a:r>
-              <a:rPr lang="zh-CN" altLang="en-US" dirty="0"/>
-              <a:t>现在连一家人在一起吃个晚饭都可能是一件奢侈的事情，更别说要加班，还要补课，还要做其他的事情。</a:t>
-            </a:r>
-          </a:p>
-          <a:p>
-            <a:pPr marL="0" indent="0">
-              <a:buNone/>
-            </a:pPr>
-            <a:endParaRPr lang="zh-CN" altLang="en-US" dirty="0"/>
-          </a:p>
-          <a:p>
-            <a:pPr marL="0" indent="0">
-              <a:buNone/>
-            </a:pPr>
-            <a:r>
-              <a:rPr lang="zh-CN" altLang="en-US" dirty="0"/>
-              <a:t>请问，这是一个家吗？</a:t>
-            </a:r>
-          </a:p>
-          <a:p>
-            <a:pPr marL="0" indent="0">
-              <a:buNone/>
-            </a:pPr>
-            <a:endParaRPr lang="zh-CN" altLang="en-US" dirty="0"/>
-          </a:p>
-          <a:p>
-            <a:pPr marL="0" indent="0">
-              <a:buNone/>
-            </a:pPr>
-            <a:r>
-              <a:rPr lang="zh-CN" altLang="en-US" dirty="0"/>
-              <a:t>关于婚恋纠纷问题的心理咨询，是紧紧排在心理咨询的第二位的，第一位的是儿童青少年心理问题。</a:t>
-            </a:r>
-          </a:p>
-          <a:p>
-            <a:pPr marL="0" indent="0">
-              <a:buNone/>
-            </a:pPr>
-            <a:endParaRPr lang="zh-CN" altLang="en-US" dirty="0"/>
-          </a:p>
-          <a:p>
-            <a:pPr marL="0" indent="0">
-              <a:buNone/>
-            </a:pPr>
-            <a:r>
-              <a:rPr lang="zh-CN" altLang="en-US" dirty="0"/>
-              <a:t>所以你说，为什么会这样？</a:t>
-            </a:r>
-          </a:p>
-          <a:p>
-            <a:pPr marL="0" indent="0">
-              <a:buNone/>
-            </a:pPr>
-            <a:endParaRPr lang="zh-CN" altLang="en-US" dirty="0"/>
-          </a:p>
-          <a:p>
-            <a:pPr marL="0" indent="0">
-              <a:buNone/>
-            </a:pPr>
-            <a:endParaRPr lang="zh-CN" altLang="en-US" dirty="0"/>
-          </a:p>
-          <a:p>
-            <a:pPr marL="0" indent="0">
-              <a:buNone/>
-            </a:pPr>
-            <a:endParaRPr lang="zh-CN" altLang="en-US" dirty="0"/>
-          </a:p>
-          <a:p>
-            <a:pPr marL="0" indent="0">
-              <a:buNone/>
-            </a:pPr>
-            <a:r>
-              <a:rPr lang="zh-CN" altLang="en-US" dirty="0"/>
-              <a:t>随着工业文明的发展，资本主义通过解构传统的人的生活方式，导致了人与人之间是一种分裂式的生活方式。</a:t>
-            </a:r>
-          </a:p>
-          <a:p>
-            <a:pPr marL="0" indent="0">
-              <a:buNone/>
-            </a:pPr>
-            <a:endParaRPr lang="zh-CN" altLang="en-US" dirty="0"/>
-          </a:p>
-          <a:p>
-            <a:pPr marL="0" indent="0">
-              <a:buNone/>
-            </a:pPr>
-            <a:r>
-              <a:rPr lang="zh-CN" altLang="en-US" dirty="0"/>
-              <a:t>我们说的家庭，实质并不是过去的那种家庭。</a:t>
-            </a:r>
-          </a:p>
-          <a:p>
-            <a:pPr marL="0" indent="0">
-              <a:buNone/>
-            </a:pPr>
-            <a:endParaRPr lang="zh-CN" altLang="en-US" dirty="0"/>
-          </a:p>
-          <a:p>
-            <a:pPr marL="0" indent="0">
-              <a:buNone/>
-            </a:pPr>
-            <a:r>
-              <a:rPr lang="zh-CN" altLang="en-US" dirty="0"/>
-              <a:t>过去的家庭，也不是我们理解的由父母和孩子这么简单的组成。</a:t>
-            </a:r>
-          </a:p>
-          <a:p>
-            <a:pPr marL="0" indent="0">
-              <a:buNone/>
-            </a:pPr>
-            <a:endParaRPr lang="zh-CN" altLang="en-US" dirty="0"/>
-          </a:p>
-          <a:p>
-            <a:pPr marL="0" indent="0">
-              <a:buNone/>
-            </a:pPr>
-            <a:r>
-              <a:rPr lang="zh-CN" altLang="en-US" dirty="0"/>
-              <a:t>其本质，实际上反而是一种社会环境，即大家族，由很多人组成的。</a:t>
-            </a:r>
-          </a:p>
-          <a:p>
-            <a:pPr marL="0" indent="0">
-              <a:buNone/>
-            </a:pPr>
-            <a:endParaRPr lang="zh-CN" altLang="en-US" dirty="0"/>
-          </a:p>
-          <a:p>
-            <a:pPr marL="0" indent="0">
-              <a:buNone/>
-            </a:pPr>
-            <a:r>
-              <a:rPr lang="zh-CN" altLang="en-US" dirty="0"/>
-              <a:t>现在的家族充其量也就六个人组成，六个人能给孩子带来什么有效的影响呢？</a:t>
-            </a:r>
-          </a:p>
-          <a:p>
-            <a:pPr marL="0" indent="0">
-              <a:buNone/>
-            </a:pPr>
-            <a:endParaRPr lang="zh-CN" altLang="en-US" dirty="0"/>
-          </a:p>
-          <a:p>
-            <a:pPr marL="0" indent="0">
-              <a:buNone/>
-            </a:pPr>
-            <a:endParaRPr lang="zh-CN" altLang="en-US" dirty="0"/>
-          </a:p>
-          <a:p>
-            <a:pPr marL="0" indent="0">
-              <a:buNone/>
-            </a:pPr>
-            <a:endParaRPr lang="zh-CN" altLang="en-US" dirty="0"/>
-          </a:p>
-          <a:p>
-            <a:pPr marL="0" indent="0">
-              <a:buNone/>
-            </a:pPr>
-            <a:r>
-              <a:rPr lang="zh-CN" altLang="en-US" dirty="0"/>
-              <a:t>有人说了，我感觉家庭对孩子还是有影响的。</a:t>
-            </a:r>
-          </a:p>
-          <a:p>
-            <a:pPr marL="0" indent="0">
-              <a:buNone/>
-            </a:pPr>
-            <a:endParaRPr lang="zh-CN" altLang="en-US" dirty="0"/>
-          </a:p>
-          <a:p>
-            <a:pPr marL="0" indent="0">
-              <a:buNone/>
-            </a:pPr>
-            <a:r>
-              <a:rPr lang="zh-CN" altLang="en-US" dirty="0"/>
-              <a:t>其实你还是没有理解，孟母三迁，你想想是在说家庭父母对孩子的影响吗？</a:t>
-            </a:r>
-          </a:p>
-          <a:p>
-            <a:pPr marL="0" indent="0">
-              <a:buNone/>
-            </a:pPr>
-            <a:endParaRPr lang="zh-CN" altLang="en-US" dirty="0"/>
-          </a:p>
-          <a:p>
-            <a:pPr marL="0" indent="0">
-              <a:buNone/>
-            </a:pPr>
-            <a:r>
-              <a:rPr lang="zh-CN" altLang="en-US" dirty="0"/>
-              <a:t>那分明是在说环境对孩子的影响。</a:t>
-            </a:r>
-          </a:p>
-          <a:p>
-            <a:pPr marL="0" indent="0">
-              <a:buNone/>
-            </a:pPr>
-            <a:endParaRPr lang="zh-CN" altLang="en-US" dirty="0"/>
-          </a:p>
-          <a:p>
-            <a:pPr marL="0" indent="0">
-              <a:buNone/>
-            </a:pPr>
-            <a:r>
-              <a:rPr lang="zh-CN" altLang="en-US" dirty="0"/>
-              <a:t>过去就是家族这种小社会对孩子的影响。</a:t>
-            </a:r>
-          </a:p>
-          <a:p>
-            <a:pPr marL="0" indent="0">
-              <a:buNone/>
-            </a:pPr>
-            <a:endParaRPr lang="zh-CN" altLang="en-US" dirty="0"/>
-          </a:p>
-          <a:p>
-            <a:pPr marL="0" indent="0">
-              <a:buNone/>
-            </a:pPr>
-            <a:r>
-              <a:rPr lang="zh-CN" altLang="en-US" dirty="0"/>
-              <a:t>所以你就应该知道，什么家风、家教，那是过去那种环境下的东西，现在的小家庭，哪里来的什么家风家教？</a:t>
-            </a:r>
-          </a:p>
-          <a:p>
-            <a:pPr marL="0" indent="0">
-              <a:buNone/>
-            </a:pPr>
-            <a:endParaRPr lang="zh-CN" altLang="en-US" dirty="0"/>
-          </a:p>
-          <a:p>
-            <a:pPr marL="0" indent="0">
-              <a:buNone/>
-            </a:pPr>
-            <a:r>
-              <a:rPr lang="zh-CN" altLang="en-US" dirty="0"/>
-              <a:t>几个人对孩子的影响实在是太有限了。</a:t>
-            </a:r>
-          </a:p>
-          <a:p>
-            <a:pPr marL="0" indent="0">
-              <a:buNone/>
-            </a:pPr>
-            <a:endParaRPr lang="zh-CN" altLang="en-US" dirty="0"/>
-          </a:p>
-          <a:p>
-            <a:pPr marL="0" indent="0">
-              <a:buNone/>
-            </a:pPr>
-            <a:endParaRPr lang="zh-CN" altLang="en-US" dirty="0"/>
-          </a:p>
-          <a:p>
-            <a:pPr marL="0" indent="0">
-              <a:buNone/>
-            </a:pPr>
-            <a:endParaRPr lang="zh-CN" altLang="en-US" dirty="0"/>
-          </a:p>
-          <a:p>
-            <a:pPr marL="0" indent="0">
-              <a:buNone/>
-            </a:pPr>
-            <a:r>
-              <a:rPr lang="zh-CN" altLang="en-US" dirty="0"/>
-              <a:t>我们说，为什么孩子越大越不听话。</a:t>
-            </a:r>
-          </a:p>
-          <a:p>
-            <a:pPr marL="0" indent="0">
-              <a:buNone/>
-            </a:pPr>
-            <a:endParaRPr lang="zh-CN" altLang="en-US" dirty="0"/>
-          </a:p>
-          <a:p>
-            <a:pPr marL="0" indent="0">
-              <a:buNone/>
-            </a:pPr>
-            <a:r>
-              <a:rPr lang="zh-CN" altLang="en-US" dirty="0"/>
-              <a:t>其实就是家庭外部环境对孩子的影响，大过于家庭父母对他的影响。</a:t>
-            </a:r>
-          </a:p>
-          <a:p>
-            <a:pPr marL="0" indent="0">
-              <a:buNone/>
-            </a:pPr>
-            <a:endParaRPr lang="zh-CN" altLang="en-US" dirty="0"/>
-          </a:p>
-          <a:p>
-            <a:pPr marL="0" indent="0">
-              <a:buNone/>
-            </a:pPr>
-            <a:r>
-              <a:rPr lang="zh-CN" altLang="en-US" dirty="0"/>
-              <a:t>一个人，他对社会群体的认同，始终是要大大大过父母对他的影响的，这是铁律。</a:t>
-            </a:r>
-          </a:p>
-          <a:p>
-            <a:pPr marL="0" indent="0">
-              <a:buNone/>
-            </a:pPr>
-            <a:endParaRPr lang="zh-CN" altLang="en-US" dirty="0"/>
-          </a:p>
-          <a:p>
-            <a:pPr marL="0" indent="0">
-              <a:buNone/>
-            </a:pPr>
-            <a:r>
-              <a:rPr lang="zh-CN" altLang="en-US" dirty="0"/>
-              <a:t>如果你还看不懂这一点，还在抱着原生家庭那套假冒伪劣，那么你是看不懂，也搞不好孩子的教育问题的。</a:t>
-            </a:r>
-          </a:p>
-        </p:txBody>
-      </p:sp>
-    </p:spTree>
-    <p:extLst>
-      <p:ext uri="{BB962C8B-B14F-4D97-AF65-F5344CB8AC3E}">
-        <p14:creationId xmlns:p14="http://schemas.microsoft.com/office/powerpoint/2010/main" val="436198922"/>
+        <p14:creationId xmlns:p14="http://schemas.microsoft.com/office/powerpoint/2010/main" val="2157453960"/>
       </p:ext>
     </p:extLst>
   </p:cSld>
@@ -7819,8 +7035,8 @@
           <a:lstStyle/>
           <a:p>
             <a:r>
-              <a:rPr lang="zh-CN" altLang="en-US" dirty="0"/>
-              <a:t>儿童青少年教育关键</a:t>
+              <a:rPr lang="zh-CN" altLang="en-US" sz="4400" dirty="0"/>
+              <a:t>儿童青少年教育关键（三）</a:t>
             </a:r>
           </a:p>
         </p:txBody>
@@ -7841,10 +7057,91 @@
             <p:ph idx="1"/>
           </p:nvPr>
         </p:nvSpPr>
-        <p:spPr/>
+        <p:spPr>
+          <a:xfrm>
+            <a:off x="521208" y="1843087"/>
+            <a:ext cx="11155680" cy="4886325"/>
+          </a:xfrm>
+        </p:spPr>
         <p:txBody>
           <a:bodyPr/>
           <a:lstStyle/>
+          <a:p>
+            <a:pPr marL="0" indent="0">
+              <a:buNone/>
+            </a:pPr>
+            <a:r>
+              <a:rPr lang="zh-CN" altLang="en-US" dirty="0"/>
+              <a:t>**家庭的历史变迁**</a:t>
+            </a:r>
+            <a:endParaRPr lang="en-US" altLang="zh-CN" dirty="0"/>
+          </a:p>
+          <a:p>
+            <a:pPr marL="0" indent="0">
+              <a:buNone/>
+            </a:pPr>
+            <a:endParaRPr lang="zh-CN" altLang="en-US" dirty="0"/>
+          </a:p>
+          <a:p>
+            <a:pPr marL="0" indent="0">
+              <a:buNone/>
+            </a:pPr>
+            <a:r>
+              <a:rPr lang="zh-CN" altLang="en-US" dirty="0"/>
+              <a:t>在农耕时代，我们是生活在一个什么环境中的呢？</a:t>
+            </a:r>
+          </a:p>
+          <a:p>
+            <a:pPr marL="0" indent="0">
+              <a:buNone/>
+            </a:pPr>
+            <a:r>
+              <a:rPr lang="zh-CN" altLang="en-US" dirty="0"/>
+              <a:t>七大姑八大姨，汉语中有非常多的亲戚的称呼，就说明我们生活在一个大的家族体系中。</a:t>
+            </a:r>
+          </a:p>
+          <a:p>
+            <a:pPr marL="0" indent="0">
+              <a:buNone/>
+            </a:pPr>
+            <a:r>
+              <a:rPr lang="zh-CN" altLang="en-US" dirty="0"/>
+              <a:t>即便你家的亲戚不多，大家也生活在一个村里，八竿子打不着的远房亲戚多少也有几个。</a:t>
+            </a:r>
+          </a:p>
+          <a:p>
+            <a:pPr marL="0" indent="0">
+              <a:buNone/>
+            </a:pPr>
+            <a:r>
+              <a:rPr lang="zh-CN" altLang="en-US" dirty="0"/>
+              <a:t>这种家族式的群居生活，是源自农业耕作需要，因为人多力量大嘛！</a:t>
+            </a:r>
+          </a:p>
+          <a:p>
+            <a:pPr marL="0" indent="0">
+              <a:buNone/>
+            </a:pPr>
+            <a:r>
+              <a:rPr lang="zh-CN" altLang="en-US" dirty="0"/>
+              <a:t>大家都团结在一起，除此之外，还有祖坟、祠堂、家谱等等。</a:t>
+            </a:r>
+          </a:p>
+          <a:p>
+            <a:pPr marL="0" indent="0">
+              <a:buNone/>
+            </a:pPr>
+            <a:r>
+              <a:rPr lang="zh-CN" altLang="en-US" dirty="0"/>
+              <a:t>以前的孩子们，就是在这样的环境中成长起来的。</a:t>
+            </a:r>
+          </a:p>
+          <a:p>
+            <a:pPr marL="0" indent="0">
+              <a:buNone/>
+            </a:pPr>
+            <a:endParaRPr lang="zh-CN" altLang="en-US" dirty="0"/>
+          </a:p>
           <a:p>
             <a:pPr marL="0" indent="0">
               <a:buNone/>
@@ -7867,6 +7164,780 @@
 </file>
 
 <file path=ppt/slides/slide23.xml><?xml version="1.0" encoding="utf-8"?>
+<p:sld xmlns:a="http://schemas.openxmlformats.org/drawingml/2006/main" xmlns:r="http://schemas.openxmlformats.org/officeDocument/2006/relationships" xmlns:p="http://schemas.openxmlformats.org/presentationml/2006/main">
+  <p:cSld>
+    <p:spTree>
+      <p:nvGrpSpPr>
+        <p:cNvPr id="1" name="">
+          <a:extLst>
+            <a:ext uri="{FF2B5EF4-FFF2-40B4-BE49-F238E27FC236}">
+              <a16:creationId xmlns:a16="http://schemas.microsoft.com/office/drawing/2014/main" id="{CD70C410-38A1-B7E4-9198-8B09CE81B00A}"/>
+            </a:ext>
+          </a:extLst>
+        </p:cNvPr>
+        <p:cNvGrpSpPr/>
+        <p:nvPr/>
+      </p:nvGrpSpPr>
+      <p:grpSpPr>
+        <a:xfrm>
+          <a:off x="0" y="0"/>
+          <a:ext cx="0" cy="0"/>
+          <a:chOff x="0" y="0"/>
+          <a:chExt cx="0" cy="0"/>
+        </a:xfrm>
+      </p:grpSpPr>
+      <p:sp>
+        <p:nvSpPr>
+          <p:cNvPr id="2" name="标题 1">
+            <a:extLst>
+              <a:ext uri="{FF2B5EF4-FFF2-40B4-BE49-F238E27FC236}">
+                <a16:creationId xmlns:a16="http://schemas.microsoft.com/office/drawing/2014/main" id="{E94D2359-2C55-8EEF-49AD-C9715B861A86}"/>
+              </a:ext>
+            </a:extLst>
+          </p:cNvPr>
+          <p:cNvSpPr>
+            <a:spLocks noGrp="1"/>
+          </p:cNvSpPr>
+          <p:nvPr>
+            <p:ph type="title"/>
+          </p:nvPr>
+        </p:nvSpPr>
+        <p:spPr/>
+        <p:txBody>
+          <a:bodyPr/>
+          <a:lstStyle/>
+          <a:p>
+            <a:r>
+              <a:rPr lang="zh-CN" altLang="en-US" sz="4400" dirty="0"/>
+              <a:t>儿童青少年教育关键（四）</a:t>
+            </a:r>
+          </a:p>
+        </p:txBody>
+      </p:sp>
+      <p:sp>
+        <p:nvSpPr>
+          <p:cNvPr id="3" name="内容占位符 2">
+            <a:extLst>
+              <a:ext uri="{FF2B5EF4-FFF2-40B4-BE49-F238E27FC236}">
+                <a16:creationId xmlns:a16="http://schemas.microsoft.com/office/drawing/2014/main" id="{6F99F286-7A05-FEBB-BF1F-3C56AB3856E9}"/>
+              </a:ext>
+            </a:extLst>
+          </p:cNvPr>
+          <p:cNvSpPr>
+            <a:spLocks noGrp="1"/>
+          </p:cNvSpPr>
+          <p:nvPr>
+            <p:ph idx="1"/>
+          </p:nvPr>
+        </p:nvSpPr>
+        <p:spPr>
+          <a:xfrm>
+            <a:off x="521208" y="1843087"/>
+            <a:ext cx="11155680" cy="4886325"/>
+          </a:xfrm>
+        </p:spPr>
+        <p:txBody>
+          <a:bodyPr/>
+          <a:lstStyle/>
+          <a:p>
+            <a:pPr marL="0" indent="0">
+              <a:buNone/>
+            </a:pPr>
+            <a:r>
+              <a:rPr lang="zh-CN" altLang="en-US" dirty="0"/>
+              <a:t>好，接下来到了上个世纪</a:t>
+            </a:r>
+            <a:r>
+              <a:rPr lang="en-US" altLang="zh-CN" dirty="0"/>
+              <a:t>80</a:t>
+            </a:r>
+            <a:r>
+              <a:rPr lang="zh-CN" altLang="en-US" dirty="0"/>
+              <a:t>年代之前。</a:t>
+            </a:r>
+          </a:p>
+          <a:p>
+            <a:pPr marL="0" indent="0">
+              <a:buNone/>
+            </a:pPr>
+            <a:r>
+              <a:rPr lang="zh-CN" altLang="en-US" dirty="0"/>
+              <a:t>当时的生活环境是怎么样的呢？</a:t>
+            </a:r>
+          </a:p>
+          <a:p>
+            <a:pPr marL="0" indent="0">
+              <a:buNone/>
+            </a:pPr>
+            <a:r>
+              <a:rPr lang="zh-CN" altLang="en-US" dirty="0"/>
+              <a:t>首先想到的是，家属院，厂办学校，厂办医院，厂办食堂。</a:t>
+            </a:r>
+          </a:p>
+          <a:p>
+            <a:pPr marL="0" indent="0">
+              <a:buNone/>
+            </a:pPr>
+            <a:r>
+              <a:rPr lang="zh-CN" altLang="en-US" dirty="0"/>
+              <a:t>大家都生活在一个集体中。什么都是公家的，自已也是公家的人。</a:t>
+            </a:r>
+          </a:p>
+          <a:p>
+            <a:pPr marL="0" indent="0">
+              <a:buNone/>
+            </a:pPr>
+            <a:r>
+              <a:rPr lang="zh-CN" altLang="en-US" dirty="0"/>
+              <a:t>所以说那一辈子爱占小便宜，其实并不是品行不好，而是他们习惯了生活在公家这种环境中。</a:t>
+            </a:r>
+          </a:p>
+          <a:p>
+            <a:pPr marL="0" indent="0">
+              <a:buNone/>
+            </a:pPr>
+            <a:r>
+              <a:rPr lang="zh-CN" altLang="en-US" dirty="0"/>
+              <a:t>谁会说，拿自已家里的东西还不好意思的呢？</a:t>
+            </a:r>
+          </a:p>
+          <a:p>
+            <a:pPr marL="0" indent="0">
+              <a:buNone/>
+            </a:pPr>
+            <a:r>
+              <a:rPr lang="zh-CN" altLang="en-US" dirty="0"/>
+              <a:t>这是那时候养成的习惯，因为就没有个人私人的概念。</a:t>
+            </a:r>
+          </a:p>
+          <a:p>
+            <a:pPr marL="0" indent="0">
+              <a:buNone/>
+            </a:pPr>
+            <a:r>
+              <a:rPr lang="zh-CN" altLang="en-US" dirty="0"/>
+              <a:t>当时的孩子们，就生活在这样的环境中，长辈们可能都是同事或领导，小伙伴们可能都是周围差不多都是一个单位组织的孩子。</a:t>
+            </a:r>
+          </a:p>
+          <a:p>
+            <a:pPr marL="0" indent="0">
+              <a:buNone/>
+            </a:pPr>
+            <a:endParaRPr lang="zh-CN" altLang="en-US" dirty="0"/>
+          </a:p>
+          <a:p>
+            <a:pPr marL="0" indent="0">
+              <a:buNone/>
+            </a:pPr>
+            <a:endParaRPr lang="zh-CN" altLang="en-US" dirty="0"/>
+          </a:p>
+        </p:txBody>
+      </p:sp>
+    </p:spTree>
+    <p:extLst>
+      <p:ext uri="{BB962C8B-B14F-4D97-AF65-F5344CB8AC3E}">
+        <p14:creationId xmlns:p14="http://schemas.microsoft.com/office/powerpoint/2010/main" val="4041955554"/>
+      </p:ext>
+    </p:extLst>
+  </p:cSld>
+  <p:clrMapOvr>
+    <a:masterClrMapping/>
+  </p:clrMapOvr>
+</p:sld>
+</file>
+
+<file path=ppt/slides/slide24.xml><?xml version="1.0" encoding="utf-8"?>
+<p:sld xmlns:a="http://schemas.openxmlformats.org/drawingml/2006/main" xmlns:r="http://schemas.openxmlformats.org/officeDocument/2006/relationships" xmlns:p="http://schemas.openxmlformats.org/presentationml/2006/main">
+  <p:cSld>
+    <p:spTree>
+      <p:nvGrpSpPr>
+        <p:cNvPr id="1" name="">
+          <a:extLst>
+            <a:ext uri="{FF2B5EF4-FFF2-40B4-BE49-F238E27FC236}">
+              <a16:creationId xmlns:a16="http://schemas.microsoft.com/office/drawing/2014/main" id="{1F5DC398-1315-DF2D-35EE-E5511A187F91}"/>
+            </a:ext>
+          </a:extLst>
+        </p:cNvPr>
+        <p:cNvGrpSpPr/>
+        <p:nvPr/>
+      </p:nvGrpSpPr>
+      <p:grpSpPr>
+        <a:xfrm>
+          <a:off x="0" y="0"/>
+          <a:ext cx="0" cy="0"/>
+          <a:chOff x="0" y="0"/>
+          <a:chExt cx="0" cy="0"/>
+        </a:xfrm>
+      </p:grpSpPr>
+      <p:sp>
+        <p:nvSpPr>
+          <p:cNvPr id="2" name="标题 1">
+            <a:extLst>
+              <a:ext uri="{FF2B5EF4-FFF2-40B4-BE49-F238E27FC236}">
+                <a16:creationId xmlns:a16="http://schemas.microsoft.com/office/drawing/2014/main" id="{4D8CBE0A-855C-EC55-9A69-37DDAC0C2AD5}"/>
+              </a:ext>
+            </a:extLst>
+          </p:cNvPr>
+          <p:cNvSpPr>
+            <a:spLocks noGrp="1"/>
+          </p:cNvSpPr>
+          <p:nvPr>
+            <p:ph type="title"/>
+          </p:nvPr>
+        </p:nvSpPr>
+        <p:spPr/>
+        <p:txBody>
+          <a:bodyPr/>
+          <a:lstStyle/>
+          <a:p>
+            <a:r>
+              <a:rPr lang="zh-CN" altLang="en-US" sz="4400" dirty="0"/>
+              <a:t>儿童青少年教育关键（五）</a:t>
+            </a:r>
+          </a:p>
+        </p:txBody>
+      </p:sp>
+      <p:sp>
+        <p:nvSpPr>
+          <p:cNvPr id="3" name="内容占位符 2">
+            <a:extLst>
+              <a:ext uri="{FF2B5EF4-FFF2-40B4-BE49-F238E27FC236}">
+                <a16:creationId xmlns:a16="http://schemas.microsoft.com/office/drawing/2014/main" id="{027E65FB-183F-1676-8591-2EEC11A7BED8}"/>
+              </a:ext>
+            </a:extLst>
+          </p:cNvPr>
+          <p:cNvSpPr>
+            <a:spLocks noGrp="1"/>
+          </p:cNvSpPr>
+          <p:nvPr>
+            <p:ph idx="1"/>
+          </p:nvPr>
+        </p:nvSpPr>
+        <p:spPr>
+          <a:xfrm>
+            <a:off x="521208" y="1843087"/>
+            <a:ext cx="11155680" cy="4886325"/>
+          </a:xfrm>
+        </p:spPr>
+        <p:txBody>
+          <a:bodyPr/>
+          <a:lstStyle/>
+          <a:p>
+            <a:pPr marL="0" indent="0">
+              <a:buNone/>
+            </a:pPr>
+            <a:r>
+              <a:rPr lang="zh-CN" altLang="en-US" dirty="0"/>
+              <a:t>好，现在到了</a:t>
+            </a:r>
+            <a:r>
+              <a:rPr lang="en-US" altLang="zh-CN" dirty="0"/>
+              <a:t>80</a:t>
+            </a:r>
+            <a:r>
+              <a:rPr lang="zh-CN" altLang="en-US" dirty="0"/>
+              <a:t>、</a:t>
+            </a:r>
+            <a:r>
+              <a:rPr lang="en-US" altLang="zh-CN" dirty="0"/>
+              <a:t>90</a:t>
+            </a:r>
+            <a:r>
+              <a:rPr lang="zh-CN" altLang="en-US" dirty="0"/>
+              <a:t>年代。</a:t>
+            </a:r>
+            <a:endParaRPr lang="en-US" altLang="zh-CN" dirty="0"/>
+          </a:p>
+          <a:p>
+            <a:pPr marL="0" indent="0">
+              <a:buNone/>
+            </a:pPr>
+            <a:endParaRPr lang="en-US" altLang="zh-CN" dirty="0"/>
+          </a:p>
+          <a:p>
+            <a:pPr marL="0" indent="0">
+              <a:buNone/>
+            </a:pPr>
+            <a:r>
+              <a:rPr lang="en-US" altLang="zh-CN" dirty="0"/>
+              <a:t>72</a:t>
+            </a:r>
+            <a:r>
+              <a:rPr lang="zh-CN" altLang="en-US" dirty="0"/>
+              <a:t>年尼克松访华，</a:t>
+            </a:r>
+            <a:r>
+              <a:rPr lang="en-US" altLang="zh-CN" dirty="0"/>
+              <a:t>79</a:t>
+            </a:r>
+            <a:r>
+              <a:rPr lang="zh-CN" altLang="en-US" dirty="0"/>
+              <a:t>年中美正式建交。中美蜜月期，关系好得跟穿一条裤子似的。</a:t>
+            </a:r>
+          </a:p>
+          <a:p>
+            <a:pPr marL="0" indent="0">
+              <a:buNone/>
+            </a:pPr>
+            <a:r>
+              <a:rPr lang="zh-CN" altLang="en-US" dirty="0"/>
+              <a:t>好到什么程度呢？</a:t>
+            </a:r>
+            <a:endParaRPr lang="en-US" altLang="zh-CN" dirty="0"/>
+          </a:p>
+          <a:p>
+            <a:pPr marL="0" indent="0">
+              <a:buNone/>
+            </a:pPr>
+            <a:r>
+              <a:rPr lang="zh-CN" altLang="en-US" dirty="0"/>
+              <a:t>据说美国把当时最好的武器都开放售卖给了中国。当然，它是为了联合中国去对付苏联。当时的越南一看情况有变，你个浓眉大眼的中国也叛变西方帝国主义了，就开始挑事。邓公当时说，小朋友不听话，就要打屁股，于是就和美国打了招呼，说我要开始教训小朋友了。于是越战爆发，时间点就是</a:t>
+            </a:r>
+            <a:r>
+              <a:rPr lang="en-US" altLang="zh-CN" dirty="0"/>
+              <a:t>80</a:t>
+            </a:r>
+            <a:r>
+              <a:rPr lang="zh-CN" altLang="en-US" dirty="0"/>
+              <a:t>年代。当然这些都是政治话题，我们不多说。</a:t>
+            </a:r>
+            <a:endParaRPr lang="en-US" altLang="zh-CN" dirty="0"/>
+          </a:p>
+          <a:p>
+            <a:pPr marL="0" indent="0">
+              <a:buNone/>
+            </a:pPr>
+            <a:endParaRPr lang="zh-CN" altLang="en-US" dirty="0"/>
+          </a:p>
+          <a:p>
+            <a:pPr marL="0" indent="0">
+              <a:buNone/>
+            </a:pPr>
+            <a:endParaRPr lang="zh-CN" altLang="en-US" dirty="0"/>
+          </a:p>
+        </p:txBody>
+      </p:sp>
+    </p:spTree>
+    <p:extLst>
+      <p:ext uri="{BB962C8B-B14F-4D97-AF65-F5344CB8AC3E}">
+        <p14:creationId xmlns:p14="http://schemas.microsoft.com/office/powerpoint/2010/main" val="1969550488"/>
+      </p:ext>
+    </p:extLst>
+  </p:cSld>
+  <p:clrMapOvr>
+    <a:masterClrMapping/>
+  </p:clrMapOvr>
+</p:sld>
+</file>
+
+<file path=ppt/slides/slide25.xml><?xml version="1.0" encoding="utf-8"?>
+<p:sld xmlns:a="http://schemas.openxmlformats.org/drawingml/2006/main" xmlns:r="http://schemas.openxmlformats.org/officeDocument/2006/relationships" xmlns:p="http://schemas.openxmlformats.org/presentationml/2006/main">
+  <p:cSld>
+    <p:spTree>
+      <p:nvGrpSpPr>
+        <p:cNvPr id="1" name="">
+          <a:extLst>
+            <a:ext uri="{FF2B5EF4-FFF2-40B4-BE49-F238E27FC236}">
+              <a16:creationId xmlns:a16="http://schemas.microsoft.com/office/drawing/2014/main" id="{4A8F644A-34BB-DEE4-DE22-0176104705BE}"/>
+            </a:ext>
+          </a:extLst>
+        </p:cNvPr>
+        <p:cNvGrpSpPr/>
+        <p:nvPr/>
+      </p:nvGrpSpPr>
+      <p:grpSpPr>
+        <a:xfrm>
+          <a:off x="0" y="0"/>
+          <a:ext cx="0" cy="0"/>
+          <a:chOff x="0" y="0"/>
+          <a:chExt cx="0" cy="0"/>
+        </a:xfrm>
+      </p:grpSpPr>
+      <p:sp>
+        <p:nvSpPr>
+          <p:cNvPr id="2" name="标题 1">
+            <a:extLst>
+              <a:ext uri="{FF2B5EF4-FFF2-40B4-BE49-F238E27FC236}">
+                <a16:creationId xmlns:a16="http://schemas.microsoft.com/office/drawing/2014/main" id="{8972653F-979B-1CF5-187E-30A7E17A0A56}"/>
+              </a:ext>
+            </a:extLst>
+          </p:cNvPr>
+          <p:cNvSpPr>
+            <a:spLocks noGrp="1"/>
+          </p:cNvSpPr>
+          <p:nvPr>
+            <p:ph type="title"/>
+          </p:nvPr>
+        </p:nvSpPr>
+        <p:spPr/>
+        <p:txBody>
+          <a:bodyPr/>
+          <a:lstStyle/>
+          <a:p>
+            <a:r>
+              <a:rPr lang="zh-CN" altLang="en-US" sz="4400" dirty="0"/>
+              <a:t>儿童青少年教育关键（六）</a:t>
+            </a:r>
+          </a:p>
+        </p:txBody>
+      </p:sp>
+      <p:sp>
+        <p:nvSpPr>
+          <p:cNvPr id="3" name="内容占位符 2">
+            <a:extLst>
+              <a:ext uri="{FF2B5EF4-FFF2-40B4-BE49-F238E27FC236}">
+                <a16:creationId xmlns:a16="http://schemas.microsoft.com/office/drawing/2014/main" id="{D0F296AF-BF38-7C2E-537D-5E0A003CEC27}"/>
+              </a:ext>
+            </a:extLst>
+          </p:cNvPr>
+          <p:cNvSpPr>
+            <a:spLocks noGrp="1"/>
+          </p:cNvSpPr>
+          <p:nvPr>
+            <p:ph idx="1"/>
+          </p:nvPr>
+        </p:nvSpPr>
+        <p:spPr>
+          <a:xfrm>
+            <a:off x="521208" y="1843087"/>
+            <a:ext cx="11155680" cy="4886325"/>
+          </a:xfrm>
+        </p:spPr>
+        <p:txBody>
+          <a:bodyPr/>
+          <a:lstStyle/>
+          <a:p>
+            <a:pPr marL="0" indent="0">
+              <a:buNone/>
+            </a:pPr>
+            <a:r>
+              <a:rPr lang="zh-CN" altLang="en-US" dirty="0"/>
+              <a:t>我们只说，中美关系当时是非常好的，美国也用最大的力量帮助中国发展经济。</a:t>
+            </a:r>
+          </a:p>
+          <a:p>
+            <a:pPr marL="0" indent="0">
+              <a:buNone/>
+            </a:pPr>
+            <a:r>
+              <a:rPr lang="zh-CN" altLang="en-US" dirty="0"/>
+              <a:t>于是中国的经济开始飞速发展了，但同时西方的部分思潮也跟着进来了。当时就面临着国有企业转型的问题，大量的国有资产转成了私营。</a:t>
+            </a:r>
+            <a:r>
+              <a:rPr lang="en-US" altLang="zh-CN" dirty="0"/>
+              <a:t>94</a:t>
+            </a:r>
+            <a:r>
+              <a:rPr lang="zh-CN" altLang="en-US" dirty="0"/>
+              <a:t>年国家出台的分税制改革，让地方政府出现了财政上的困难。</a:t>
+            </a:r>
+          </a:p>
+          <a:p>
+            <a:pPr marL="0" indent="0">
+              <a:buNone/>
+            </a:pPr>
+            <a:r>
+              <a:rPr lang="zh-CN" altLang="en-US" dirty="0"/>
+              <a:t>各种状况频频出现，导致了全国性的大下岗。</a:t>
+            </a:r>
+            <a:endParaRPr lang="en-US" altLang="zh-CN" dirty="0"/>
+          </a:p>
+          <a:p>
+            <a:pPr marL="0" indent="0">
+              <a:buNone/>
+            </a:pPr>
+            <a:r>
+              <a:rPr lang="zh-CN" altLang="en-US" dirty="0"/>
+              <a:t>到了</a:t>
+            </a:r>
+            <a:r>
+              <a:rPr lang="en-US" altLang="zh-CN" dirty="0"/>
+              <a:t>90</a:t>
+            </a:r>
+            <a:r>
+              <a:rPr lang="zh-CN" altLang="en-US" dirty="0"/>
+              <a:t>年代末期，已经有很多工人失业。</a:t>
+            </a:r>
+          </a:p>
+          <a:p>
+            <a:pPr marL="0" indent="0">
+              <a:buNone/>
+            </a:pPr>
+            <a:r>
+              <a:rPr lang="zh-CN" altLang="en-US" dirty="0"/>
+              <a:t>失业到什么程度呢？</a:t>
+            </a:r>
+            <a:endParaRPr lang="en-US" altLang="zh-CN" dirty="0"/>
+          </a:p>
+          <a:p>
+            <a:pPr marL="0" indent="0">
+              <a:buNone/>
+            </a:pPr>
+            <a:r>
+              <a:rPr lang="zh-CN" altLang="en-US" dirty="0"/>
+              <a:t>据说广东和四川多了很多洗脚城。</a:t>
+            </a:r>
+          </a:p>
+          <a:p>
+            <a:pPr marL="0" indent="0">
+              <a:buNone/>
+            </a:pPr>
+            <a:endParaRPr lang="zh-CN" altLang="en-US" dirty="0"/>
+          </a:p>
+          <a:p>
+            <a:pPr marL="0" indent="0">
+              <a:buNone/>
+            </a:pPr>
+            <a:endParaRPr lang="zh-CN" altLang="en-US" dirty="0"/>
+          </a:p>
+          <a:p>
+            <a:pPr marL="0" indent="0">
+              <a:buNone/>
+            </a:pPr>
+            <a:endParaRPr lang="zh-CN" altLang="en-US" dirty="0"/>
+          </a:p>
+          <a:p>
+            <a:pPr marL="0" indent="0">
+              <a:buNone/>
+            </a:pPr>
+            <a:endParaRPr lang="zh-CN" altLang="en-US" dirty="0"/>
+          </a:p>
+        </p:txBody>
+      </p:sp>
+    </p:spTree>
+    <p:extLst>
+      <p:ext uri="{BB962C8B-B14F-4D97-AF65-F5344CB8AC3E}">
+        <p14:creationId xmlns:p14="http://schemas.microsoft.com/office/powerpoint/2010/main" val="1284855151"/>
+      </p:ext>
+    </p:extLst>
+  </p:cSld>
+  <p:clrMapOvr>
+    <a:masterClrMapping/>
+  </p:clrMapOvr>
+</p:sld>
+</file>
+
+<file path=ppt/slides/slide26.xml><?xml version="1.0" encoding="utf-8"?>
+<p:sld xmlns:a="http://schemas.openxmlformats.org/drawingml/2006/main" xmlns:r="http://schemas.openxmlformats.org/officeDocument/2006/relationships" xmlns:p="http://schemas.openxmlformats.org/presentationml/2006/main">
+  <p:cSld>
+    <p:spTree>
+      <p:nvGrpSpPr>
+        <p:cNvPr id="1" name="">
+          <a:extLst>
+            <a:ext uri="{FF2B5EF4-FFF2-40B4-BE49-F238E27FC236}">
+              <a16:creationId xmlns:a16="http://schemas.microsoft.com/office/drawing/2014/main" id="{5B94F347-B00B-C510-9BE4-D004D8E7D640}"/>
+            </a:ext>
+          </a:extLst>
+        </p:cNvPr>
+        <p:cNvGrpSpPr/>
+        <p:nvPr/>
+      </p:nvGrpSpPr>
+      <p:grpSpPr>
+        <a:xfrm>
+          <a:off x="0" y="0"/>
+          <a:ext cx="0" cy="0"/>
+          <a:chOff x="0" y="0"/>
+          <a:chExt cx="0" cy="0"/>
+        </a:xfrm>
+      </p:grpSpPr>
+      <p:sp>
+        <p:nvSpPr>
+          <p:cNvPr id="2" name="标题 1">
+            <a:extLst>
+              <a:ext uri="{FF2B5EF4-FFF2-40B4-BE49-F238E27FC236}">
+                <a16:creationId xmlns:a16="http://schemas.microsoft.com/office/drawing/2014/main" id="{3A7ED3D3-73DA-451B-4BDF-C06E73869EF5}"/>
+              </a:ext>
+            </a:extLst>
+          </p:cNvPr>
+          <p:cNvSpPr>
+            <a:spLocks noGrp="1"/>
+          </p:cNvSpPr>
+          <p:nvPr>
+            <p:ph type="title"/>
+          </p:nvPr>
+        </p:nvSpPr>
+        <p:spPr/>
+        <p:txBody>
+          <a:bodyPr/>
+          <a:lstStyle/>
+          <a:p>
+            <a:r>
+              <a:rPr lang="zh-CN" altLang="en-US" sz="4400" dirty="0"/>
+              <a:t>儿童青少年教育关键（七）</a:t>
+            </a:r>
+          </a:p>
+        </p:txBody>
+      </p:sp>
+      <p:sp>
+        <p:nvSpPr>
+          <p:cNvPr id="3" name="内容占位符 2">
+            <a:extLst>
+              <a:ext uri="{FF2B5EF4-FFF2-40B4-BE49-F238E27FC236}">
+                <a16:creationId xmlns:a16="http://schemas.microsoft.com/office/drawing/2014/main" id="{37001C4B-A8DF-D358-0FD4-1D12CA986F8F}"/>
+              </a:ext>
+            </a:extLst>
+          </p:cNvPr>
+          <p:cNvSpPr>
+            <a:spLocks noGrp="1"/>
+          </p:cNvSpPr>
+          <p:nvPr>
+            <p:ph idx="1"/>
+          </p:nvPr>
+        </p:nvSpPr>
+        <p:spPr>
+          <a:xfrm>
+            <a:off x="521208" y="1843087"/>
+            <a:ext cx="11155680" cy="4886325"/>
+          </a:xfrm>
+        </p:spPr>
+        <p:txBody>
+          <a:bodyPr/>
+          <a:lstStyle/>
+          <a:p>
+            <a:pPr marL="0" indent="0">
+              <a:buNone/>
+            </a:pPr>
+            <a:r>
+              <a:rPr lang="zh-CN" altLang="en-US" dirty="0"/>
+              <a:t>当时，在</a:t>
+            </a:r>
+            <a:r>
+              <a:rPr lang="en-US" altLang="zh-CN" dirty="0"/>
+              <a:t>90</a:t>
+            </a:r>
+            <a:r>
+              <a:rPr lang="zh-CN" altLang="en-US" dirty="0"/>
+              <a:t>年代初，大概</a:t>
+            </a:r>
+            <a:r>
+              <a:rPr lang="en-US" altLang="zh-CN" dirty="0"/>
+              <a:t>91</a:t>
+            </a:r>
+            <a:r>
+              <a:rPr lang="zh-CN" altLang="en-US" dirty="0"/>
+              <a:t>年还是</a:t>
+            </a:r>
+            <a:r>
+              <a:rPr lang="en-US" altLang="zh-CN" dirty="0"/>
+              <a:t>92</a:t>
+            </a:r>
+            <a:r>
+              <a:rPr lang="zh-CN" altLang="en-US" dirty="0"/>
+              <a:t>年，曾仕强曾预言中国将来会成为世界第二大经济体，科技水平会超过西方，压根就没人信。</a:t>
+            </a:r>
+            <a:endParaRPr lang="en-US" altLang="zh-CN" dirty="0"/>
+          </a:p>
+          <a:p>
+            <a:pPr marL="0" indent="0">
+              <a:buNone/>
+            </a:pPr>
+            <a:r>
+              <a:rPr lang="zh-CN" altLang="en-US" dirty="0"/>
+              <a:t>直到</a:t>
+            </a:r>
+            <a:r>
+              <a:rPr lang="en-US" altLang="zh-CN" dirty="0"/>
+              <a:t>2000</a:t>
+            </a:r>
+            <a:r>
+              <a:rPr lang="zh-CN" altLang="en-US" dirty="0"/>
+              <a:t>年初，发生了根本性的改变。</a:t>
+            </a:r>
+            <a:endParaRPr lang="en-US" altLang="zh-CN" dirty="0"/>
+          </a:p>
+          <a:p>
+            <a:pPr marL="0" indent="0">
+              <a:buNone/>
+            </a:pPr>
+            <a:r>
+              <a:rPr lang="zh-CN" altLang="en-US" dirty="0"/>
+              <a:t>当时中国加入了</a:t>
+            </a:r>
+            <a:r>
+              <a:rPr lang="en-US" altLang="zh-CN" dirty="0"/>
+              <a:t>WTO</a:t>
+            </a:r>
+            <a:r>
+              <a:rPr lang="zh-CN" altLang="en-US" dirty="0"/>
+              <a:t>，并且还有一个重要因素，就是网络的兴起。</a:t>
+            </a:r>
+            <a:endParaRPr lang="en-US" altLang="zh-CN" dirty="0"/>
+          </a:p>
+          <a:p>
+            <a:pPr marL="0" indent="0">
+              <a:buNone/>
+            </a:pPr>
+            <a:endParaRPr lang="zh-CN" altLang="en-US" dirty="0"/>
+          </a:p>
+          <a:p>
+            <a:pPr marL="0" indent="0">
+              <a:buNone/>
+            </a:pPr>
+            <a:r>
+              <a:rPr lang="zh-CN" altLang="en-US" dirty="0"/>
+              <a:t>大量的农民工进城。进城干什么呢？</a:t>
+            </a:r>
+            <a:endParaRPr lang="en-US" altLang="zh-CN" dirty="0"/>
+          </a:p>
+          <a:p>
+            <a:pPr marL="0" indent="0">
+              <a:buNone/>
+            </a:pPr>
+            <a:r>
+              <a:rPr lang="zh-CN" altLang="en-US" dirty="0"/>
+              <a:t>当然是打工赚钱了！</a:t>
+            </a:r>
+            <a:endParaRPr lang="en-US" altLang="zh-CN" dirty="0"/>
+          </a:p>
+          <a:p>
+            <a:pPr marL="0" indent="0">
+              <a:buNone/>
+            </a:pPr>
+            <a:r>
+              <a:rPr lang="zh-CN" altLang="en-US" dirty="0"/>
+              <a:t>随着房地产开发以及经济的恢复，城市建设起来了，大家的日子也慢慢好起来了。</a:t>
+            </a:r>
+          </a:p>
+          <a:p>
+            <a:pPr marL="0" indent="0">
+              <a:buNone/>
+            </a:pPr>
+            <a:endParaRPr lang="zh-CN" altLang="en-US" dirty="0"/>
+          </a:p>
+          <a:p>
+            <a:pPr marL="0" indent="0">
+              <a:buNone/>
+            </a:pPr>
+            <a:endParaRPr lang="zh-CN" altLang="en-US" dirty="0"/>
+          </a:p>
+          <a:p>
+            <a:pPr marL="0" indent="0">
+              <a:buNone/>
+            </a:pPr>
+            <a:endParaRPr lang="zh-CN" altLang="en-US" dirty="0"/>
+          </a:p>
+          <a:p>
+            <a:pPr marL="0" indent="0">
+              <a:buNone/>
+            </a:pPr>
+            <a:endParaRPr lang="zh-CN" altLang="en-US" dirty="0"/>
+          </a:p>
+        </p:txBody>
+      </p:sp>
+    </p:spTree>
+    <p:extLst>
+      <p:ext uri="{BB962C8B-B14F-4D97-AF65-F5344CB8AC3E}">
+        <p14:creationId xmlns:p14="http://schemas.microsoft.com/office/powerpoint/2010/main" val="3207431065"/>
+      </p:ext>
+    </p:extLst>
+  </p:cSld>
+  <p:clrMapOvr>
+    <a:masterClrMapping/>
+  </p:clrMapOvr>
+</p:sld>
+</file>
+
+<file path=ppt/slides/slide27.xml><?xml version="1.0" encoding="utf-8"?>
 <p:sld xmlns:a="http://schemas.openxmlformats.org/drawingml/2006/main" xmlns:r="http://schemas.openxmlformats.org/officeDocument/2006/relationships" xmlns:p="http://schemas.openxmlformats.org/presentationml/2006/main">
   <p:cSld>
     <p:spTree>
@@ -7911,8 +7982,8 @@
           <a:lstStyle/>
           <a:p>
             <a:r>
-              <a:rPr lang="zh-CN" altLang="en-US" dirty="0"/>
-              <a:t>儿童青少年教育关键</a:t>
+              <a:rPr lang="zh-CN" altLang="en-US" sz="4400" dirty="0"/>
+              <a:t>儿童青少年教育关键（八）</a:t>
             </a:r>
           </a:p>
         </p:txBody>
@@ -7933,10 +8004,75 @@
             <p:ph idx="1"/>
           </p:nvPr>
         </p:nvSpPr>
-        <p:spPr/>
+        <p:spPr>
+          <a:xfrm>
+            <a:off x="521208" y="1843087"/>
+            <a:ext cx="11155680" cy="4886325"/>
+          </a:xfrm>
+        </p:spPr>
         <p:txBody>
           <a:bodyPr/>
           <a:lstStyle/>
+          <a:p>
+            <a:pPr marL="0" indent="0">
+              <a:buNone/>
+            </a:pPr>
+            <a:r>
+              <a:rPr lang="zh-CN" altLang="en-US" dirty="0"/>
+              <a:t>好，说了这么说，大家发现没有。 </a:t>
+            </a:r>
+          </a:p>
+          <a:p>
+            <a:pPr marL="0" indent="0">
+              <a:buNone/>
+            </a:pPr>
+            <a:r>
+              <a:rPr lang="zh-CN" altLang="en-US" dirty="0"/>
+              <a:t>孩子们生活的环境发生了怎样的变化呢？</a:t>
+            </a:r>
+          </a:p>
+          <a:p>
+            <a:pPr marL="0" indent="0">
+              <a:buNone/>
+            </a:pPr>
+            <a:r>
+              <a:rPr lang="zh-CN" altLang="en-US" dirty="0"/>
+              <a:t>过去不管是家族式群居生活也好，还是公家国营集体生活也好，都已经不复存在了。</a:t>
+            </a:r>
+          </a:p>
+          <a:p>
+            <a:pPr marL="0" indent="0">
+              <a:buNone/>
+            </a:pPr>
+            <a:r>
+              <a:rPr lang="zh-CN" altLang="en-US" dirty="0"/>
+              <a:t>取而代之的是，孩子们住在钢筋混凝土的楼房里，大量的留守儿童。</a:t>
+            </a:r>
+          </a:p>
+          <a:p>
+            <a:pPr marL="0" indent="0">
+              <a:buNone/>
+            </a:pPr>
+            <a:r>
+              <a:rPr lang="zh-CN" altLang="en-US" dirty="0"/>
+              <a:t>以前的居住环境已经变成了各自独立生活。</a:t>
+            </a:r>
+          </a:p>
+          <a:p>
+            <a:pPr marL="0" indent="0">
+              <a:buNone/>
+            </a:pPr>
+            <a:r>
+              <a:rPr lang="zh-CN" altLang="en-US" dirty="0"/>
+              <a:t>我们如果能够正确看待这段发展历史，就会立刻发现，过去传统的家庭环境早已土崩瓦解。</a:t>
+            </a:r>
+          </a:p>
+          <a:p>
+            <a:pPr marL="0" indent="0">
+              <a:buNone/>
+            </a:pPr>
+            <a:endParaRPr lang="zh-CN" altLang="en-US" dirty="0"/>
+          </a:p>
           <a:p>
             <a:pPr marL="0" indent="0">
               <a:buNone/>
@@ -7958,7 +8094,7 @@
 </p:sld>
 </file>
 
-<file path=ppt/slides/slide24.xml><?xml version="1.0" encoding="utf-8"?>
+<file path=ppt/slides/slide28.xml><?xml version="1.0" encoding="utf-8"?>
 <p:sld xmlns:a="http://schemas.openxmlformats.org/drawingml/2006/main" xmlns:r="http://schemas.openxmlformats.org/officeDocument/2006/relationships" xmlns:p="http://schemas.openxmlformats.org/presentationml/2006/main">
   <p:cSld>
     <p:spTree>
@@ -8003,8 +8139,8 @@
           <a:lstStyle/>
           <a:p>
             <a:r>
-              <a:rPr lang="zh-CN" altLang="en-US" dirty="0"/>
-              <a:t>儿童青少年教育关键</a:t>
+              <a:rPr lang="zh-CN" altLang="en-US" sz="4400" dirty="0"/>
+              <a:t>儿童青少年教育关键（九）</a:t>
             </a:r>
           </a:p>
         </p:txBody>
@@ -8025,10 +8161,102 @@
             <p:ph idx="1"/>
           </p:nvPr>
         </p:nvSpPr>
-        <p:spPr/>
+        <p:spPr>
+          <a:xfrm>
+            <a:off x="521208" y="1843088"/>
+            <a:ext cx="11155680" cy="4502848"/>
+          </a:xfrm>
+        </p:spPr>
         <p:txBody>
           <a:bodyPr/>
           <a:lstStyle/>
+          <a:p>
+            <a:pPr marL="0" indent="0">
+              <a:buNone/>
+            </a:pPr>
+            <a:r>
+              <a:rPr lang="zh-CN" altLang="en-US" dirty="0"/>
+              <a:t>现在一家三口人，爸爸妈妈孩子。</a:t>
+            </a:r>
+          </a:p>
+          <a:p>
+            <a:pPr marL="0" indent="0">
+              <a:buNone/>
+            </a:pPr>
+            <a:r>
+              <a:rPr lang="zh-CN" altLang="en-US" dirty="0"/>
+              <a:t>开一亮，吃完早饭，爸爸到城东上班，妈妈到城西工作，孩子到城南上学。</a:t>
+            </a:r>
+          </a:p>
+          <a:p>
+            <a:pPr marL="0" indent="0">
+              <a:buNone/>
+            </a:pPr>
+            <a:r>
+              <a:rPr lang="zh-CN" altLang="en-US" dirty="0"/>
+              <a:t>晚上很晚才能回到家。</a:t>
+            </a:r>
+          </a:p>
+          <a:p>
+            <a:pPr marL="0" indent="0">
+              <a:buNone/>
+            </a:pPr>
+            <a:r>
+              <a:rPr lang="zh-CN" altLang="en-US" dirty="0"/>
+              <a:t>现在连一家人在一起吃个晚饭都可能是一件奢侈的事情，更别说要加班，还要补课，还要做其他的事情。</a:t>
+            </a:r>
+          </a:p>
+          <a:p>
+            <a:pPr marL="0" indent="0">
+              <a:buNone/>
+            </a:pPr>
+            <a:r>
+              <a:rPr lang="zh-CN" altLang="en-US" dirty="0"/>
+              <a:t>请问，这是一个家吗？</a:t>
+            </a:r>
+          </a:p>
+          <a:p>
+            <a:pPr marL="0" indent="0">
+              <a:buNone/>
+            </a:pPr>
+            <a:endParaRPr lang="zh-CN" altLang="en-US" dirty="0"/>
+          </a:p>
+          <a:p>
+            <a:pPr marL="0" indent="0">
+              <a:buNone/>
+            </a:pPr>
+            <a:r>
+              <a:rPr lang="zh-CN" altLang="en-US" dirty="0"/>
+              <a:t>关于婚恋纠纷问题的心理咨询，是紧紧排在心理咨询的第二位的，第一位的是儿童青少年心理问题。</a:t>
+            </a:r>
+          </a:p>
+          <a:p>
+            <a:pPr marL="0" indent="0">
+              <a:buNone/>
+            </a:pPr>
+            <a:r>
+              <a:rPr lang="zh-CN" altLang="en-US" dirty="0"/>
+              <a:t>所以你说，为什么会这样？</a:t>
+            </a:r>
+          </a:p>
+          <a:p>
+            <a:pPr marL="0" indent="0">
+              <a:buNone/>
+            </a:pPr>
+            <a:endParaRPr lang="zh-CN" altLang="en-US" dirty="0"/>
+          </a:p>
+          <a:p>
+            <a:pPr marL="0" indent="0">
+              <a:buNone/>
+            </a:pPr>
+            <a:endParaRPr lang="zh-CN" altLang="en-US" dirty="0"/>
+          </a:p>
+          <a:p>
+            <a:pPr marL="0" indent="0">
+              <a:buNone/>
+            </a:pPr>
+            <a:endParaRPr lang="zh-CN" altLang="en-US" dirty="0"/>
+          </a:p>
           <a:p>
             <a:pPr marL="0" indent="0">
               <a:buNone/>
@@ -8050,7 +8278,7 @@
 </p:sld>
 </file>
 
-<file path=ppt/slides/slide25.xml><?xml version="1.0" encoding="utf-8"?>
+<file path=ppt/slides/slide29.xml><?xml version="1.0" encoding="utf-8"?>
 <p:sld xmlns:a="http://schemas.openxmlformats.org/drawingml/2006/main" xmlns:r="http://schemas.openxmlformats.org/officeDocument/2006/relationships" xmlns:p="http://schemas.openxmlformats.org/presentationml/2006/main">
   <p:cSld>
     <p:spTree>
@@ -8095,8 +8323,8 @@
           <a:lstStyle/>
           <a:p>
             <a:r>
-              <a:rPr lang="zh-CN" altLang="en-US" dirty="0"/>
-              <a:t>儿童青少年教育关键</a:t>
+              <a:rPr lang="zh-CN" altLang="en-US" sz="4400" dirty="0"/>
+              <a:t>儿童青少年教育关键（十）</a:t>
             </a:r>
           </a:p>
         </p:txBody>
@@ -8117,10 +8345,66 @@
             <p:ph idx="1"/>
           </p:nvPr>
         </p:nvSpPr>
-        <p:spPr/>
+        <p:spPr>
+          <a:xfrm>
+            <a:off x="521208" y="1914525"/>
+            <a:ext cx="11155680" cy="4431411"/>
+          </a:xfrm>
+        </p:spPr>
         <p:txBody>
           <a:bodyPr/>
           <a:lstStyle/>
+          <a:p>
+            <a:pPr marL="0" indent="0">
+              <a:buNone/>
+            </a:pPr>
+            <a:r>
+              <a:rPr lang="zh-CN" altLang="en-US" dirty="0"/>
+              <a:t>随着工业文明的发展，资本主义通过解构传统的人的生活方式，导致了人与人之间是一种分裂式的生活方式。</a:t>
+            </a:r>
+          </a:p>
+          <a:p>
+            <a:pPr marL="0" indent="0">
+              <a:buNone/>
+            </a:pPr>
+            <a:r>
+              <a:rPr lang="zh-CN" altLang="en-US" dirty="0"/>
+              <a:t>我们说的家庭，实质并不是过去的那种家庭。</a:t>
+            </a:r>
+          </a:p>
+          <a:p>
+            <a:pPr marL="0" indent="0">
+              <a:buNone/>
+            </a:pPr>
+            <a:r>
+              <a:rPr lang="zh-CN" altLang="en-US" dirty="0"/>
+              <a:t>过去的家庭，也不是我们理解的由父母和孩子这么简单的组成。</a:t>
+            </a:r>
+          </a:p>
+          <a:p>
+            <a:pPr marL="0" indent="0">
+              <a:buNone/>
+            </a:pPr>
+            <a:r>
+              <a:rPr lang="zh-CN" altLang="en-US" dirty="0"/>
+              <a:t>其本质，实际上反而是一种社会环境，即大家族，由很多人组成的。</a:t>
+            </a:r>
+          </a:p>
+          <a:p>
+            <a:pPr marL="0" indent="0">
+              <a:buNone/>
+            </a:pPr>
+            <a:r>
+              <a:rPr lang="zh-CN" altLang="en-US" dirty="0"/>
+              <a:t>现在的家族充其量也就六个人组成，六个人能给孩子带来什么有效的影响呢？</a:t>
+            </a:r>
+          </a:p>
+          <a:p>
+            <a:pPr marL="0" indent="0">
+              <a:buNone/>
+            </a:pPr>
+            <a:endParaRPr lang="zh-CN" altLang="en-US" dirty="0"/>
+          </a:p>
           <a:p>
             <a:pPr marL="0" indent="0">
               <a:buNone/>
@@ -8133,282 +8417,6 @@
     <p:extLst>
       <p:ext uri="{BB962C8B-B14F-4D97-AF65-F5344CB8AC3E}">
         <p14:creationId xmlns:p14="http://schemas.microsoft.com/office/powerpoint/2010/main" val="3307707904"/>
-      </p:ext>
-    </p:extLst>
-  </p:cSld>
-  <p:clrMapOvr>
-    <a:masterClrMapping/>
-  </p:clrMapOvr>
-</p:sld>
-</file>
-
-<file path=ppt/slides/slide26.xml><?xml version="1.0" encoding="utf-8"?>
-<p:sld xmlns:a="http://schemas.openxmlformats.org/drawingml/2006/main" xmlns:r="http://schemas.openxmlformats.org/officeDocument/2006/relationships" xmlns:p="http://schemas.openxmlformats.org/presentationml/2006/main">
-  <p:cSld>
-    <p:spTree>
-      <p:nvGrpSpPr>
-        <p:cNvPr id="1" name="">
-          <a:extLst>
-            <a:ext uri="{FF2B5EF4-FFF2-40B4-BE49-F238E27FC236}">
-              <a16:creationId xmlns:a16="http://schemas.microsoft.com/office/drawing/2014/main" id="{B9041A6C-2FCD-0610-7596-56F7D6A0C160}"/>
-            </a:ext>
-          </a:extLst>
-        </p:cNvPr>
-        <p:cNvGrpSpPr/>
-        <p:nvPr/>
-      </p:nvGrpSpPr>
-      <p:grpSpPr>
-        <a:xfrm>
-          <a:off x="0" y="0"/>
-          <a:ext cx="0" cy="0"/>
-          <a:chOff x="0" y="0"/>
-          <a:chExt cx="0" cy="0"/>
-        </a:xfrm>
-      </p:grpSpPr>
-      <p:sp>
-        <p:nvSpPr>
-          <p:cNvPr id="2" name="标题 1">
-            <a:extLst>
-              <a:ext uri="{FF2B5EF4-FFF2-40B4-BE49-F238E27FC236}">
-                <a16:creationId xmlns:a16="http://schemas.microsoft.com/office/drawing/2014/main" id="{5B7983B1-520A-F982-D467-DDD0837834E9}"/>
-              </a:ext>
-            </a:extLst>
-          </p:cNvPr>
-          <p:cNvSpPr>
-            <a:spLocks noGrp="1"/>
-          </p:cNvSpPr>
-          <p:nvPr>
-            <p:ph type="title"/>
-          </p:nvPr>
-        </p:nvSpPr>
-        <p:spPr/>
-        <p:txBody>
-          <a:bodyPr/>
-          <a:lstStyle/>
-          <a:p>
-            <a:r>
-              <a:rPr lang="zh-CN" altLang="en-US" dirty="0"/>
-              <a:t>儿童青少年教育关键</a:t>
-            </a:r>
-          </a:p>
-        </p:txBody>
-      </p:sp>
-      <p:sp>
-        <p:nvSpPr>
-          <p:cNvPr id="3" name="内容占位符 2">
-            <a:extLst>
-              <a:ext uri="{FF2B5EF4-FFF2-40B4-BE49-F238E27FC236}">
-                <a16:creationId xmlns:a16="http://schemas.microsoft.com/office/drawing/2014/main" id="{60353229-6282-58C3-B58B-6F1D8827B383}"/>
-              </a:ext>
-            </a:extLst>
-          </p:cNvPr>
-          <p:cNvSpPr>
-            <a:spLocks noGrp="1"/>
-          </p:cNvSpPr>
-          <p:nvPr>
-            <p:ph idx="1"/>
-          </p:nvPr>
-        </p:nvSpPr>
-        <p:spPr/>
-        <p:txBody>
-          <a:bodyPr/>
-          <a:lstStyle/>
-          <a:p>
-            <a:pPr marL="0" indent="0">
-              <a:buNone/>
-            </a:pPr>
-            <a:endParaRPr lang="zh-CN" altLang="en-US" dirty="0"/>
-          </a:p>
-        </p:txBody>
-      </p:sp>
-    </p:spTree>
-    <p:extLst>
-      <p:ext uri="{BB962C8B-B14F-4D97-AF65-F5344CB8AC3E}">
-        <p14:creationId xmlns:p14="http://schemas.microsoft.com/office/powerpoint/2010/main" val="3513811925"/>
-      </p:ext>
-    </p:extLst>
-  </p:cSld>
-  <p:clrMapOvr>
-    <a:masterClrMapping/>
-  </p:clrMapOvr>
-</p:sld>
-</file>
-
-<file path=ppt/slides/slide27.xml><?xml version="1.0" encoding="utf-8"?>
-<p:sld xmlns:a="http://schemas.openxmlformats.org/drawingml/2006/main" xmlns:r="http://schemas.openxmlformats.org/officeDocument/2006/relationships" xmlns:p="http://schemas.openxmlformats.org/presentationml/2006/main">
-  <p:cSld>
-    <p:spTree>
-      <p:nvGrpSpPr>
-        <p:cNvPr id="1" name="">
-          <a:extLst>
-            <a:ext uri="{FF2B5EF4-FFF2-40B4-BE49-F238E27FC236}">
-              <a16:creationId xmlns:a16="http://schemas.microsoft.com/office/drawing/2014/main" id="{2318C560-683C-6B5C-10E4-323E60E9BB51}"/>
-            </a:ext>
-          </a:extLst>
-        </p:cNvPr>
-        <p:cNvGrpSpPr/>
-        <p:nvPr/>
-      </p:nvGrpSpPr>
-      <p:grpSpPr>
-        <a:xfrm>
-          <a:off x="0" y="0"/>
-          <a:ext cx="0" cy="0"/>
-          <a:chOff x="0" y="0"/>
-          <a:chExt cx="0" cy="0"/>
-        </a:xfrm>
-      </p:grpSpPr>
-      <p:sp>
-        <p:nvSpPr>
-          <p:cNvPr id="2" name="标题 1">
-            <a:extLst>
-              <a:ext uri="{FF2B5EF4-FFF2-40B4-BE49-F238E27FC236}">
-                <a16:creationId xmlns:a16="http://schemas.microsoft.com/office/drawing/2014/main" id="{0A69A233-4876-1C98-C2DC-BB362D1013CC}"/>
-              </a:ext>
-            </a:extLst>
-          </p:cNvPr>
-          <p:cNvSpPr>
-            <a:spLocks noGrp="1"/>
-          </p:cNvSpPr>
-          <p:nvPr>
-            <p:ph type="title"/>
-          </p:nvPr>
-        </p:nvSpPr>
-        <p:spPr/>
-        <p:txBody>
-          <a:bodyPr/>
-          <a:lstStyle/>
-          <a:p>
-            <a:r>
-              <a:rPr lang="zh-CN" altLang="en-US" dirty="0"/>
-              <a:t>儿童青少年教育关键</a:t>
-            </a:r>
-          </a:p>
-        </p:txBody>
-      </p:sp>
-      <p:sp>
-        <p:nvSpPr>
-          <p:cNvPr id="3" name="内容占位符 2">
-            <a:extLst>
-              <a:ext uri="{FF2B5EF4-FFF2-40B4-BE49-F238E27FC236}">
-                <a16:creationId xmlns:a16="http://schemas.microsoft.com/office/drawing/2014/main" id="{ACC700ED-EA11-D587-EE47-6ED08BE1C2C3}"/>
-              </a:ext>
-            </a:extLst>
-          </p:cNvPr>
-          <p:cNvSpPr>
-            <a:spLocks noGrp="1"/>
-          </p:cNvSpPr>
-          <p:nvPr>
-            <p:ph idx="1"/>
-          </p:nvPr>
-        </p:nvSpPr>
-        <p:spPr/>
-        <p:txBody>
-          <a:bodyPr/>
-          <a:lstStyle/>
-          <a:p>
-            <a:pPr marL="0" indent="0">
-              <a:buNone/>
-            </a:pPr>
-            <a:endParaRPr lang="zh-CN" altLang="en-US" dirty="0"/>
-          </a:p>
-        </p:txBody>
-      </p:sp>
-    </p:spTree>
-    <p:extLst>
-      <p:ext uri="{BB962C8B-B14F-4D97-AF65-F5344CB8AC3E}">
-        <p14:creationId xmlns:p14="http://schemas.microsoft.com/office/powerpoint/2010/main" val="1879038574"/>
-      </p:ext>
-    </p:extLst>
-  </p:cSld>
-  <p:clrMapOvr>
-    <a:masterClrMapping/>
-  </p:clrMapOvr>
-</p:sld>
-</file>
-
-<file path=ppt/slides/slide28.xml><?xml version="1.0" encoding="utf-8"?>
-<p:sld xmlns:a="http://schemas.openxmlformats.org/drawingml/2006/main" xmlns:r="http://schemas.openxmlformats.org/officeDocument/2006/relationships" xmlns:p="http://schemas.openxmlformats.org/presentationml/2006/main">
-  <p:cSld>
-    <p:spTree>
-      <p:nvGrpSpPr>
-        <p:cNvPr id="1" name="">
-          <a:extLst>
-            <a:ext uri="{FF2B5EF4-FFF2-40B4-BE49-F238E27FC236}">
-              <a16:creationId xmlns:a16="http://schemas.microsoft.com/office/drawing/2014/main" id="{242C9E50-6745-950B-DA62-EC8168F79811}"/>
-            </a:ext>
-          </a:extLst>
-        </p:cNvPr>
-        <p:cNvGrpSpPr/>
-        <p:nvPr/>
-      </p:nvGrpSpPr>
-      <p:grpSpPr>
-        <a:xfrm>
-          <a:off x="0" y="0"/>
-          <a:ext cx="0" cy="0"/>
-          <a:chOff x="0" y="0"/>
-          <a:chExt cx="0" cy="0"/>
-        </a:xfrm>
-      </p:grpSpPr>
-      <p:sp>
-        <p:nvSpPr>
-          <p:cNvPr id="2" name="标题 1">
-            <a:extLst>
-              <a:ext uri="{FF2B5EF4-FFF2-40B4-BE49-F238E27FC236}">
-                <a16:creationId xmlns:a16="http://schemas.microsoft.com/office/drawing/2014/main" id="{B7CBF760-4FD1-3150-1A44-F9F865E6C094}"/>
-              </a:ext>
-            </a:extLst>
-          </p:cNvPr>
-          <p:cNvSpPr>
-            <a:spLocks noGrp="1"/>
-          </p:cNvSpPr>
-          <p:nvPr>
-            <p:ph type="title"/>
-          </p:nvPr>
-        </p:nvSpPr>
-        <p:spPr/>
-        <p:txBody>
-          <a:bodyPr/>
-          <a:lstStyle/>
-          <a:p>
-            <a:r>
-              <a:rPr lang="zh-CN" altLang="en-US" dirty="0"/>
-              <a:t>儿童青少年教育关键</a:t>
-            </a:r>
-          </a:p>
-        </p:txBody>
-      </p:sp>
-      <p:sp>
-        <p:nvSpPr>
-          <p:cNvPr id="3" name="内容占位符 2">
-            <a:extLst>
-              <a:ext uri="{FF2B5EF4-FFF2-40B4-BE49-F238E27FC236}">
-                <a16:creationId xmlns:a16="http://schemas.microsoft.com/office/drawing/2014/main" id="{941D0119-8E78-AF28-2D57-321B2C9CD236}"/>
-              </a:ext>
-            </a:extLst>
-          </p:cNvPr>
-          <p:cNvSpPr>
-            <a:spLocks noGrp="1"/>
-          </p:cNvSpPr>
-          <p:nvPr>
-            <p:ph idx="1"/>
-          </p:nvPr>
-        </p:nvSpPr>
-        <p:spPr/>
-        <p:txBody>
-          <a:bodyPr/>
-          <a:lstStyle/>
-          <a:p>
-            <a:pPr marL="0" indent="0">
-              <a:buNone/>
-            </a:pPr>
-            <a:endParaRPr lang="zh-CN" altLang="en-US" dirty="0"/>
-          </a:p>
-        </p:txBody>
-      </p:sp>
-    </p:spTree>
-    <p:extLst>
-      <p:ext uri="{BB962C8B-B14F-4D97-AF65-F5344CB8AC3E}">
-        <p14:creationId xmlns:p14="http://schemas.microsoft.com/office/powerpoint/2010/main" val="3620217187"/>
       </p:ext>
     </p:extLst>
   </p:cSld>
@@ -8463,8 +8471,8 @@
           <a:lstStyle/>
           <a:p>
             <a:r>
-              <a:rPr lang="zh-CN" altLang="en-US" dirty="0"/>
-              <a:t>现代心理学的历史发展脉络</a:t>
+              <a:rPr lang="zh-CN" altLang="en-US" sz="4400" dirty="0"/>
+              <a:t>现代心理学的历史发展脉络（二）</a:t>
             </a:r>
           </a:p>
         </p:txBody>
@@ -8485,10 +8493,51 @@
             <p:ph idx="1"/>
           </p:nvPr>
         </p:nvSpPr>
-        <p:spPr/>
+        <p:spPr>
+          <a:xfrm>
+            <a:off x="521208" y="2057399"/>
+            <a:ext cx="11155680" cy="4657725"/>
+          </a:xfrm>
+        </p:spPr>
         <p:txBody>
           <a:bodyPr/>
           <a:lstStyle/>
+          <a:p>
+            <a:pPr marL="0" indent="0">
+              <a:buNone/>
+            </a:pPr>
+            <a:r>
+              <a:rPr lang="zh-CN" altLang="en-US" dirty="0"/>
+              <a:t>改革开放之前，</a:t>
+            </a:r>
+            <a:r>
+              <a:rPr lang="en-US" altLang="zh-CN" dirty="0"/>
+              <a:t>80</a:t>
+            </a:r>
+            <a:r>
+              <a:rPr lang="zh-CN" altLang="en-US" dirty="0"/>
+              <a:t>年代之前，我们以集体生活，国营厂办单位为主。</a:t>
+            </a:r>
+            <a:endParaRPr lang="en-US" altLang="zh-CN" dirty="0"/>
+          </a:p>
+          <a:p>
+            <a:pPr marL="0" indent="0">
+              <a:buNone/>
+            </a:pPr>
+            <a:r>
+              <a:rPr lang="zh-CN" altLang="en-US" dirty="0"/>
+              <a:t>改革开放初期，原有的集体组织瓦解，大量工人下岗，心理问题由单位组织管理向各人自行负责发展。</a:t>
+            </a:r>
+          </a:p>
+          <a:p>
+            <a:pPr marL="0" indent="0">
+              <a:buNone/>
+            </a:pPr>
+            <a:r>
+              <a:rPr lang="zh-CN" altLang="en-US" dirty="0"/>
+              <a:t>社会转型期的心理危机爆发。</a:t>
+            </a:r>
+          </a:p>
           <a:p>
             <a:pPr marL="0" indent="0">
               <a:buNone/>
@@ -8503,29 +8552,9 @@
             </a:r>
             <a:r>
               <a:rPr lang="zh-CN" altLang="en-US" dirty="0"/>
-              <a:t>年代，防自杀热线开设。</a:t>
-            </a:r>
-          </a:p>
-          <a:p>
-            <a:pPr marL="0" indent="0">
-              <a:buNone/>
-            </a:pPr>
-            <a:endParaRPr lang="zh-CN" altLang="en-US" dirty="0"/>
-          </a:p>
-          <a:p>
-            <a:pPr marL="0" indent="0">
-              <a:buNone/>
-            </a:pPr>
-            <a:r>
-              <a:rPr lang="zh-CN" altLang="en-US" dirty="0"/>
-              <a:t>自杀率上升与高危群体扩大</a:t>
-            </a:r>
-          </a:p>
-          <a:p>
-            <a:pPr marL="0" indent="0">
-              <a:buNone/>
-            </a:pPr>
-            <a:endParaRPr lang="zh-CN" altLang="en-US" dirty="0"/>
+              <a:t>年代，防自杀热线开设（自杀率上升与高危群体扩大）。</a:t>
+            </a:r>
+            <a:endParaRPr lang="en-US" altLang="zh-CN" dirty="0"/>
           </a:p>
           <a:p>
             <a:pPr marL="0" indent="0">
@@ -8547,23 +8576,21 @@
               <a:rPr lang="zh-CN" altLang="en-US" dirty="0"/>
               <a:t>岁人群的首要死因。农村自杀率显著高于城市，女性自杀率虽呈下降趋势但仍高于男性。经济压力、婚姻家庭矛盾、精神疾病等成为主要诱因。 </a:t>
             </a:r>
-          </a:p>
-          <a:p>
-            <a:pPr marL="0" indent="0">
-              <a:buNone/>
-            </a:pPr>
-            <a:r>
-              <a:rPr lang="zh-CN" altLang="en-US" dirty="0"/>
-              <a:t>创始人专家自己自杀了。</a:t>
-            </a:r>
-          </a:p>
-          <a:p>
-            <a:pPr marL="0" indent="0">
-              <a:buNone/>
-            </a:pPr>
-            <a:r>
-              <a:rPr lang="zh-CN" altLang="en-US" dirty="0"/>
-              <a:t>后被迫停办。</a:t>
+            <a:endParaRPr lang="en-US" altLang="zh-CN" dirty="0"/>
+          </a:p>
+          <a:p>
+            <a:pPr marL="0" indent="0">
+              <a:buNone/>
+            </a:pPr>
+            <a:endParaRPr lang="zh-CN" altLang="en-US" dirty="0"/>
+          </a:p>
+          <a:p>
+            <a:pPr marL="0" indent="0">
+              <a:buNone/>
+            </a:pPr>
+            <a:r>
+              <a:rPr lang="zh-CN" altLang="en-US" dirty="0"/>
+              <a:t>创始人专家自己自杀了。后被迫停办。</a:t>
             </a:r>
           </a:p>
         </p:txBody>
@@ -8572,6 +8599,289 @@
     <p:extLst>
       <p:ext uri="{BB962C8B-B14F-4D97-AF65-F5344CB8AC3E}">
         <p14:creationId xmlns:p14="http://schemas.microsoft.com/office/powerpoint/2010/main" val="4233342899"/>
+      </p:ext>
+    </p:extLst>
+  </p:cSld>
+  <p:clrMapOvr>
+    <a:masterClrMapping/>
+  </p:clrMapOvr>
+</p:sld>
+</file>
+
+<file path=ppt/slides/slide30.xml><?xml version="1.0" encoding="utf-8"?>
+<p:sld xmlns:a="http://schemas.openxmlformats.org/drawingml/2006/main" xmlns:r="http://schemas.openxmlformats.org/officeDocument/2006/relationships" xmlns:p="http://schemas.openxmlformats.org/presentationml/2006/main">
+  <p:cSld>
+    <p:spTree>
+      <p:nvGrpSpPr>
+        <p:cNvPr id="1" name="">
+          <a:extLst>
+            <a:ext uri="{FF2B5EF4-FFF2-40B4-BE49-F238E27FC236}">
+              <a16:creationId xmlns:a16="http://schemas.microsoft.com/office/drawing/2014/main" id="{B9041A6C-2FCD-0610-7596-56F7D6A0C160}"/>
+            </a:ext>
+          </a:extLst>
+        </p:cNvPr>
+        <p:cNvGrpSpPr/>
+        <p:nvPr/>
+      </p:nvGrpSpPr>
+      <p:grpSpPr>
+        <a:xfrm>
+          <a:off x="0" y="0"/>
+          <a:ext cx="0" cy="0"/>
+          <a:chOff x="0" y="0"/>
+          <a:chExt cx="0" cy="0"/>
+        </a:xfrm>
+      </p:grpSpPr>
+      <p:sp>
+        <p:nvSpPr>
+          <p:cNvPr id="2" name="标题 1">
+            <a:extLst>
+              <a:ext uri="{FF2B5EF4-FFF2-40B4-BE49-F238E27FC236}">
+                <a16:creationId xmlns:a16="http://schemas.microsoft.com/office/drawing/2014/main" id="{5B7983B1-520A-F982-D467-DDD0837834E9}"/>
+              </a:ext>
+            </a:extLst>
+          </p:cNvPr>
+          <p:cNvSpPr>
+            <a:spLocks noGrp="1"/>
+          </p:cNvSpPr>
+          <p:nvPr>
+            <p:ph type="title"/>
+          </p:nvPr>
+        </p:nvSpPr>
+        <p:spPr/>
+        <p:txBody>
+          <a:bodyPr/>
+          <a:lstStyle/>
+          <a:p>
+            <a:r>
+              <a:rPr lang="zh-CN" altLang="en-US" sz="4400" dirty="0"/>
+              <a:t>儿童青少年教育关键（十一）</a:t>
+            </a:r>
+          </a:p>
+        </p:txBody>
+      </p:sp>
+      <p:sp>
+        <p:nvSpPr>
+          <p:cNvPr id="3" name="内容占位符 2">
+            <a:extLst>
+              <a:ext uri="{FF2B5EF4-FFF2-40B4-BE49-F238E27FC236}">
+                <a16:creationId xmlns:a16="http://schemas.microsoft.com/office/drawing/2014/main" id="{60353229-6282-58C3-B58B-6F1D8827B383}"/>
+              </a:ext>
+            </a:extLst>
+          </p:cNvPr>
+          <p:cNvSpPr>
+            <a:spLocks noGrp="1"/>
+          </p:cNvSpPr>
+          <p:nvPr>
+            <p:ph idx="1"/>
+          </p:nvPr>
+        </p:nvSpPr>
+        <p:spPr>
+          <a:xfrm>
+            <a:off x="521208" y="1957388"/>
+            <a:ext cx="11155680" cy="4729162"/>
+          </a:xfrm>
+        </p:spPr>
+        <p:txBody>
+          <a:bodyPr/>
+          <a:lstStyle/>
+          <a:p>
+            <a:pPr marL="0" indent="0">
+              <a:buNone/>
+            </a:pPr>
+            <a:r>
+              <a:rPr lang="zh-CN" altLang="en-US" dirty="0"/>
+              <a:t>有人说了，我感觉家庭对孩子还是有影响的。</a:t>
+            </a:r>
+          </a:p>
+          <a:p>
+            <a:pPr marL="0" indent="0">
+              <a:buNone/>
+            </a:pPr>
+            <a:r>
+              <a:rPr lang="zh-CN" altLang="en-US" dirty="0"/>
+              <a:t>其实你还是没有理解，孟母三迁，你想想是在说家庭父母对孩子的影响吗？</a:t>
+            </a:r>
+          </a:p>
+          <a:p>
+            <a:pPr marL="0" indent="0">
+              <a:buNone/>
+            </a:pPr>
+            <a:r>
+              <a:rPr lang="zh-CN" altLang="en-US" dirty="0"/>
+              <a:t>那分明是在说环境对孩子的影响。</a:t>
+            </a:r>
+          </a:p>
+          <a:p>
+            <a:pPr marL="0" indent="0">
+              <a:buNone/>
+            </a:pPr>
+            <a:r>
+              <a:rPr lang="zh-CN" altLang="en-US" dirty="0"/>
+              <a:t>过去就是家族这种小社会对孩子的影响。</a:t>
+            </a:r>
+          </a:p>
+          <a:p>
+            <a:pPr marL="0" indent="0">
+              <a:buNone/>
+            </a:pPr>
+            <a:r>
+              <a:rPr lang="zh-CN" altLang="en-US" dirty="0"/>
+              <a:t>所以你就应该知道，什么家风、家教，那是过去那种环境下的东西，现在的小家庭，哪里来的什么家风家教？</a:t>
+            </a:r>
+          </a:p>
+          <a:p>
+            <a:pPr marL="0" indent="0">
+              <a:buNone/>
+            </a:pPr>
+            <a:r>
+              <a:rPr lang="zh-CN" altLang="en-US" dirty="0"/>
+              <a:t>几个人对孩子的影响实在是太有限了。</a:t>
+            </a:r>
+          </a:p>
+        </p:txBody>
+      </p:sp>
+    </p:spTree>
+    <p:extLst>
+      <p:ext uri="{BB962C8B-B14F-4D97-AF65-F5344CB8AC3E}">
+        <p14:creationId xmlns:p14="http://schemas.microsoft.com/office/powerpoint/2010/main" val="3513811925"/>
+      </p:ext>
+    </p:extLst>
+  </p:cSld>
+  <p:clrMapOvr>
+    <a:masterClrMapping/>
+  </p:clrMapOvr>
+</p:sld>
+</file>
+
+<file path=ppt/slides/slide31.xml><?xml version="1.0" encoding="utf-8"?>
+<p:sld xmlns:a="http://schemas.openxmlformats.org/drawingml/2006/main" xmlns:r="http://schemas.openxmlformats.org/officeDocument/2006/relationships" xmlns:p="http://schemas.openxmlformats.org/presentationml/2006/main">
+  <p:cSld>
+    <p:spTree>
+      <p:nvGrpSpPr>
+        <p:cNvPr id="1" name="">
+          <a:extLst>
+            <a:ext uri="{FF2B5EF4-FFF2-40B4-BE49-F238E27FC236}">
+              <a16:creationId xmlns:a16="http://schemas.microsoft.com/office/drawing/2014/main" id="{0BD012E6-3538-49C6-893B-A4C7A96951C9}"/>
+            </a:ext>
+          </a:extLst>
+        </p:cNvPr>
+        <p:cNvGrpSpPr/>
+        <p:nvPr/>
+      </p:nvGrpSpPr>
+      <p:grpSpPr>
+        <a:xfrm>
+          <a:off x="0" y="0"/>
+          <a:ext cx="0" cy="0"/>
+          <a:chOff x="0" y="0"/>
+          <a:chExt cx="0" cy="0"/>
+        </a:xfrm>
+      </p:grpSpPr>
+      <p:sp>
+        <p:nvSpPr>
+          <p:cNvPr id="2" name="标题 1">
+            <a:extLst>
+              <a:ext uri="{FF2B5EF4-FFF2-40B4-BE49-F238E27FC236}">
+                <a16:creationId xmlns:a16="http://schemas.microsoft.com/office/drawing/2014/main" id="{B773D9A9-ADEE-656C-0BE9-C938F7BA0D25}"/>
+              </a:ext>
+            </a:extLst>
+          </p:cNvPr>
+          <p:cNvSpPr>
+            <a:spLocks noGrp="1"/>
+          </p:cNvSpPr>
+          <p:nvPr>
+            <p:ph type="title"/>
+          </p:nvPr>
+        </p:nvSpPr>
+        <p:spPr/>
+        <p:txBody>
+          <a:bodyPr/>
+          <a:lstStyle/>
+          <a:p>
+            <a:r>
+              <a:rPr lang="zh-CN" altLang="en-US" sz="4400" dirty="0"/>
+              <a:t>儿童青少年教育关键</a:t>
+            </a:r>
+            <a:r>
+              <a:rPr lang="zh-CN" altLang="en-US" sz="4400"/>
+              <a:t>（十二）</a:t>
+            </a:r>
+            <a:endParaRPr lang="zh-CN" altLang="en-US" sz="4400" dirty="0"/>
+          </a:p>
+        </p:txBody>
+      </p:sp>
+      <p:sp>
+        <p:nvSpPr>
+          <p:cNvPr id="3" name="内容占位符 2">
+            <a:extLst>
+              <a:ext uri="{FF2B5EF4-FFF2-40B4-BE49-F238E27FC236}">
+                <a16:creationId xmlns:a16="http://schemas.microsoft.com/office/drawing/2014/main" id="{ED026127-1329-BAD7-062A-FD21D26E7168}"/>
+              </a:ext>
+            </a:extLst>
+          </p:cNvPr>
+          <p:cNvSpPr>
+            <a:spLocks noGrp="1"/>
+          </p:cNvSpPr>
+          <p:nvPr>
+            <p:ph idx="1"/>
+          </p:nvPr>
+        </p:nvSpPr>
+        <p:spPr>
+          <a:xfrm>
+            <a:off x="521208" y="1957388"/>
+            <a:ext cx="11155680" cy="4729162"/>
+          </a:xfrm>
+        </p:spPr>
+        <p:txBody>
+          <a:bodyPr/>
+          <a:lstStyle/>
+          <a:p>
+            <a:pPr marL="0" indent="0">
+              <a:buNone/>
+            </a:pPr>
+            <a:r>
+              <a:rPr lang="zh-CN" altLang="en-US" dirty="0"/>
+              <a:t>我们说，为什么孩子越大越不听话。</a:t>
+            </a:r>
+          </a:p>
+          <a:p>
+            <a:pPr marL="0" indent="0">
+              <a:buNone/>
+            </a:pPr>
+            <a:r>
+              <a:rPr lang="zh-CN" altLang="en-US" dirty="0"/>
+              <a:t>其实就是家庭外部环境对孩子的影响，大过于家庭父母对他的影响。</a:t>
+            </a:r>
+          </a:p>
+          <a:p>
+            <a:pPr marL="0" indent="0">
+              <a:buNone/>
+            </a:pPr>
+            <a:r>
+              <a:rPr lang="zh-CN" altLang="en-US" dirty="0"/>
+              <a:t>一个人，他对社会群体的认同，始终是要大大大过父母对他的影响的，这是铁律。</a:t>
+            </a:r>
+          </a:p>
+          <a:p>
+            <a:pPr marL="0" indent="0">
+              <a:buNone/>
+            </a:pPr>
+            <a:r>
+              <a:rPr lang="zh-CN" altLang="en-US" dirty="0"/>
+              <a:t>如果你还看不懂这一点，还在抱着原生家庭那套假冒伪劣，那么你是看不懂，也搞不好孩子的教育问题的。</a:t>
+            </a:r>
+          </a:p>
+          <a:p>
+            <a:pPr marL="0" indent="0">
+              <a:buNone/>
+            </a:pPr>
+            <a:endParaRPr lang="zh-CN" altLang="en-US" dirty="0"/>
+          </a:p>
+        </p:txBody>
+      </p:sp>
+    </p:spTree>
+    <p:extLst>
+      <p:ext uri="{BB962C8B-B14F-4D97-AF65-F5344CB8AC3E}">
+        <p14:creationId xmlns:p14="http://schemas.microsoft.com/office/powerpoint/2010/main" val="2188646574"/>
       </p:ext>
     </p:extLst>
   </p:cSld>
@@ -8626,8 +8936,8 @@
           <a:lstStyle/>
           <a:p>
             <a:r>
-              <a:rPr lang="zh-CN" altLang="en-US" dirty="0"/>
-              <a:t>现代心理学的历史发展脉络</a:t>
+              <a:rPr lang="zh-CN" altLang="en-US" sz="4400" dirty="0"/>
+              <a:t>现代心理学的历史发展脉络（三）</a:t>
             </a:r>
           </a:p>
         </p:txBody>
@@ -8652,6 +8962,36 @@
         <p:txBody>
           <a:bodyPr/>
           <a:lstStyle/>
+          <a:p>
+            <a:pPr marL="0" indent="0">
+              <a:buNone/>
+            </a:pPr>
+            <a:r>
+              <a:rPr lang="zh-CN" altLang="en-US" dirty="0"/>
+              <a:t>改革开放初期，原有的集体组织瓦解，大量工人下岗，心理问题由单位组织管理向各人自行负责发展。</a:t>
+            </a:r>
+          </a:p>
+          <a:p>
+            <a:pPr marL="0" indent="0">
+              <a:buNone/>
+            </a:pPr>
+            <a:endParaRPr lang="zh-CN" altLang="en-US" dirty="0"/>
+          </a:p>
+          <a:p>
+            <a:pPr marL="0" indent="0">
+              <a:buNone/>
+            </a:pPr>
+            <a:r>
+              <a:rPr lang="zh-CN" altLang="en-US" dirty="0"/>
+              <a:t>社会转型期的心理危机爆发。</a:t>
+            </a:r>
+          </a:p>
+          <a:p>
+            <a:pPr marL="0" indent="0">
+              <a:buNone/>
+            </a:pPr>
+            <a:endParaRPr lang="en-US" altLang="zh-CN" dirty="0"/>
+          </a:p>
           <a:p>
             <a:pPr marL="0" indent="0">
               <a:buNone/>
@@ -8721,8 +9061,8 @@
           <a:lstStyle/>
           <a:p>
             <a:r>
-              <a:rPr lang="zh-CN" altLang="en-US" dirty="0"/>
-              <a:t>现代心理学的历史发展脉络</a:t>
+              <a:rPr lang="zh-CN" altLang="en-US" sz="4400" dirty="0"/>
+              <a:t>现代心理学的历史发展脉络（四）</a:t>
             </a:r>
           </a:p>
         </p:txBody>
@@ -8836,6 +9176,1337 @@
   <p:cSld>
     <p:spTree>
       <p:nvGrpSpPr>
+        <p:cNvPr id="1" name="">
+          <a:extLst>
+            <a:ext uri="{FF2B5EF4-FFF2-40B4-BE49-F238E27FC236}">
+              <a16:creationId xmlns:a16="http://schemas.microsoft.com/office/drawing/2014/main" id="{731178F9-20D8-CA27-FE2B-B3454737D8D2}"/>
+            </a:ext>
+          </a:extLst>
+        </p:cNvPr>
+        <p:cNvGrpSpPr/>
+        <p:nvPr/>
+      </p:nvGrpSpPr>
+      <p:grpSpPr>
+        <a:xfrm>
+          <a:off x="0" y="0"/>
+          <a:ext cx="0" cy="0"/>
+          <a:chOff x="0" y="0"/>
+          <a:chExt cx="0" cy="0"/>
+        </a:xfrm>
+      </p:grpSpPr>
+      <p:sp>
+        <p:nvSpPr>
+          <p:cNvPr id="2" name="标题 1">
+            <a:extLst>
+              <a:ext uri="{FF2B5EF4-FFF2-40B4-BE49-F238E27FC236}">
+                <a16:creationId xmlns:a16="http://schemas.microsoft.com/office/drawing/2014/main" id="{0EC63A5C-FC02-A7F5-2C06-AB808CC59E96}"/>
+              </a:ext>
+            </a:extLst>
+          </p:cNvPr>
+          <p:cNvSpPr>
+            <a:spLocks noGrp="1"/>
+          </p:cNvSpPr>
+          <p:nvPr>
+            <p:ph type="title"/>
+          </p:nvPr>
+        </p:nvSpPr>
+        <p:spPr/>
+        <p:txBody>
+          <a:bodyPr/>
+          <a:lstStyle/>
+          <a:p>
+            <a:r>
+              <a:rPr lang="zh-CN" altLang="en-US" sz="4400" dirty="0"/>
+              <a:t>教育历史变化及当下教育真相（一）</a:t>
+            </a:r>
+          </a:p>
+        </p:txBody>
+      </p:sp>
+      <p:sp>
+        <p:nvSpPr>
+          <p:cNvPr id="4" name="Rectangle 1">
+            <a:extLst>
+              <a:ext uri="{FF2B5EF4-FFF2-40B4-BE49-F238E27FC236}">
+                <a16:creationId xmlns:a16="http://schemas.microsoft.com/office/drawing/2014/main" id="{A6F6FA06-FEC3-805E-886B-446CA6B33778}"/>
+              </a:ext>
+            </a:extLst>
+          </p:cNvPr>
+          <p:cNvSpPr>
+            <a:spLocks noGrp="1" noChangeArrowheads="1"/>
+          </p:cNvSpPr>
+          <p:nvPr>
+            <p:ph idx="1"/>
+          </p:nvPr>
+        </p:nvSpPr>
+        <p:spPr bwMode="auto">
+          <a:xfrm>
+            <a:off x="521207" y="2723333"/>
+            <a:ext cx="11337417" cy="3477875"/>
+          </a:xfrm>
+          <a:prstGeom prst="rect">
+            <a:avLst/>
+          </a:prstGeom>
+          <a:noFill/>
+          <a:ln>
+            <a:noFill/>
+          </a:ln>
+          <a:effectLst/>
+          <a:extLst>
+            <a:ext uri="{909E8E84-426E-40DD-AFC4-6F175D3DCCD1}">
+              <a14:hiddenFill xmlns:a14="http://schemas.microsoft.com/office/drawing/2010/main">
+                <a:solidFill>
+                  <a:schemeClr val="accent1"/>
+                </a:solidFill>
+              </a14:hiddenFill>
+            </a:ext>
+            <a:ext uri="{91240B29-F687-4F45-9708-019B960494DF}">
+              <a14:hiddenLine xmlns:a14="http://schemas.microsoft.com/office/drawing/2010/main" w="9525">
+                <a:solidFill>
+                  <a:schemeClr val="tx1"/>
+                </a:solidFill>
+                <a:miter lim="800000"/>
+                <a:headEnd/>
+                <a:tailEnd/>
+              </a14:hiddenLine>
+            </a:ext>
+            <a:ext uri="{AF507438-7753-43E0-B8FC-AC1667EBCBE1}">
+              <a14:hiddenEffects xmlns:a14="http://schemas.microsoft.com/office/drawing/2010/main">
+                <a:effectLst>
+                  <a:outerShdw dist="35921" dir="2700000" algn="ctr" rotWithShape="0">
+                    <a:schemeClr val="bg2"/>
+                  </a:outerShdw>
+                </a:effectLst>
+              </a14:hiddenEffects>
+            </a:ext>
+          </a:extLst>
+        </p:spPr>
+        <p:txBody>
+          <a:bodyPr vert="horz" wrap="square" lIns="91440" tIns="45720" rIns="91440" bIns="45720" numCol="1" anchor="ctr" anchorCtr="0" compatLnSpc="1">
+            <a:prstTxWarp prst="textNoShape">
+              <a:avLst/>
+            </a:prstTxWarp>
+            <a:spAutoFit/>
+          </a:bodyPr>
+          <a:lstStyle>
+            <a:lvl1pPr eaLnBrk="0" fontAlgn="base" hangingPunct="0">
+              <a:spcBef>
+                <a:spcPct val="0"/>
+              </a:spcBef>
+              <a:spcAft>
+                <a:spcPct val="0"/>
+              </a:spcAft>
+              <a:defRPr>
+                <a:solidFill>
+                  <a:schemeClr val="tx1"/>
+                </a:solidFill>
+                <a:latin typeface="Arial" panose="020B0604020202020204" pitchFamily="34" charset="0"/>
+              </a:defRPr>
+            </a:lvl1pPr>
+            <a:lvl2pPr eaLnBrk="0" fontAlgn="base" hangingPunct="0">
+              <a:spcBef>
+                <a:spcPct val="0"/>
+              </a:spcBef>
+              <a:spcAft>
+                <a:spcPct val="0"/>
+              </a:spcAft>
+              <a:defRPr>
+                <a:solidFill>
+                  <a:schemeClr val="tx1"/>
+                </a:solidFill>
+                <a:latin typeface="Arial" panose="020B0604020202020204" pitchFamily="34" charset="0"/>
+              </a:defRPr>
+            </a:lvl2pPr>
+            <a:lvl3pPr eaLnBrk="0" fontAlgn="base" hangingPunct="0">
+              <a:spcBef>
+                <a:spcPct val="0"/>
+              </a:spcBef>
+              <a:spcAft>
+                <a:spcPct val="0"/>
+              </a:spcAft>
+              <a:defRPr>
+                <a:solidFill>
+                  <a:schemeClr val="tx1"/>
+                </a:solidFill>
+                <a:latin typeface="Arial" panose="020B0604020202020204" pitchFamily="34" charset="0"/>
+              </a:defRPr>
+            </a:lvl3pPr>
+            <a:lvl4pPr eaLnBrk="0" fontAlgn="base" hangingPunct="0">
+              <a:spcBef>
+                <a:spcPct val="0"/>
+              </a:spcBef>
+              <a:spcAft>
+                <a:spcPct val="0"/>
+              </a:spcAft>
+              <a:defRPr>
+                <a:solidFill>
+                  <a:schemeClr val="tx1"/>
+                </a:solidFill>
+                <a:latin typeface="Arial" panose="020B0604020202020204" pitchFamily="34" charset="0"/>
+              </a:defRPr>
+            </a:lvl4pPr>
+            <a:lvl5pPr eaLnBrk="0" fontAlgn="base" hangingPunct="0">
+              <a:spcBef>
+                <a:spcPct val="0"/>
+              </a:spcBef>
+              <a:spcAft>
+                <a:spcPct val="0"/>
+              </a:spcAft>
+              <a:defRPr>
+                <a:solidFill>
+                  <a:schemeClr val="tx1"/>
+                </a:solidFill>
+                <a:latin typeface="Arial" panose="020B0604020202020204" pitchFamily="34" charset="0"/>
+              </a:defRPr>
+            </a:lvl5pPr>
+            <a:lvl6pPr eaLnBrk="0" fontAlgn="base" hangingPunct="0">
+              <a:spcBef>
+                <a:spcPct val="0"/>
+              </a:spcBef>
+              <a:spcAft>
+                <a:spcPct val="0"/>
+              </a:spcAft>
+              <a:defRPr>
+                <a:solidFill>
+                  <a:schemeClr val="tx1"/>
+                </a:solidFill>
+                <a:latin typeface="Arial" panose="020B0604020202020204" pitchFamily="34" charset="0"/>
+              </a:defRPr>
+            </a:lvl6pPr>
+            <a:lvl7pPr eaLnBrk="0" fontAlgn="base" hangingPunct="0">
+              <a:spcBef>
+                <a:spcPct val="0"/>
+              </a:spcBef>
+              <a:spcAft>
+                <a:spcPct val="0"/>
+              </a:spcAft>
+              <a:defRPr>
+                <a:solidFill>
+                  <a:schemeClr val="tx1"/>
+                </a:solidFill>
+                <a:latin typeface="Arial" panose="020B0604020202020204" pitchFamily="34" charset="0"/>
+              </a:defRPr>
+            </a:lvl7pPr>
+            <a:lvl8pPr eaLnBrk="0" fontAlgn="base" hangingPunct="0">
+              <a:spcBef>
+                <a:spcPct val="0"/>
+              </a:spcBef>
+              <a:spcAft>
+                <a:spcPct val="0"/>
+              </a:spcAft>
+              <a:defRPr>
+                <a:solidFill>
+                  <a:schemeClr val="tx1"/>
+                </a:solidFill>
+                <a:latin typeface="Arial" panose="020B0604020202020204" pitchFamily="34" charset="0"/>
+              </a:defRPr>
+            </a:lvl8pPr>
+            <a:lvl9pPr eaLnBrk="0" fontAlgn="base" hangingPunct="0">
+              <a:spcBef>
+                <a:spcPct val="0"/>
+              </a:spcBef>
+              <a:spcAft>
+                <a:spcPct val="0"/>
+              </a:spcAft>
+              <a:defRPr>
+                <a:solidFill>
+                  <a:schemeClr val="tx1"/>
+                </a:solidFill>
+                <a:latin typeface="Arial" panose="020B0604020202020204" pitchFamily="34" charset="0"/>
+              </a:defRPr>
+            </a:lvl9pPr>
+          </a:lstStyle>
+          <a:p>
+            <a:pPr marL="0" marR="0" lvl="0" indent="0" algn="l" defTabSz="914400" rtl="0" eaLnBrk="0" fontAlgn="base" latinLnBrk="0" hangingPunct="0">
+              <a:lnSpc>
+                <a:spcPct val="100000"/>
+              </a:lnSpc>
+              <a:spcBef>
+                <a:spcPct val="0"/>
+              </a:spcBef>
+              <a:spcAft>
+                <a:spcPct val="0"/>
+              </a:spcAft>
+              <a:buClrTx/>
+              <a:buSzTx/>
+              <a:buFontTx/>
+              <a:buNone/>
+              <a:tabLst/>
+            </a:pPr>
+            <a:r>
+              <a:rPr kumimoji="0" lang="zh-CN" altLang="zh-CN" b="0" i="0" u="none" strike="noStrike" cap="none" normalizeH="0" baseline="0" dirty="0">
+                <a:ln>
+                  <a:noFill/>
+                </a:ln>
+                <a:solidFill>
+                  <a:srgbClr val="333333"/>
+                </a:solidFill>
+                <a:effectLst/>
+                <a:latin typeface="+mn-ea"/>
+                <a:cs typeface="Open Sans" panose="020B0606030504020204" pitchFamily="34" charset="0"/>
+              </a:rPr>
+              <a:t>学校是如何发明出来的？</a:t>
+            </a:r>
+            <a:endParaRPr kumimoji="0" lang="zh-CN" altLang="zh-CN" b="0" i="0" u="none" strike="noStrike" cap="none" normalizeH="0" baseline="0" dirty="0">
+              <a:ln>
+                <a:noFill/>
+              </a:ln>
+              <a:solidFill>
+                <a:schemeClr val="tx1"/>
+              </a:solidFill>
+              <a:effectLst/>
+              <a:latin typeface="+mn-ea"/>
+            </a:endParaRPr>
+          </a:p>
+          <a:p>
+            <a:pPr marL="0" marR="0" lvl="0" indent="0" algn="l" defTabSz="914400" rtl="0" eaLnBrk="0" fontAlgn="base" latinLnBrk="0" hangingPunct="0">
+              <a:lnSpc>
+                <a:spcPct val="100000"/>
+              </a:lnSpc>
+              <a:spcBef>
+                <a:spcPct val="0"/>
+              </a:spcBef>
+              <a:spcAft>
+                <a:spcPct val="0"/>
+              </a:spcAft>
+              <a:buClrTx/>
+              <a:buSzTx/>
+              <a:buFontTx/>
+              <a:buNone/>
+              <a:tabLst/>
+            </a:pPr>
+            <a:r>
+              <a:rPr kumimoji="0" lang="zh-CN" altLang="zh-CN" b="0" i="0" u="none" strike="noStrike" cap="none" normalizeH="0" baseline="0" dirty="0">
+                <a:ln>
+                  <a:noFill/>
+                </a:ln>
+                <a:solidFill>
+                  <a:srgbClr val="333333"/>
+                </a:solidFill>
+                <a:effectLst/>
+                <a:latin typeface="+mn-ea"/>
+                <a:cs typeface="Open Sans" panose="020B0606030504020204" pitchFamily="34" charset="0"/>
+              </a:rPr>
+              <a:t>普鲁士，最后一课。</a:t>
+            </a:r>
+            <a:endParaRPr kumimoji="0" lang="zh-CN" altLang="zh-CN" b="0" i="0" u="none" strike="noStrike" cap="none" normalizeH="0" baseline="0" dirty="0">
+              <a:ln>
+                <a:noFill/>
+              </a:ln>
+              <a:solidFill>
+                <a:schemeClr val="tx1"/>
+              </a:solidFill>
+              <a:effectLst/>
+              <a:latin typeface="+mn-ea"/>
+            </a:endParaRPr>
+          </a:p>
+          <a:p>
+            <a:pPr marL="0" marR="0" lvl="0" indent="0" algn="l" defTabSz="914400" rtl="0" eaLnBrk="0" fontAlgn="base" latinLnBrk="0" hangingPunct="0">
+              <a:lnSpc>
+                <a:spcPct val="100000"/>
+              </a:lnSpc>
+              <a:spcBef>
+                <a:spcPct val="0"/>
+              </a:spcBef>
+              <a:spcAft>
+                <a:spcPct val="0"/>
+              </a:spcAft>
+              <a:buClrTx/>
+              <a:buSzTx/>
+              <a:buFontTx/>
+              <a:buNone/>
+              <a:tabLst/>
+            </a:pPr>
+            <a:r>
+              <a:rPr kumimoji="0" lang="zh-CN" altLang="zh-CN" b="0" i="0" u="none" strike="noStrike" cap="none" normalizeH="0" baseline="0" dirty="0">
+                <a:ln>
+                  <a:noFill/>
+                </a:ln>
+                <a:solidFill>
+                  <a:srgbClr val="333333"/>
+                </a:solidFill>
+                <a:effectLst/>
+                <a:latin typeface="+mn-ea"/>
+                <a:cs typeface="Open Sans" panose="020B0606030504020204" pitchFamily="34" charset="0"/>
+              </a:rPr>
+              <a:t>工业文明将传统的家庭解构，大人要上班，孩子必须想办法解决照顾问题。</a:t>
+            </a:r>
+            <a:endParaRPr kumimoji="0" lang="zh-CN" altLang="zh-CN" b="0" i="0" u="none" strike="noStrike" cap="none" normalizeH="0" baseline="0" dirty="0">
+              <a:ln>
+                <a:noFill/>
+              </a:ln>
+              <a:solidFill>
+                <a:schemeClr val="tx1"/>
+              </a:solidFill>
+              <a:effectLst/>
+              <a:latin typeface="+mn-ea"/>
+            </a:endParaRPr>
+          </a:p>
+          <a:p>
+            <a:pPr marL="0" marR="0" lvl="0" indent="0" algn="l" defTabSz="914400" rtl="0" eaLnBrk="0" fontAlgn="base" latinLnBrk="0" hangingPunct="0">
+              <a:lnSpc>
+                <a:spcPct val="100000"/>
+              </a:lnSpc>
+              <a:spcBef>
+                <a:spcPct val="0"/>
+              </a:spcBef>
+              <a:spcAft>
+                <a:spcPct val="0"/>
+              </a:spcAft>
+              <a:buClrTx/>
+              <a:buSzTx/>
+              <a:buFontTx/>
+              <a:buNone/>
+              <a:tabLst/>
+            </a:pPr>
+            <a:r>
+              <a:rPr kumimoji="0" lang="zh-CN" altLang="zh-CN" b="0" i="0" u="none" strike="noStrike" cap="none" normalizeH="0" baseline="0" dirty="0">
+                <a:ln>
+                  <a:noFill/>
+                </a:ln>
+                <a:solidFill>
+                  <a:srgbClr val="333333"/>
+                </a:solidFill>
+                <a:effectLst/>
+                <a:latin typeface="+mn-ea"/>
+                <a:cs typeface="Open Sans" panose="020B0606030504020204" pitchFamily="34" charset="0"/>
+              </a:rPr>
+              <a:t>并且，孩子们在学校学习，将来还可以继续成为工人为工业时代服务。</a:t>
+            </a:r>
+            <a:endParaRPr kumimoji="0" lang="zh-CN" altLang="zh-CN" b="0" i="0" u="none" strike="noStrike" cap="none" normalizeH="0" baseline="0" dirty="0">
+              <a:ln>
+                <a:noFill/>
+              </a:ln>
+              <a:solidFill>
+                <a:schemeClr val="tx1"/>
+              </a:solidFill>
+              <a:effectLst/>
+              <a:latin typeface="+mn-ea"/>
+            </a:endParaRPr>
+          </a:p>
+          <a:p>
+            <a:pPr marL="0" marR="0" lvl="0" indent="0" algn="l" defTabSz="914400" rtl="0" eaLnBrk="0" fontAlgn="base" latinLnBrk="0" hangingPunct="0">
+              <a:lnSpc>
+                <a:spcPct val="100000"/>
+              </a:lnSpc>
+              <a:spcBef>
+                <a:spcPct val="0"/>
+              </a:spcBef>
+              <a:spcAft>
+                <a:spcPct val="0"/>
+              </a:spcAft>
+              <a:buClrTx/>
+              <a:buSzTx/>
+              <a:buFontTx/>
+              <a:buNone/>
+              <a:tabLst/>
+            </a:pPr>
+            <a:r>
+              <a:rPr kumimoji="0" lang="zh-CN" altLang="zh-CN" b="0" i="0" u="none" strike="noStrike" cap="none" normalizeH="0" baseline="0" dirty="0">
+                <a:ln>
+                  <a:noFill/>
+                </a:ln>
+                <a:solidFill>
+                  <a:srgbClr val="333333"/>
+                </a:solidFill>
+                <a:effectLst/>
+                <a:latin typeface="+mn-ea"/>
+                <a:cs typeface="Open Sans" panose="020B0606030504020204" pitchFamily="34" charset="0"/>
+              </a:rPr>
+              <a:t>大家有没有想过一个问题，为什么孩子们在8点上学，为什么我们要8点上班？</a:t>
+            </a:r>
+            <a:endParaRPr kumimoji="0" lang="zh-CN" altLang="zh-CN" b="0" i="0" u="none" strike="noStrike" cap="none" normalizeH="0" baseline="0" dirty="0">
+              <a:ln>
+                <a:noFill/>
+              </a:ln>
+              <a:solidFill>
+                <a:schemeClr val="tx1"/>
+              </a:solidFill>
+              <a:effectLst/>
+              <a:latin typeface="+mn-ea"/>
+            </a:endParaRPr>
+          </a:p>
+          <a:p>
+            <a:pPr marL="0" marR="0" lvl="0" indent="0" algn="l" defTabSz="914400" rtl="0" eaLnBrk="0" fontAlgn="base" latinLnBrk="0" hangingPunct="0">
+              <a:lnSpc>
+                <a:spcPct val="100000"/>
+              </a:lnSpc>
+              <a:spcBef>
+                <a:spcPct val="0"/>
+              </a:spcBef>
+              <a:spcAft>
+                <a:spcPct val="0"/>
+              </a:spcAft>
+              <a:buClrTx/>
+              <a:buSzTx/>
+              <a:buFontTx/>
+              <a:buNone/>
+              <a:tabLst/>
+            </a:pPr>
+            <a:r>
+              <a:rPr kumimoji="0" lang="zh-CN" altLang="zh-CN" b="0" i="0" u="none" strike="noStrike" cap="none" normalizeH="0" baseline="0" dirty="0">
+                <a:ln>
+                  <a:noFill/>
+                </a:ln>
+                <a:solidFill>
+                  <a:srgbClr val="333333"/>
+                </a:solidFill>
+                <a:effectLst/>
+                <a:latin typeface="+mn-ea"/>
+                <a:cs typeface="Open Sans" panose="020B0606030504020204" pitchFamily="34" charset="0"/>
+              </a:rPr>
+              <a:t>10点上学，下午2上班行不行？不去上学，不去上班行不行？让孩子在教室里坐上40分钟不动，行不行？</a:t>
+            </a:r>
+            <a:endParaRPr kumimoji="0" lang="zh-CN" altLang="zh-CN" b="0" i="0" u="none" strike="noStrike" cap="none" normalizeH="0" baseline="0" dirty="0">
+              <a:ln>
+                <a:noFill/>
+              </a:ln>
+              <a:solidFill>
+                <a:schemeClr val="tx1"/>
+              </a:solidFill>
+              <a:effectLst/>
+              <a:latin typeface="+mn-ea"/>
+            </a:endParaRPr>
+          </a:p>
+          <a:p>
+            <a:pPr marL="0" marR="0" lvl="0" indent="0" algn="l" defTabSz="914400" rtl="0" eaLnBrk="0" fontAlgn="base" latinLnBrk="0" hangingPunct="0">
+              <a:lnSpc>
+                <a:spcPct val="100000"/>
+              </a:lnSpc>
+              <a:spcBef>
+                <a:spcPct val="0"/>
+              </a:spcBef>
+              <a:spcAft>
+                <a:spcPct val="0"/>
+              </a:spcAft>
+              <a:buClrTx/>
+              <a:buSzTx/>
+              <a:buFontTx/>
+              <a:buNone/>
+              <a:tabLst/>
+            </a:pPr>
+            <a:r>
+              <a:rPr kumimoji="0" lang="zh-CN" altLang="zh-CN" b="0" i="0" u="none" strike="noStrike" cap="none" normalizeH="0" baseline="0" dirty="0">
+                <a:ln>
+                  <a:noFill/>
+                </a:ln>
+                <a:solidFill>
+                  <a:srgbClr val="333333"/>
+                </a:solidFill>
+                <a:effectLst/>
+                <a:latin typeface="+mn-ea"/>
+                <a:cs typeface="Open Sans" panose="020B0606030504020204" pitchFamily="34" charset="0"/>
+              </a:rPr>
+              <a:t>这是反人性的，对不对？</a:t>
+            </a:r>
+            <a:endParaRPr kumimoji="0" lang="zh-CN" altLang="zh-CN" b="0" i="0" u="none" strike="noStrike" cap="none" normalizeH="0" baseline="0" dirty="0">
+              <a:ln>
+                <a:noFill/>
+              </a:ln>
+              <a:solidFill>
+                <a:schemeClr val="tx1"/>
+              </a:solidFill>
+              <a:effectLst/>
+              <a:latin typeface="+mn-ea"/>
+            </a:endParaRPr>
+          </a:p>
+          <a:p>
+            <a:pPr marL="0" marR="0" lvl="0" indent="0" algn="l" defTabSz="914400" rtl="0" eaLnBrk="0" fontAlgn="base" latinLnBrk="0" hangingPunct="0">
+              <a:lnSpc>
+                <a:spcPct val="100000"/>
+              </a:lnSpc>
+              <a:spcBef>
+                <a:spcPct val="0"/>
+              </a:spcBef>
+              <a:spcAft>
+                <a:spcPct val="0"/>
+              </a:spcAft>
+              <a:buClrTx/>
+              <a:buSzTx/>
+              <a:buFontTx/>
+              <a:buNone/>
+              <a:tabLst/>
+            </a:pPr>
+            <a:r>
+              <a:rPr kumimoji="0" lang="zh-CN" altLang="zh-CN" b="0" i="0" u="none" strike="noStrike" cap="none" normalizeH="0" baseline="0" dirty="0">
+                <a:ln>
+                  <a:noFill/>
+                </a:ln>
+                <a:solidFill>
+                  <a:srgbClr val="333333"/>
+                </a:solidFill>
+                <a:effectLst/>
+                <a:latin typeface="+mn-ea"/>
+                <a:cs typeface="Open Sans" panose="020B0606030504020204" pitchFamily="34" charset="0"/>
+              </a:rPr>
+              <a:t>换作成年人，可能40分钟可以坐得住，但是让你干一天的活，你是不是就受不了了呢？</a:t>
+            </a:r>
+            <a:endParaRPr kumimoji="0" lang="en-US" altLang="zh-CN" b="0" i="0" u="none" strike="noStrike" cap="none" normalizeH="0" baseline="0" dirty="0">
+              <a:ln>
+                <a:noFill/>
+              </a:ln>
+              <a:solidFill>
+                <a:srgbClr val="333333"/>
+              </a:solidFill>
+              <a:effectLst/>
+              <a:latin typeface="+mn-ea"/>
+              <a:cs typeface="Open Sans" panose="020B0606030504020204" pitchFamily="34" charset="0"/>
+            </a:endParaRPr>
+          </a:p>
+          <a:p>
+            <a:pPr marL="0" marR="0" lvl="0" indent="0" algn="l" defTabSz="914400" rtl="0" eaLnBrk="0" fontAlgn="base" latinLnBrk="0" hangingPunct="0">
+              <a:lnSpc>
+                <a:spcPct val="100000"/>
+              </a:lnSpc>
+              <a:spcBef>
+                <a:spcPct val="0"/>
+              </a:spcBef>
+              <a:spcAft>
+                <a:spcPct val="0"/>
+              </a:spcAft>
+              <a:buClrTx/>
+              <a:buSzTx/>
+              <a:buFontTx/>
+              <a:buNone/>
+              <a:tabLst/>
+            </a:pPr>
+            <a:endParaRPr kumimoji="0" lang="zh-CN" altLang="zh-CN" b="0" i="0" u="none" strike="noStrike" cap="none" normalizeH="0" baseline="0" dirty="0">
+              <a:ln>
+                <a:noFill/>
+              </a:ln>
+              <a:solidFill>
+                <a:schemeClr val="tx1"/>
+              </a:solidFill>
+              <a:effectLst/>
+              <a:latin typeface="+mn-ea"/>
+            </a:endParaRPr>
+          </a:p>
+          <a:p>
+            <a:pPr marL="0" marR="0" lvl="0" indent="0" algn="l" defTabSz="914400" rtl="0" eaLnBrk="0" fontAlgn="base" latinLnBrk="0" hangingPunct="0">
+              <a:lnSpc>
+                <a:spcPct val="100000"/>
+              </a:lnSpc>
+              <a:spcBef>
+                <a:spcPct val="0"/>
+              </a:spcBef>
+              <a:spcAft>
+                <a:spcPct val="0"/>
+              </a:spcAft>
+              <a:buClrTx/>
+              <a:buSzTx/>
+              <a:buFontTx/>
+              <a:buNone/>
+              <a:tabLst/>
+            </a:pPr>
+            <a:endParaRPr kumimoji="0" lang="zh-CN" altLang="zh-CN" b="0" i="0" u="none" strike="noStrike" cap="none" normalizeH="0" baseline="0" dirty="0">
+              <a:ln>
+                <a:noFill/>
+              </a:ln>
+              <a:solidFill>
+                <a:schemeClr val="tx1"/>
+              </a:solidFill>
+              <a:effectLst/>
+              <a:latin typeface="+mn-ea"/>
+            </a:endParaRPr>
+          </a:p>
+        </p:txBody>
+      </p:sp>
+    </p:spTree>
+    <p:extLst>
+      <p:ext uri="{BB962C8B-B14F-4D97-AF65-F5344CB8AC3E}">
+        <p14:creationId xmlns:p14="http://schemas.microsoft.com/office/powerpoint/2010/main" val="2590083551"/>
+      </p:ext>
+    </p:extLst>
+  </p:cSld>
+  <p:clrMapOvr>
+    <a:masterClrMapping/>
+  </p:clrMapOvr>
+</p:sld>
+</file>
+
+<file path=ppt/slides/slide7.xml><?xml version="1.0" encoding="utf-8"?>
+<p:sld xmlns:a="http://schemas.openxmlformats.org/drawingml/2006/main" xmlns:r="http://schemas.openxmlformats.org/officeDocument/2006/relationships" xmlns:p="http://schemas.openxmlformats.org/presentationml/2006/main">
+  <p:cSld>
+    <p:spTree>
+      <p:nvGrpSpPr>
+        <p:cNvPr id="1" name="">
+          <a:extLst>
+            <a:ext uri="{FF2B5EF4-FFF2-40B4-BE49-F238E27FC236}">
+              <a16:creationId xmlns:a16="http://schemas.microsoft.com/office/drawing/2014/main" id="{62806EF4-5EC3-0BAB-A7F0-3DF98C2581FC}"/>
+            </a:ext>
+          </a:extLst>
+        </p:cNvPr>
+        <p:cNvGrpSpPr/>
+        <p:nvPr/>
+      </p:nvGrpSpPr>
+      <p:grpSpPr>
+        <a:xfrm>
+          <a:off x="0" y="0"/>
+          <a:ext cx="0" cy="0"/>
+          <a:chOff x="0" y="0"/>
+          <a:chExt cx="0" cy="0"/>
+        </a:xfrm>
+      </p:grpSpPr>
+      <p:sp>
+        <p:nvSpPr>
+          <p:cNvPr id="2" name="标题 1">
+            <a:extLst>
+              <a:ext uri="{FF2B5EF4-FFF2-40B4-BE49-F238E27FC236}">
+                <a16:creationId xmlns:a16="http://schemas.microsoft.com/office/drawing/2014/main" id="{FC1895B3-CFFA-7323-89BA-8488F0C0FC00}"/>
+              </a:ext>
+            </a:extLst>
+          </p:cNvPr>
+          <p:cNvSpPr>
+            <a:spLocks noGrp="1"/>
+          </p:cNvSpPr>
+          <p:nvPr>
+            <p:ph type="title"/>
+          </p:nvPr>
+        </p:nvSpPr>
+        <p:spPr/>
+        <p:txBody>
+          <a:bodyPr/>
+          <a:lstStyle/>
+          <a:p>
+            <a:r>
+              <a:rPr lang="zh-CN" altLang="en-US" sz="4400" dirty="0"/>
+              <a:t>教育历史变化及当下教育真相（二）</a:t>
+            </a:r>
+          </a:p>
+        </p:txBody>
+      </p:sp>
+      <p:sp>
+        <p:nvSpPr>
+          <p:cNvPr id="4" name="Rectangle 1">
+            <a:extLst>
+              <a:ext uri="{FF2B5EF4-FFF2-40B4-BE49-F238E27FC236}">
+                <a16:creationId xmlns:a16="http://schemas.microsoft.com/office/drawing/2014/main" id="{A23070BE-BDD1-9794-2508-A2DC8481B0B0}"/>
+              </a:ext>
+            </a:extLst>
+          </p:cNvPr>
+          <p:cNvSpPr>
+            <a:spLocks noGrp="1" noChangeArrowheads="1"/>
+          </p:cNvSpPr>
+          <p:nvPr>
+            <p:ph idx="1"/>
+          </p:nvPr>
+        </p:nvSpPr>
+        <p:spPr bwMode="auto">
+          <a:xfrm>
+            <a:off x="521207" y="2877221"/>
+            <a:ext cx="11337417" cy="3170099"/>
+          </a:xfrm>
+          <a:prstGeom prst="rect">
+            <a:avLst/>
+          </a:prstGeom>
+          <a:noFill/>
+          <a:ln>
+            <a:noFill/>
+          </a:ln>
+          <a:effectLst/>
+          <a:extLst>
+            <a:ext uri="{909E8E84-426E-40DD-AFC4-6F175D3DCCD1}">
+              <a14:hiddenFill xmlns:a14="http://schemas.microsoft.com/office/drawing/2010/main">
+                <a:solidFill>
+                  <a:schemeClr val="accent1"/>
+                </a:solidFill>
+              </a14:hiddenFill>
+            </a:ext>
+            <a:ext uri="{91240B29-F687-4F45-9708-019B960494DF}">
+              <a14:hiddenLine xmlns:a14="http://schemas.microsoft.com/office/drawing/2010/main" w="9525">
+                <a:solidFill>
+                  <a:schemeClr val="tx1"/>
+                </a:solidFill>
+                <a:miter lim="800000"/>
+                <a:headEnd/>
+                <a:tailEnd/>
+              </a14:hiddenLine>
+            </a:ext>
+            <a:ext uri="{AF507438-7753-43E0-B8FC-AC1667EBCBE1}">
+              <a14:hiddenEffects xmlns:a14="http://schemas.microsoft.com/office/drawing/2010/main">
+                <a:effectLst>
+                  <a:outerShdw dist="35921" dir="2700000" algn="ctr" rotWithShape="0">
+                    <a:schemeClr val="bg2"/>
+                  </a:outerShdw>
+                </a:effectLst>
+              </a14:hiddenEffects>
+            </a:ext>
+          </a:extLst>
+        </p:spPr>
+        <p:txBody>
+          <a:bodyPr vert="horz" wrap="square" lIns="91440" tIns="45720" rIns="91440" bIns="45720" numCol="1" anchor="ctr" anchorCtr="0" compatLnSpc="1">
+            <a:prstTxWarp prst="textNoShape">
+              <a:avLst/>
+            </a:prstTxWarp>
+            <a:spAutoFit/>
+          </a:bodyPr>
+          <a:lstStyle>
+            <a:lvl1pPr eaLnBrk="0" fontAlgn="base" hangingPunct="0">
+              <a:spcBef>
+                <a:spcPct val="0"/>
+              </a:spcBef>
+              <a:spcAft>
+                <a:spcPct val="0"/>
+              </a:spcAft>
+              <a:defRPr>
+                <a:solidFill>
+                  <a:schemeClr val="tx1"/>
+                </a:solidFill>
+                <a:latin typeface="Arial" panose="020B0604020202020204" pitchFamily="34" charset="0"/>
+              </a:defRPr>
+            </a:lvl1pPr>
+            <a:lvl2pPr eaLnBrk="0" fontAlgn="base" hangingPunct="0">
+              <a:spcBef>
+                <a:spcPct val="0"/>
+              </a:spcBef>
+              <a:spcAft>
+                <a:spcPct val="0"/>
+              </a:spcAft>
+              <a:defRPr>
+                <a:solidFill>
+                  <a:schemeClr val="tx1"/>
+                </a:solidFill>
+                <a:latin typeface="Arial" panose="020B0604020202020204" pitchFamily="34" charset="0"/>
+              </a:defRPr>
+            </a:lvl2pPr>
+            <a:lvl3pPr eaLnBrk="0" fontAlgn="base" hangingPunct="0">
+              <a:spcBef>
+                <a:spcPct val="0"/>
+              </a:spcBef>
+              <a:spcAft>
+                <a:spcPct val="0"/>
+              </a:spcAft>
+              <a:defRPr>
+                <a:solidFill>
+                  <a:schemeClr val="tx1"/>
+                </a:solidFill>
+                <a:latin typeface="Arial" panose="020B0604020202020204" pitchFamily="34" charset="0"/>
+              </a:defRPr>
+            </a:lvl3pPr>
+            <a:lvl4pPr eaLnBrk="0" fontAlgn="base" hangingPunct="0">
+              <a:spcBef>
+                <a:spcPct val="0"/>
+              </a:spcBef>
+              <a:spcAft>
+                <a:spcPct val="0"/>
+              </a:spcAft>
+              <a:defRPr>
+                <a:solidFill>
+                  <a:schemeClr val="tx1"/>
+                </a:solidFill>
+                <a:latin typeface="Arial" panose="020B0604020202020204" pitchFamily="34" charset="0"/>
+              </a:defRPr>
+            </a:lvl4pPr>
+            <a:lvl5pPr eaLnBrk="0" fontAlgn="base" hangingPunct="0">
+              <a:spcBef>
+                <a:spcPct val="0"/>
+              </a:spcBef>
+              <a:spcAft>
+                <a:spcPct val="0"/>
+              </a:spcAft>
+              <a:defRPr>
+                <a:solidFill>
+                  <a:schemeClr val="tx1"/>
+                </a:solidFill>
+                <a:latin typeface="Arial" panose="020B0604020202020204" pitchFamily="34" charset="0"/>
+              </a:defRPr>
+            </a:lvl5pPr>
+            <a:lvl6pPr eaLnBrk="0" fontAlgn="base" hangingPunct="0">
+              <a:spcBef>
+                <a:spcPct val="0"/>
+              </a:spcBef>
+              <a:spcAft>
+                <a:spcPct val="0"/>
+              </a:spcAft>
+              <a:defRPr>
+                <a:solidFill>
+                  <a:schemeClr val="tx1"/>
+                </a:solidFill>
+                <a:latin typeface="Arial" panose="020B0604020202020204" pitchFamily="34" charset="0"/>
+              </a:defRPr>
+            </a:lvl6pPr>
+            <a:lvl7pPr eaLnBrk="0" fontAlgn="base" hangingPunct="0">
+              <a:spcBef>
+                <a:spcPct val="0"/>
+              </a:spcBef>
+              <a:spcAft>
+                <a:spcPct val="0"/>
+              </a:spcAft>
+              <a:defRPr>
+                <a:solidFill>
+                  <a:schemeClr val="tx1"/>
+                </a:solidFill>
+                <a:latin typeface="Arial" panose="020B0604020202020204" pitchFamily="34" charset="0"/>
+              </a:defRPr>
+            </a:lvl7pPr>
+            <a:lvl8pPr eaLnBrk="0" fontAlgn="base" hangingPunct="0">
+              <a:spcBef>
+                <a:spcPct val="0"/>
+              </a:spcBef>
+              <a:spcAft>
+                <a:spcPct val="0"/>
+              </a:spcAft>
+              <a:defRPr>
+                <a:solidFill>
+                  <a:schemeClr val="tx1"/>
+                </a:solidFill>
+                <a:latin typeface="Arial" panose="020B0604020202020204" pitchFamily="34" charset="0"/>
+              </a:defRPr>
+            </a:lvl8pPr>
+            <a:lvl9pPr eaLnBrk="0" fontAlgn="base" hangingPunct="0">
+              <a:spcBef>
+                <a:spcPct val="0"/>
+              </a:spcBef>
+              <a:spcAft>
+                <a:spcPct val="0"/>
+              </a:spcAft>
+              <a:defRPr>
+                <a:solidFill>
+                  <a:schemeClr val="tx1"/>
+                </a:solidFill>
+                <a:latin typeface="Arial" panose="020B0604020202020204" pitchFamily="34" charset="0"/>
+              </a:defRPr>
+            </a:lvl9pPr>
+          </a:lstStyle>
+          <a:p>
+            <a:pPr marL="0" marR="0" lvl="0" indent="0" algn="l" defTabSz="914400" rtl="0" eaLnBrk="0" fontAlgn="base" latinLnBrk="0" hangingPunct="0">
+              <a:lnSpc>
+                <a:spcPct val="100000"/>
+              </a:lnSpc>
+              <a:spcBef>
+                <a:spcPct val="0"/>
+              </a:spcBef>
+              <a:spcAft>
+                <a:spcPct val="0"/>
+              </a:spcAft>
+              <a:buClrTx/>
+              <a:buSzTx/>
+              <a:buFontTx/>
+              <a:buNone/>
+              <a:tabLst/>
+            </a:pPr>
+            <a:r>
+              <a:rPr kumimoji="0" lang="zh-CN" altLang="zh-CN" b="0" i="0" u="none" strike="noStrike" cap="none" normalizeH="0" baseline="0" dirty="0">
+                <a:ln>
+                  <a:noFill/>
+                </a:ln>
+                <a:solidFill>
+                  <a:srgbClr val="333333"/>
+                </a:solidFill>
+                <a:effectLst/>
+                <a:latin typeface="+mn-ea"/>
+                <a:cs typeface="Open Sans" panose="020B0606030504020204" pitchFamily="34" charset="0"/>
+              </a:rPr>
+              <a:t>我们说，什么是精神疾病？怎么算精神病？</a:t>
+            </a:r>
+            <a:endParaRPr kumimoji="0" lang="zh-CN" altLang="zh-CN" b="0" i="0" u="none" strike="noStrike" cap="none" normalizeH="0" baseline="0" dirty="0">
+              <a:ln>
+                <a:noFill/>
+              </a:ln>
+              <a:solidFill>
+                <a:schemeClr val="tx1"/>
+              </a:solidFill>
+              <a:effectLst/>
+              <a:latin typeface="+mn-ea"/>
+            </a:endParaRPr>
+          </a:p>
+          <a:p>
+            <a:pPr marL="0" marR="0" lvl="0" indent="0" algn="l" defTabSz="914400" rtl="0" eaLnBrk="0" fontAlgn="base" latinLnBrk="0" hangingPunct="0">
+              <a:lnSpc>
+                <a:spcPct val="100000"/>
+              </a:lnSpc>
+              <a:spcBef>
+                <a:spcPct val="0"/>
+              </a:spcBef>
+              <a:spcAft>
+                <a:spcPct val="0"/>
+              </a:spcAft>
+              <a:buClrTx/>
+              <a:buSzTx/>
+              <a:buFontTx/>
+              <a:buNone/>
+              <a:tabLst/>
+            </a:pPr>
+            <a:r>
+              <a:rPr kumimoji="0" lang="zh-CN" altLang="zh-CN" b="0" i="0" u="none" strike="noStrike" cap="none" normalizeH="0" baseline="0" dirty="0">
+                <a:ln>
+                  <a:noFill/>
+                </a:ln>
+                <a:solidFill>
+                  <a:srgbClr val="333333"/>
+                </a:solidFill>
+                <a:effectLst/>
+                <a:latin typeface="+mn-ea"/>
+                <a:cs typeface="Open Sans" panose="020B0606030504020204" pitchFamily="34" charset="0"/>
+              </a:rPr>
+              <a:t>其实很简单，就是不符合我们人类社会正常行为之外的异常行为举止。比如，吃垃圾。</a:t>
+            </a:r>
+            <a:endParaRPr kumimoji="0" lang="zh-CN" altLang="zh-CN" b="0" i="0" u="none" strike="noStrike" cap="none" normalizeH="0" baseline="0" dirty="0">
+              <a:ln>
+                <a:noFill/>
+              </a:ln>
+              <a:solidFill>
+                <a:schemeClr val="tx1"/>
+              </a:solidFill>
+              <a:effectLst/>
+              <a:latin typeface="+mn-ea"/>
+            </a:endParaRPr>
+          </a:p>
+          <a:p>
+            <a:pPr marL="0" marR="0" lvl="0" indent="0" algn="l" defTabSz="914400" rtl="0" eaLnBrk="0" fontAlgn="base" latinLnBrk="0" hangingPunct="0">
+              <a:lnSpc>
+                <a:spcPct val="100000"/>
+              </a:lnSpc>
+              <a:spcBef>
+                <a:spcPct val="0"/>
+              </a:spcBef>
+              <a:spcAft>
+                <a:spcPct val="0"/>
+              </a:spcAft>
+              <a:buClrTx/>
+              <a:buSzTx/>
+              <a:buFontTx/>
+              <a:buNone/>
+              <a:tabLst/>
+            </a:pPr>
+            <a:r>
+              <a:rPr kumimoji="0" lang="zh-CN" altLang="zh-CN" b="0" i="0" u="none" strike="noStrike" cap="none" normalizeH="0" baseline="0" dirty="0">
+                <a:ln>
+                  <a:noFill/>
+                </a:ln>
+                <a:solidFill>
+                  <a:srgbClr val="333333"/>
+                </a:solidFill>
+                <a:effectLst/>
+                <a:latin typeface="+mn-ea"/>
+                <a:cs typeface="Open Sans" panose="020B0606030504020204" pitchFamily="34" charset="0"/>
+              </a:rPr>
+              <a:t>但是谁规定垃圾不能吃？</a:t>
+            </a:r>
+            <a:endParaRPr kumimoji="0" lang="zh-CN" altLang="zh-CN" b="0" i="0" u="none" strike="noStrike" cap="none" normalizeH="0" baseline="0" dirty="0">
+              <a:ln>
+                <a:noFill/>
+              </a:ln>
+              <a:solidFill>
+                <a:schemeClr val="tx1"/>
+              </a:solidFill>
+              <a:effectLst/>
+              <a:latin typeface="+mn-ea"/>
+            </a:endParaRPr>
+          </a:p>
+          <a:p>
+            <a:pPr marL="0" marR="0" lvl="0" indent="0" algn="l" defTabSz="914400" rtl="0" eaLnBrk="0" fontAlgn="base" latinLnBrk="0" hangingPunct="0">
+              <a:lnSpc>
+                <a:spcPct val="100000"/>
+              </a:lnSpc>
+              <a:spcBef>
+                <a:spcPct val="0"/>
+              </a:spcBef>
+              <a:spcAft>
+                <a:spcPct val="0"/>
+              </a:spcAft>
+              <a:buClrTx/>
+              <a:buSzTx/>
+              <a:buFontTx/>
+              <a:buNone/>
+              <a:tabLst/>
+            </a:pPr>
+            <a:r>
+              <a:rPr kumimoji="0" lang="zh-CN" altLang="zh-CN" b="0" i="0" u="none" strike="noStrike" cap="none" normalizeH="0" baseline="0" dirty="0">
+                <a:ln>
+                  <a:noFill/>
+                </a:ln>
+                <a:solidFill>
+                  <a:srgbClr val="333333"/>
+                </a:solidFill>
+                <a:effectLst/>
+                <a:latin typeface="+mn-ea"/>
+                <a:cs typeface="Open Sans" panose="020B0606030504020204" pitchFamily="34" charset="0"/>
+              </a:rPr>
+              <a:t>你见过哪个动物东西掉地上它就不吃了？</a:t>
+            </a:r>
+            <a:endParaRPr kumimoji="0" lang="zh-CN" altLang="zh-CN" b="0" i="0" u="none" strike="noStrike" cap="none" normalizeH="0" baseline="0" dirty="0">
+              <a:ln>
+                <a:noFill/>
+              </a:ln>
+              <a:solidFill>
+                <a:schemeClr val="tx1"/>
+              </a:solidFill>
+              <a:effectLst/>
+              <a:latin typeface="+mn-ea"/>
+            </a:endParaRPr>
+          </a:p>
+          <a:p>
+            <a:pPr marL="0" marR="0" lvl="0" indent="0" algn="l" defTabSz="914400" rtl="0" eaLnBrk="0" fontAlgn="base" latinLnBrk="0" hangingPunct="0">
+              <a:lnSpc>
+                <a:spcPct val="100000"/>
+              </a:lnSpc>
+              <a:spcBef>
+                <a:spcPct val="0"/>
+              </a:spcBef>
+              <a:spcAft>
+                <a:spcPct val="0"/>
+              </a:spcAft>
+              <a:buClrTx/>
+              <a:buSzTx/>
+              <a:buFontTx/>
+              <a:buNone/>
+              <a:tabLst/>
+            </a:pPr>
+            <a:r>
+              <a:rPr kumimoji="0" lang="zh-CN" altLang="zh-CN" b="0" i="0" u="none" strike="noStrike" cap="none" normalizeH="0" baseline="0" dirty="0">
+                <a:ln>
+                  <a:noFill/>
+                </a:ln>
+                <a:solidFill>
+                  <a:srgbClr val="333333"/>
+                </a:solidFill>
+                <a:effectLst/>
+                <a:latin typeface="+mn-ea"/>
+                <a:cs typeface="Open Sans" panose="020B0606030504020204" pitchFamily="34" charset="0"/>
+              </a:rPr>
+              <a:t>所以，孩子坐在教室里不让动，是不是很奇怪的一件事呢？</a:t>
+            </a:r>
+            <a:endParaRPr kumimoji="0" lang="zh-CN" altLang="zh-CN" b="0" i="0" u="none" strike="noStrike" cap="none" normalizeH="0" baseline="0" dirty="0">
+              <a:ln>
+                <a:noFill/>
+              </a:ln>
+              <a:solidFill>
+                <a:schemeClr val="tx1"/>
+              </a:solidFill>
+              <a:effectLst/>
+              <a:latin typeface="+mn-ea"/>
+            </a:endParaRPr>
+          </a:p>
+          <a:p>
+            <a:pPr marL="0" marR="0" lvl="0" indent="0" algn="l" defTabSz="914400" rtl="0" eaLnBrk="0" fontAlgn="base" latinLnBrk="0" hangingPunct="0">
+              <a:lnSpc>
+                <a:spcPct val="100000"/>
+              </a:lnSpc>
+              <a:spcBef>
+                <a:spcPct val="0"/>
+              </a:spcBef>
+              <a:spcAft>
+                <a:spcPct val="0"/>
+              </a:spcAft>
+              <a:buClrTx/>
+              <a:buSzTx/>
+              <a:buFontTx/>
+              <a:buNone/>
+              <a:tabLst/>
+            </a:pPr>
+            <a:r>
+              <a:rPr kumimoji="0" lang="zh-CN" altLang="zh-CN" b="0" i="0" u="none" strike="noStrike" cap="none" normalizeH="0" baseline="0" dirty="0">
+                <a:ln>
+                  <a:noFill/>
+                </a:ln>
+                <a:solidFill>
+                  <a:srgbClr val="333333"/>
+                </a:solidFill>
+                <a:effectLst/>
+                <a:latin typeface="+mn-ea"/>
+                <a:cs typeface="Open Sans" panose="020B0606030504020204" pitchFamily="34" charset="0"/>
+              </a:rPr>
+              <a:t>怎么就不让动呢，明明是活泼好动的孩子，不是吗？</a:t>
+            </a:r>
+            <a:endParaRPr kumimoji="0" lang="zh-CN" altLang="zh-CN" b="0" i="0" u="none" strike="noStrike" cap="none" normalizeH="0" baseline="0" dirty="0">
+              <a:ln>
+                <a:noFill/>
+              </a:ln>
+              <a:solidFill>
+                <a:schemeClr val="tx1"/>
+              </a:solidFill>
+              <a:effectLst/>
+              <a:latin typeface="+mn-ea"/>
+            </a:endParaRPr>
+          </a:p>
+          <a:p>
+            <a:pPr marL="0" marR="0" lvl="0" indent="0" algn="l" defTabSz="914400" rtl="0" eaLnBrk="0" fontAlgn="base" latinLnBrk="0" hangingPunct="0">
+              <a:lnSpc>
+                <a:spcPct val="100000"/>
+              </a:lnSpc>
+              <a:spcBef>
+                <a:spcPct val="0"/>
+              </a:spcBef>
+              <a:spcAft>
+                <a:spcPct val="0"/>
+              </a:spcAft>
+              <a:buClrTx/>
+              <a:buSzTx/>
+              <a:buFontTx/>
+              <a:buNone/>
+              <a:tabLst/>
+            </a:pPr>
+            <a:r>
+              <a:rPr kumimoji="0" lang="zh-CN" altLang="zh-CN" b="0" i="0" u="none" strike="noStrike" cap="none" normalizeH="0" baseline="0" dirty="0">
+                <a:ln>
+                  <a:noFill/>
+                </a:ln>
+                <a:solidFill>
+                  <a:srgbClr val="333333"/>
+                </a:solidFill>
+                <a:effectLst/>
+                <a:latin typeface="+mn-ea"/>
+                <a:cs typeface="Open Sans" panose="020B0606030504020204" pitchFamily="34" charset="0"/>
+              </a:rPr>
+              <a:t>但是孩子们好动，甚至违反课堂纪律，就会被认为是一种与我们社会规则相反的行为。</a:t>
+            </a:r>
+            <a:endParaRPr kumimoji="0" lang="zh-CN" altLang="zh-CN" b="0" i="0" u="none" strike="noStrike" cap="none" normalizeH="0" baseline="0" dirty="0">
+              <a:ln>
+                <a:noFill/>
+              </a:ln>
+              <a:solidFill>
+                <a:schemeClr val="tx1"/>
+              </a:solidFill>
+              <a:effectLst/>
+              <a:latin typeface="+mn-ea"/>
+            </a:endParaRPr>
+          </a:p>
+          <a:p>
+            <a:pPr marL="0" marR="0" lvl="0" indent="0" algn="l" defTabSz="914400" rtl="0" eaLnBrk="0" fontAlgn="base" latinLnBrk="0" hangingPunct="0">
+              <a:lnSpc>
+                <a:spcPct val="100000"/>
+              </a:lnSpc>
+              <a:spcBef>
+                <a:spcPct val="0"/>
+              </a:spcBef>
+              <a:spcAft>
+                <a:spcPct val="0"/>
+              </a:spcAft>
+              <a:buClrTx/>
+              <a:buSzTx/>
+              <a:buFontTx/>
+              <a:buNone/>
+              <a:tabLst/>
+            </a:pPr>
+            <a:r>
+              <a:rPr kumimoji="0" lang="zh-CN" altLang="zh-CN" b="0" i="0" u="none" strike="noStrike" cap="none" normalizeH="0" baseline="0" dirty="0">
+                <a:ln>
+                  <a:noFill/>
+                </a:ln>
+                <a:solidFill>
+                  <a:srgbClr val="333333"/>
+                </a:solidFill>
+                <a:effectLst/>
+                <a:latin typeface="+mn-ea"/>
+                <a:cs typeface="Open Sans" panose="020B0606030504020204" pitchFamily="34" charset="0"/>
+              </a:rPr>
+              <a:t>所以，你看，到底谁才是有精神疾病呢？</a:t>
+            </a:r>
+            <a:endParaRPr kumimoji="0" lang="zh-CN" altLang="zh-CN" b="0" i="0" u="none" strike="noStrike" cap="none" normalizeH="0" baseline="0" dirty="0">
+              <a:ln>
+                <a:noFill/>
+              </a:ln>
+              <a:solidFill>
+                <a:schemeClr val="tx1"/>
+              </a:solidFill>
+              <a:effectLst/>
+              <a:latin typeface="+mn-ea"/>
+            </a:endParaRPr>
+          </a:p>
+          <a:p>
+            <a:pPr marL="0" marR="0" lvl="0" indent="0" algn="l" defTabSz="914400" rtl="0" eaLnBrk="0" fontAlgn="base" latinLnBrk="0" hangingPunct="0">
+              <a:lnSpc>
+                <a:spcPct val="100000"/>
+              </a:lnSpc>
+              <a:spcBef>
+                <a:spcPct val="0"/>
+              </a:spcBef>
+              <a:spcAft>
+                <a:spcPct val="0"/>
+              </a:spcAft>
+              <a:buClrTx/>
+              <a:buSzTx/>
+              <a:buFontTx/>
+              <a:buNone/>
+              <a:tabLst/>
+            </a:pPr>
+            <a:r>
+              <a:rPr kumimoji="0" lang="zh-CN" altLang="zh-CN" b="0" i="0" u="none" strike="noStrike" cap="none" normalizeH="0" baseline="0" dirty="0">
+                <a:ln>
+                  <a:noFill/>
+                </a:ln>
+                <a:solidFill>
+                  <a:srgbClr val="333333"/>
+                </a:solidFill>
+                <a:effectLst/>
+                <a:latin typeface="+mn-ea"/>
+                <a:cs typeface="Open Sans" panose="020B0606030504020204" pitchFamily="34" charset="0"/>
+              </a:rPr>
+              <a:t>其实我们每个人，都是被社会规则驯化的，被阉割过的。</a:t>
+            </a:r>
+            <a:endParaRPr kumimoji="0" lang="zh-CN" altLang="zh-CN" b="0" i="0" u="none" strike="noStrike" cap="none" normalizeH="0" baseline="0" dirty="0">
+              <a:ln>
+                <a:noFill/>
+              </a:ln>
+              <a:solidFill>
+                <a:schemeClr val="tx1"/>
+              </a:solidFill>
+              <a:effectLst/>
+              <a:latin typeface="+mn-ea"/>
+            </a:endParaRPr>
+          </a:p>
+          <a:p>
+            <a:pPr marL="0" marR="0" lvl="0" indent="0" algn="l" defTabSz="914400" rtl="0" eaLnBrk="0" fontAlgn="base" latinLnBrk="0" hangingPunct="0">
+              <a:lnSpc>
+                <a:spcPct val="100000"/>
+              </a:lnSpc>
+              <a:spcBef>
+                <a:spcPct val="0"/>
+              </a:spcBef>
+              <a:spcAft>
+                <a:spcPct val="0"/>
+              </a:spcAft>
+              <a:buClrTx/>
+              <a:buSzTx/>
+              <a:buFontTx/>
+              <a:buNone/>
+              <a:tabLst/>
+            </a:pPr>
+            <a:r>
+              <a:rPr kumimoji="0" lang="zh-CN" altLang="zh-CN" b="0" i="0" u="none" strike="noStrike" cap="none" normalizeH="0" baseline="0" dirty="0">
+                <a:ln>
+                  <a:noFill/>
+                </a:ln>
+                <a:solidFill>
+                  <a:srgbClr val="333333"/>
+                </a:solidFill>
+                <a:effectLst/>
+                <a:latin typeface="+mn-ea"/>
+                <a:cs typeface="Open Sans" panose="020B0606030504020204" pitchFamily="34" charset="0"/>
+              </a:rPr>
+              <a:t>从某种角度上讲，我们才是精神病，孩子们反而不是精神病。</a:t>
+            </a:r>
+            <a:endParaRPr kumimoji="0" lang="zh-CN" altLang="zh-CN" b="0" i="0" u="none" strike="noStrike" cap="none" normalizeH="0" baseline="0" dirty="0">
+              <a:ln>
+                <a:noFill/>
+              </a:ln>
+              <a:solidFill>
+                <a:schemeClr val="tx1"/>
+              </a:solidFill>
+              <a:effectLst/>
+              <a:latin typeface="+mn-ea"/>
+            </a:endParaRPr>
+          </a:p>
+        </p:txBody>
+      </p:sp>
+    </p:spTree>
+    <p:extLst>
+      <p:ext uri="{BB962C8B-B14F-4D97-AF65-F5344CB8AC3E}">
+        <p14:creationId xmlns:p14="http://schemas.microsoft.com/office/powerpoint/2010/main" val="2904008522"/>
+      </p:ext>
+    </p:extLst>
+  </p:cSld>
+  <p:clrMapOvr>
+    <a:masterClrMapping/>
+  </p:clrMapOvr>
+</p:sld>
+</file>
+
+<file path=ppt/slides/slide8.xml><?xml version="1.0" encoding="utf-8"?>
+<p:sld xmlns:a="http://schemas.openxmlformats.org/drawingml/2006/main" xmlns:r="http://schemas.openxmlformats.org/officeDocument/2006/relationships" xmlns:p="http://schemas.openxmlformats.org/presentationml/2006/main">
+  <p:cSld>
+    <p:spTree>
+      <p:nvGrpSpPr>
         <p:cNvPr id="1" name=""/>
         <p:cNvGrpSpPr/>
         <p:nvPr/>
@@ -8870,8 +10541,8 @@
           <a:lstStyle/>
           <a:p>
             <a:r>
-              <a:rPr lang="zh-CN" altLang="en-US" dirty="0"/>
-              <a:t>教育历史变化及当下教育真相</a:t>
+              <a:rPr lang="zh-CN" altLang="en-US" sz="4400" dirty="0"/>
+              <a:t>教育历史变化及当下教育真相（三）</a:t>
             </a:r>
           </a:p>
         </p:txBody>
@@ -8892,7 +10563,12 @@
             <p:ph idx="1"/>
           </p:nvPr>
         </p:nvSpPr>
-        <p:spPr/>
+        <p:spPr>
+          <a:xfrm>
+            <a:off x="521208" y="1985963"/>
+            <a:ext cx="11155680" cy="4572000"/>
+          </a:xfrm>
+        </p:spPr>
         <p:txBody>
           <a:bodyPr/>
           <a:lstStyle/>
@@ -8999,7 +10675,7 @@
 </p:sld>
 </file>
 
-<file path=ppt/slides/slide7.xml><?xml version="1.0" encoding="utf-8"?>
+<file path=ppt/slides/slide9.xml><?xml version="1.0" encoding="utf-8"?>
 <p:sld xmlns:a="http://schemas.openxmlformats.org/drawingml/2006/main" xmlns:r="http://schemas.openxmlformats.org/officeDocument/2006/relationships" xmlns:p="http://schemas.openxmlformats.org/presentationml/2006/main">
   <p:cSld>
     <p:spTree>
@@ -9044,8 +10720,8 @@
           <a:lstStyle/>
           <a:p>
             <a:r>
-              <a:rPr lang="zh-CN" altLang="en-US" dirty="0"/>
-              <a:t>教育历史变化及当下教育真相</a:t>
+              <a:rPr lang="zh-CN" altLang="en-US" sz="4400" dirty="0"/>
+              <a:t>教育历史变化及当下教育真相（四）</a:t>
             </a:r>
           </a:p>
         </p:txBody>
@@ -9066,7 +10742,12 @@
             <p:ph idx="1"/>
           </p:nvPr>
         </p:nvSpPr>
-        <p:spPr/>
+        <p:spPr>
+          <a:xfrm>
+            <a:off x="521208" y="1714500"/>
+            <a:ext cx="11155680" cy="5143499"/>
+          </a:xfrm>
+        </p:spPr>
         <p:txBody>
           <a:bodyPr/>
           <a:lstStyle/>
@@ -9075,7 +10756,7 @@
               <a:buNone/>
             </a:pPr>
             <a:r>
-              <a:rPr lang="zh-CN" altLang="en-US" dirty="0"/>
+              <a:rPr lang="zh-CN" altLang="en-US" sz="1800" dirty="0"/>
               <a:t>好，我们怎么学呢？</a:t>
             </a:r>
           </a:p>
@@ -9084,34 +10765,16 @@
               <a:buNone/>
             </a:pPr>
             <a:r>
-              <a:rPr lang="zh-CN" altLang="en-US" dirty="0"/>
-              <a:t>当时世界上至少有两种教育理念。</a:t>
-            </a:r>
-          </a:p>
-          <a:p>
-            <a:pPr marL="0" indent="0">
-              <a:buNone/>
-            </a:pPr>
-            <a:r>
-              <a:rPr lang="zh-CN" altLang="en-US" dirty="0"/>
-              <a:t>一个是前苏联社会学家维果斯基提出的“最近发展区”理论。</a:t>
-            </a:r>
-          </a:p>
-          <a:p>
-            <a:pPr marL="0" indent="0">
-              <a:buNone/>
-            </a:pPr>
-            <a:r>
-              <a:rPr lang="zh-CN" altLang="en-US" dirty="0"/>
-              <a:t>另一个是西方提出的“自然成熟说”。</a:t>
-            </a:r>
-          </a:p>
-          <a:p>
-            <a:pPr marL="0" indent="0">
-              <a:buNone/>
-            </a:pPr>
-            <a:r>
-              <a:rPr lang="zh-CN" altLang="en-US" dirty="0"/>
+              <a:rPr lang="zh-CN" altLang="en-US" sz="1800" dirty="0"/>
+              <a:t>当时世界上至少有两种教育理念。一个是前苏联社会学家维果斯基提出的“最近发展区”理论。另一个是西方提出的“自然成熟说”。</a:t>
+            </a:r>
+          </a:p>
+          <a:p>
+            <a:pPr marL="0" indent="0">
+              <a:buNone/>
+            </a:pPr>
+            <a:r>
+              <a:rPr lang="zh-CN" altLang="en-US" sz="1800" dirty="0"/>
               <a:t>“最近发展区”是什么意思呢？</a:t>
             </a:r>
           </a:p>
@@ -9120,7 +10783,7 @@
               <a:buNone/>
             </a:pPr>
             <a:r>
-              <a:rPr lang="zh-CN" altLang="en-US" dirty="0"/>
+              <a:rPr lang="zh-CN" altLang="en-US" sz="1800" dirty="0"/>
               <a:t>其实简单地讲，就是在儿童通常某个年龄情况下，将正常的学习难度提高一点。</a:t>
             </a:r>
           </a:p>
@@ -9129,49 +10792,40 @@
               <a:buNone/>
             </a:pPr>
             <a:r>
-              <a:rPr lang="zh-CN" altLang="en-US" dirty="0"/>
+              <a:rPr lang="zh-CN" altLang="en-US" sz="1800" dirty="0"/>
               <a:t>比如说，一个孩子</a:t>
             </a:r>
             <a:r>
-              <a:rPr lang="en-US" altLang="zh-CN" dirty="0"/>
+              <a:rPr lang="en-US" altLang="zh-CN" sz="1800" dirty="0"/>
               <a:t>7</a:t>
             </a:r>
             <a:r>
-              <a:rPr lang="zh-CN" altLang="en-US" dirty="0"/>
+              <a:rPr lang="zh-CN" altLang="en-US" sz="1800" dirty="0"/>
               <a:t>岁，他应该会</a:t>
             </a:r>
             <a:r>
-              <a:rPr lang="en-US" altLang="zh-CN" dirty="0"/>
+              <a:rPr lang="en-US" altLang="zh-CN" sz="1800" dirty="0"/>
               <a:t>10</a:t>
             </a:r>
             <a:r>
-              <a:rPr lang="zh-CN" altLang="en-US" dirty="0"/>
+              <a:rPr lang="zh-CN" altLang="en-US" sz="1800" dirty="0"/>
               <a:t>以内的加减法，那么就将学习难度提高到，让他去学</a:t>
             </a:r>
             <a:r>
-              <a:rPr lang="en-US" altLang="zh-CN" dirty="0"/>
+              <a:rPr lang="en-US" altLang="zh-CN" sz="1800" dirty="0"/>
               <a:t>20</a:t>
             </a:r>
             <a:r>
-              <a:rPr lang="zh-CN" altLang="en-US" dirty="0"/>
-              <a:t>以内的加减法。</a:t>
-            </a:r>
-          </a:p>
-          <a:p>
-            <a:pPr marL="0" indent="0">
-              <a:buNone/>
-            </a:pPr>
-            <a:r>
-              <a:rPr lang="zh-CN" altLang="en-US" dirty="0"/>
-              <a:t>这样提高一些难度的教育方法，有它一定的好处，从某种角度上讲，可以提高孩子学习的积极性。</a:t>
-            </a:r>
-          </a:p>
-          <a:p>
-            <a:pPr marL="0" indent="0">
-              <a:buNone/>
-            </a:pPr>
-            <a:r>
-              <a:rPr lang="zh-CN" altLang="en-US" dirty="0"/>
+              <a:rPr lang="zh-CN" altLang="en-US" sz="1800" dirty="0"/>
+              <a:t>以内的加减法。这样提高一些难度的教育方法，有它一定的好处，从某种角度上讲，可以提高孩子学习的积极性。</a:t>
+            </a:r>
+          </a:p>
+          <a:p>
+            <a:pPr marL="0" indent="0">
+              <a:buNone/>
+            </a:pPr>
+            <a:r>
+              <a:rPr lang="zh-CN" altLang="en-US" sz="1800" dirty="0"/>
               <a:t>人总是喜欢挑战一些适当难度的问题，对不对？</a:t>
             </a:r>
           </a:p>
@@ -9180,7 +10834,7 @@
               <a:buNone/>
             </a:pPr>
             <a:r>
-              <a:rPr lang="zh-CN" altLang="en-US" dirty="0"/>
+              <a:rPr lang="zh-CN" altLang="en-US" sz="1800" dirty="0"/>
               <a:t>我们国家就是采用的这个学说。</a:t>
             </a:r>
           </a:p>
@@ -9189,7 +10843,7 @@
               <a:buNone/>
             </a:pPr>
             <a:r>
-              <a:rPr lang="zh-CN" altLang="en-US" dirty="0"/>
+              <a:rPr lang="zh-CN" altLang="en-US" sz="1800" dirty="0"/>
               <a:t>至于另一个西方的“自然成熟说”理论，也有其道理，他们认为要让孩子的大脑成熟到一定程度，才适合学习相应难度的东西。</a:t>
             </a:r>
           </a:p>
@@ -9199,435 +10853,6 @@
     <p:extLst>
       <p:ext uri="{BB962C8B-B14F-4D97-AF65-F5344CB8AC3E}">
         <p14:creationId xmlns:p14="http://schemas.microsoft.com/office/powerpoint/2010/main" val="1165828013"/>
-      </p:ext>
-    </p:extLst>
-  </p:cSld>
-  <p:clrMapOvr>
-    <a:masterClrMapping/>
-  </p:clrMapOvr>
-</p:sld>
-</file>
-
-<file path=ppt/slides/slide8.xml><?xml version="1.0" encoding="utf-8"?>
-<p:sld xmlns:a="http://schemas.openxmlformats.org/drawingml/2006/main" xmlns:r="http://schemas.openxmlformats.org/officeDocument/2006/relationships" xmlns:p="http://schemas.openxmlformats.org/presentationml/2006/main">
-  <p:cSld>
-    <p:spTree>
-      <p:nvGrpSpPr>
-        <p:cNvPr id="1" name="">
-          <a:extLst>
-            <a:ext uri="{FF2B5EF4-FFF2-40B4-BE49-F238E27FC236}">
-              <a16:creationId xmlns:a16="http://schemas.microsoft.com/office/drawing/2014/main" id="{3032A584-2B92-7ABF-B79F-F210BB8CD9BE}"/>
-            </a:ext>
-          </a:extLst>
-        </p:cNvPr>
-        <p:cNvGrpSpPr/>
-        <p:nvPr/>
-      </p:nvGrpSpPr>
-      <p:grpSpPr>
-        <a:xfrm>
-          <a:off x="0" y="0"/>
-          <a:ext cx="0" cy="0"/>
-          <a:chOff x="0" y="0"/>
-          <a:chExt cx="0" cy="0"/>
-        </a:xfrm>
-      </p:grpSpPr>
-      <p:sp>
-        <p:nvSpPr>
-          <p:cNvPr id="2" name="标题 1">
-            <a:extLst>
-              <a:ext uri="{FF2B5EF4-FFF2-40B4-BE49-F238E27FC236}">
-                <a16:creationId xmlns:a16="http://schemas.microsoft.com/office/drawing/2014/main" id="{6C2CA7BE-D398-D7F6-98A7-4A128F4ECE9C}"/>
-              </a:ext>
-            </a:extLst>
-          </p:cNvPr>
-          <p:cNvSpPr>
-            <a:spLocks noGrp="1"/>
-          </p:cNvSpPr>
-          <p:nvPr>
-            <p:ph type="title"/>
-          </p:nvPr>
-        </p:nvSpPr>
-        <p:spPr/>
-        <p:txBody>
-          <a:bodyPr/>
-          <a:lstStyle/>
-          <a:p>
-            <a:r>
-              <a:rPr lang="zh-CN" altLang="en-US" dirty="0"/>
-              <a:t>教育历史变化及当下教育真相</a:t>
-            </a:r>
-          </a:p>
-        </p:txBody>
-      </p:sp>
-      <p:sp>
-        <p:nvSpPr>
-          <p:cNvPr id="3" name="内容占位符 2">
-            <a:extLst>
-              <a:ext uri="{FF2B5EF4-FFF2-40B4-BE49-F238E27FC236}">
-                <a16:creationId xmlns:a16="http://schemas.microsoft.com/office/drawing/2014/main" id="{523C810A-8008-AED6-6082-9A74846E0EE5}"/>
-              </a:ext>
-            </a:extLst>
-          </p:cNvPr>
-          <p:cNvSpPr>
-            <a:spLocks noGrp="1"/>
-          </p:cNvSpPr>
-          <p:nvPr>
-            <p:ph idx="1"/>
-          </p:nvPr>
-        </p:nvSpPr>
-        <p:spPr/>
-        <p:txBody>
-          <a:bodyPr/>
-          <a:lstStyle/>
-          <a:p>
-            <a:pPr marL="0" indent="0">
-              <a:buNone/>
-            </a:pPr>
-            <a:r>
-              <a:rPr lang="zh-CN" altLang="en-US" dirty="0"/>
-              <a:t>这两种理论无关谁对谁错，关键要看你怎么用。</a:t>
-            </a:r>
-          </a:p>
-          <a:p>
-            <a:pPr marL="0" indent="0">
-              <a:buNone/>
-            </a:pPr>
-            <a:r>
-              <a:rPr lang="zh-CN" altLang="en-US" dirty="0"/>
-              <a:t>因为前者是建立在群体集体的角度去看问题的，而后者是个体角度。</a:t>
-            </a:r>
-          </a:p>
-          <a:p>
-            <a:pPr marL="0" indent="0">
-              <a:buNone/>
-            </a:pPr>
-            <a:r>
-              <a:rPr lang="zh-CN" altLang="en-US" dirty="0"/>
-              <a:t>我们国家就是采用前者的教育理念。</a:t>
-            </a:r>
-          </a:p>
-          <a:p>
-            <a:pPr marL="0" indent="0">
-              <a:buNone/>
-            </a:pPr>
-            <a:r>
-              <a:rPr lang="zh-CN" altLang="en-US" dirty="0"/>
-              <a:t>所以大家就应该明白，为什么所有的小朋友都要学习一样的东西，而且难度大家都一样。</a:t>
-            </a:r>
-          </a:p>
-          <a:p>
-            <a:pPr marL="0" indent="0">
-              <a:buNone/>
-            </a:pPr>
-            <a:r>
-              <a:rPr lang="zh-CN" altLang="en-US" dirty="0"/>
-              <a:t>如果谁没跟上，那么只能说某个个体成长得慢了一些。</a:t>
-            </a:r>
-            <a:endParaRPr lang="en-US" altLang="zh-CN" dirty="0"/>
-          </a:p>
-          <a:p>
-            <a:pPr marL="0" indent="0">
-              <a:buNone/>
-            </a:pPr>
-            <a:endParaRPr lang="zh-CN" altLang="en-US" dirty="0"/>
-          </a:p>
-          <a:p>
-            <a:pPr marL="0" indent="0">
-              <a:buNone/>
-            </a:pPr>
-            <a:r>
-              <a:rPr lang="zh-CN" altLang="en-US" dirty="0"/>
-              <a:t>不过这是以前，最初我们的中小学教育还算可以。</a:t>
-            </a:r>
-          </a:p>
-          <a:p>
-            <a:pPr marL="0" indent="0">
-              <a:buNone/>
-            </a:pPr>
-            <a:r>
-              <a:rPr lang="zh-CN" altLang="en-US" dirty="0"/>
-              <a:t>大家都是那个时候过来的，应该有所体会。</a:t>
-            </a:r>
-          </a:p>
-          <a:p>
-            <a:pPr marL="0" indent="0">
-              <a:buNone/>
-            </a:pPr>
-            <a:r>
-              <a:rPr lang="zh-CN" altLang="en-US" dirty="0"/>
-              <a:t>但是现在问题起了变化。</a:t>
-            </a:r>
-          </a:p>
-          <a:p>
-            <a:pPr marL="0" indent="0">
-              <a:buNone/>
-            </a:pPr>
-            <a:r>
-              <a:rPr lang="zh-CN" altLang="en-US" dirty="0"/>
-              <a:t>每年的中小学课程难度增加得很多，大部分孩子已经不适合学习了，变得自信也被打击。</a:t>
-            </a:r>
-          </a:p>
-          <a:p>
-            <a:pPr marL="0" indent="0">
-              <a:buNone/>
-            </a:pPr>
-            <a:r>
-              <a:rPr lang="zh-CN" altLang="en-US" dirty="0"/>
-              <a:t>为什么会这样呢？</a:t>
-            </a:r>
-          </a:p>
-          <a:p>
-            <a:pPr marL="0" indent="0">
-              <a:buNone/>
-            </a:pPr>
-            <a:r>
-              <a:rPr lang="zh-CN" altLang="en-US" dirty="0"/>
-              <a:t>为什么会大幅增加难度呢？</a:t>
-            </a:r>
-          </a:p>
-          <a:p>
-            <a:pPr marL="0" indent="0">
-              <a:buNone/>
-            </a:pPr>
-            <a:r>
-              <a:rPr lang="zh-CN" altLang="en-US" dirty="0"/>
-              <a:t>大家都学好不行吗？</a:t>
-            </a:r>
-          </a:p>
-          <a:p>
-            <a:pPr marL="0" indent="0">
-              <a:buNone/>
-            </a:pPr>
-            <a:r>
-              <a:rPr lang="zh-CN" altLang="en-US" dirty="0"/>
-              <a:t>为了解释这个问题，除了我们要知道前面说的“最近发展区”理论之外，我们还要结合当下时代发展的背景。</a:t>
-            </a:r>
-          </a:p>
-        </p:txBody>
-      </p:sp>
-    </p:spTree>
-    <p:extLst>
-      <p:ext uri="{BB962C8B-B14F-4D97-AF65-F5344CB8AC3E}">
-        <p14:creationId xmlns:p14="http://schemas.microsoft.com/office/powerpoint/2010/main" val="1688765062"/>
-      </p:ext>
-    </p:extLst>
-  </p:cSld>
-  <p:clrMapOvr>
-    <a:masterClrMapping/>
-  </p:clrMapOvr>
-</p:sld>
-</file>
-
-<file path=ppt/slides/slide9.xml><?xml version="1.0" encoding="utf-8"?>
-<p:sld xmlns:a="http://schemas.openxmlformats.org/drawingml/2006/main" xmlns:r="http://schemas.openxmlformats.org/officeDocument/2006/relationships" xmlns:p="http://schemas.openxmlformats.org/presentationml/2006/main">
-  <p:cSld>
-    <p:spTree>
-      <p:nvGrpSpPr>
-        <p:cNvPr id="1" name="">
-          <a:extLst>
-            <a:ext uri="{FF2B5EF4-FFF2-40B4-BE49-F238E27FC236}">
-              <a16:creationId xmlns:a16="http://schemas.microsoft.com/office/drawing/2014/main" id="{013F7E17-0C8F-B187-F28D-D0D6E2A4BD86}"/>
-            </a:ext>
-          </a:extLst>
-        </p:cNvPr>
-        <p:cNvGrpSpPr/>
-        <p:nvPr/>
-      </p:nvGrpSpPr>
-      <p:grpSpPr>
-        <a:xfrm>
-          <a:off x="0" y="0"/>
-          <a:ext cx="0" cy="0"/>
-          <a:chOff x="0" y="0"/>
-          <a:chExt cx="0" cy="0"/>
-        </a:xfrm>
-      </p:grpSpPr>
-      <p:sp>
-        <p:nvSpPr>
-          <p:cNvPr id="2" name="标题 1">
-            <a:extLst>
-              <a:ext uri="{FF2B5EF4-FFF2-40B4-BE49-F238E27FC236}">
-                <a16:creationId xmlns:a16="http://schemas.microsoft.com/office/drawing/2014/main" id="{8E427952-518A-FB34-9F34-EBB45287A4E8}"/>
-              </a:ext>
-            </a:extLst>
-          </p:cNvPr>
-          <p:cNvSpPr>
-            <a:spLocks noGrp="1"/>
-          </p:cNvSpPr>
-          <p:nvPr>
-            <p:ph type="title"/>
-          </p:nvPr>
-        </p:nvSpPr>
-        <p:spPr/>
-        <p:txBody>
-          <a:bodyPr/>
-          <a:lstStyle/>
-          <a:p>
-            <a:r>
-              <a:rPr lang="zh-CN" altLang="en-US" dirty="0"/>
-              <a:t>教育历史变化及当下教育真相</a:t>
-            </a:r>
-          </a:p>
-        </p:txBody>
-      </p:sp>
-      <p:sp>
-        <p:nvSpPr>
-          <p:cNvPr id="3" name="内容占位符 2">
-            <a:extLst>
-              <a:ext uri="{FF2B5EF4-FFF2-40B4-BE49-F238E27FC236}">
-                <a16:creationId xmlns:a16="http://schemas.microsoft.com/office/drawing/2014/main" id="{E0572A0C-8083-5C10-1057-F2782FA17B0A}"/>
-              </a:ext>
-            </a:extLst>
-          </p:cNvPr>
-          <p:cNvSpPr>
-            <a:spLocks noGrp="1"/>
-          </p:cNvSpPr>
-          <p:nvPr>
-            <p:ph idx="1"/>
-          </p:nvPr>
-        </p:nvSpPr>
-        <p:spPr/>
-        <p:txBody>
-          <a:bodyPr/>
-          <a:lstStyle/>
-          <a:p>
-            <a:pPr marL="0" indent="0">
-              <a:buNone/>
-            </a:pPr>
-            <a:r>
-              <a:rPr lang="zh-CN" altLang="en-US" dirty="0"/>
-              <a:t>**好，我们将时间线，再拉回到改革开放初期。**</a:t>
-            </a:r>
-          </a:p>
-          <a:p>
-            <a:pPr marL="0" indent="0">
-              <a:buNone/>
-            </a:pPr>
-            <a:r>
-              <a:rPr lang="zh-CN" altLang="en-US" dirty="0"/>
-              <a:t>就是我们当时学的是什么的问题。</a:t>
-            </a:r>
-          </a:p>
-          <a:p>
-            <a:pPr marL="0" indent="0">
-              <a:buNone/>
-            </a:pPr>
-            <a:r>
-              <a:rPr lang="zh-CN" altLang="en-US" dirty="0"/>
-              <a:t>我们学的是什么？</a:t>
-            </a:r>
-          </a:p>
-          <a:p>
-            <a:pPr marL="0" indent="0">
-              <a:buNone/>
-            </a:pPr>
-            <a:r>
-              <a:rPr lang="zh-CN" altLang="en-US" dirty="0"/>
-              <a:t>有一句话：学好数理化，走遍开下都不怕。</a:t>
-            </a:r>
-          </a:p>
-          <a:p>
-            <a:pPr marL="0" indent="0">
-              <a:buNone/>
-            </a:pPr>
-            <a:r>
-              <a:rPr lang="zh-CN" altLang="en-US" dirty="0"/>
-              <a:t>没错，就是我们最缺的工业文明的知识。</a:t>
-            </a:r>
-          </a:p>
-          <a:p>
-            <a:pPr marL="0" indent="0">
-              <a:buNone/>
-            </a:pPr>
-            <a:r>
-              <a:rPr lang="zh-CN" altLang="en-US" dirty="0"/>
-              <a:t>我们从那时起，就渴望着知识，实际上是这些工业知识。</a:t>
-            </a:r>
-          </a:p>
-          <a:p>
-            <a:pPr marL="0" indent="0">
-              <a:buNone/>
-            </a:pPr>
-            <a:r>
-              <a:rPr lang="zh-CN" altLang="en-US" dirty="0"/>
-              <a:t>这些知识的特点就是，都是西方资本主义国家现成的，</a:t>
-            </a:r>
-            <a:r>
-              <a:rPr lang="en-US" altLang="zh-CN" dirty="0"/>
-              <a:t>200</a:t>
-            </a:r>
-            <a:r>
-              <a:rPr lang="zh-CN" altLang="en-US" dirty="0"/>
-              <a:t>多年的历史，有的你学了。</a:t>
-            </a:r>
-          </a:p>
-          <a:p>
-            <a:pPr marL="0" indent="0">
-              <a:buNone/>
-            </a:pPr>
-            <a:r>
-              <a:rPr lang="zh-CN" altLang="en-US" dirty="0"/>
-              <a:t>怎么学呢？</a:t>
-            </a:r>
-          </a:p>
-          <a:p>
-            <a:pPr marL="0" indent="0">
-              <a:buNone/>
-            </a:pPr>
-            <a:r>
-              <a:rPr lang="zh-CN" altLang="en-US" dirty="0"/>
-              <a:t>直接抄直接背，最后直接拿来用，对不对？</a:t>
-            </a:r>
-          </a:p>
-          <a:p>
-            <a:pPr marL="0" indent="0">
-              <a:buNone/>
-            </a:pPr>
-            <a:r>
-              <a:rPr lang="zh-CN" altLang="en-US" dirty="0"/>
-              <a:t>非常好使，中国人又聪明，用了</a:t>
-            </a:r>
-            <a:r>
-              <a:rPr lang="en-US" altLang="zh-CN" dirty="0"/>
-              <a:t>20</a:t>
-            </a:r>
-            <a:r>
-              <a:rPr lang="zh-CN" altLang="en-US" dirty="0"/>
-              <a:t>年的时间，基本已经学完了，抄完了。</a:t>
-            </a:r>
-          </a:p>
-          <a:p>
-            <a:pPr marL="0" indent="0">
-              <a:buNone/>
-            </a:pPr>
-            <a:r>
-              <a:rPr lang="zh-CN" altLang="en-US" dirty="0"/>
-              <a:t>我称之为创造“复制型”人才，就是小镇做题家形的人才。</a:t>
-            </a:r>
-          </a:p>
-          <a:p>
-            <a:pPr marL="0" indent="0">
-              <a:buNone/>
-            </a:pPr>
-            <a:r>
-              <a:rPr lang="zh-CN" altLang="en-US" dirty="0"/>
-              <a:t>过去，你学个什么都行，文凭学历或技术随便拿，你就有口饭吃，日子过得还不错。</a:t>
-            </a:r>
-          </a:p>
-          <a:p>
-            <a:pPr marL="0" indent="0">
-              <a:buNone/>
-            </a:pPr>
-            <a:r>
-              <a:rPr lang="zh-CN" altLang="en-US" dirty="0"/>
-              <a:t>因为国家大量的需要你这样的人才。</a:t>
-            </a:r>
-          </a:p>
-        </p:txBody>
-      </p:sp>
-    </p:spTree>
-    <p:extLst>
-      <p:ext uri="{BB962C8B-B14F-4D97-AF65-F5344CB8AC3E}">
-        <p14:creationId xmlns:p14="http://schemas.microsoft.com/office/powerpoint/2010/main" val="3346054117"/>
       </p:ext>
     </p:extLst>
   </p:cSld>

--- a/44_心理学/24_浥尘伙伴社团原创：浥尘智慧家长课堂/智慧家长课堂.pptx
+++ b/44_心理学/24_浥尘伙伴社团原创：浥尘智慧家长课堂/智慧家长课堂.pptx
@@ -167,7 +167,7 @@
                 <a16:creationId xmlns:a16="http://schemas.microsoft.com/office/drawing/2014/main" id="{EA67E988-5919-57BB-C7DE-D3EAD38A3045}"/>
               </a:ext>
               <a:ext uri="{C183D7F6-B498-43B3-948B-1728B52AA6E4}">
-                <adec:decorative xmlns:adec="http://schemas.microsoft.com/office/drawing/2017/decorative" val="1"/>
+                <adec:decorative xmlns:adec="http://schemas.microsoft.com/office/drawing/2017/decorative" xmlns="" val="1"/>
               </a:ext>
             </a:extLst>
           </p:cNvPr>
@@ -3291,7 +3291,7 @@
                 <a16:creationId xmlns:a16="http://schemas.microsoft.com/office/drawing/2014/main" id="{774A975B-A886-5202-0489-6965514A0D14}"/>
               </a:ext>
               <a:ext uri="{C183D7F6-B498-43B3-948B-1728B52AA6E4}">
-                <adec:decorative xmlns:adec="http://schemas.microsoft.com/office/drawing/2017/decorative" val="1"/>
+                <adec:decorative xmlns:adec="http://schemas.microsoft.com/office/drawing/2017/decorative" xmlns="" val="1"/>
               </a:ext>
             </a:extLst>
           </p:cNvPr>
@@ -3720,7 +3720,7 @@
                 <a16:creationId xmlns:a16="http://schemas.microsoft.com/office/drawing/2014/main" id="{0EECA69B-4C2A-7F31-8019-E90DB3BD49CB}"/>
               </a:ext>
               <a:ext uri="{C183D7F6-B498-43B3-948B-1728B52AA6E4}">
-                <adec:decorative xmlns:adec="http://schemas.microsoft.com/office/drawing/2017/decorative" val="1"/>
+                <adec:decorative xmlns:adec="http://schemas.microsoft.com/office/drawing/2017/decorative" xmlns="" val="1"/>
               </a:ext>
             </a:extLst>
           </p:cNvPr>
@@ -3859,7 +3859,7 @@
                 <a16:creationId xmlns:a16="http://schemas.microsoft.com/office/drawing/2014/main" id="{857DEAC1-B3AA-6569-0A44-A191DF2F3C67}"/>
               </a:ext>
               <a:ext uri="{C183D7F6-B498-43B3-948B-1728B52AA6E4}">
-                <adec:decorative xmlns:adec="http://schemas.microsoft.com/office/drawing/2017/decorative" val="1"/>
+                <adec:decorative xmlns:adec="http://schemas.microsoft.com/office/drawing/2017/decorative" xmlns="" val="1"/>
               </a:ext>
             </a:extLst>
           </p:cNvPr>
@@ -6966,7 +6966,15 @@
             </a:pPr>
             <a:r>
               <a:rPr lang="zh-CN" altLang="en-US" dirty="0"/>
-              <a:t>（即便是家庭条件的好坏，也不是必然，宠众望）</a:t>
+              <a:t>（即便是家庭条件的好坏，也不是必然</a:t>
+            </a:r>
+            <a:r>
+              <a:rPr lang="zh-CN" altLang="en-US" dirty="0" smtClean="0"/>
+              <a:t>，庞众望</a:t>
+            </a:r>
+            <a:r>
+              <a:rPr lang="zh-CN" altLang="en-US" dirty="0"/>
+              <a:t>）</a:t>
             </a:r>
           </a:p>
           <a:p>
@@ -7124,8 +7132,27 @@
             </a:pPr>
             <a:r>
               <a:rPr lang="zh-CN" altLang="en-US" dirty="0"/>
-              <a:t>大家都团结在一起，除此之外，还有祖坟、祠堂、家谱等等。</a:t>
-            </a:r>
+              <a:t>大家都团结在一起，除此之外，还有祖坟、祠堂、家谱等等</a:t>
+            </a:r>
+            <a:r>
+              <a:rPr lang="zh-CN" altLang="en-US" dirty="0" smtClean="0"/>
+              <a:t>。</a:t>
+            </a:r>
+            <a:endParaRPr lang="en-US" altLang="zh-CN" dirty="0" smtClean="0"/>
+          </a:p>
+          <a:p>
+            <a:pPr marL="0" indent="0">
+              <a:buNone/>
+            </a:pPr>
+            <a:r>
+              <a:rPr lang="zh-CN" altLang="en-US" dirty="0"/>
+              <a:t>范仲淹创立的家族田地制度以“范氏义庄</a:t>
+            </a:r>
+            <a:r>
+              <a:rPr lang="zh-CN" altLang="en-US" dirty="0" smtClean="0"/>
+              <a:t>”。</a:t>
+            </a:r>
+            <a:endParaRPr lang="zh-CN" altLang="en-US" dirty="0"/>
           </a:p>
           <a:p>
             <a:pPr marL="0" indent="0">
@@ -7280,7 +7307,23 @@
             </a:pPr>
             <a:r>
               <a:rPr lang="zh-CN" altLang="en-US" dirty="0"/>
-              <a:t>大家都生活在一个集体中。什么都是公家的，自已也是公家的人。</a:t>
+              <a:t>大家都生活在一个集体中。什么都是公家的</a:t>
+            </a:r>
+            <a:r>
+              <a:rPr lang="zh-CN" altLang="en-US" dirty="0" smtClean="0"/>
+              <a:t>，</a:t>
+            </a:r>
+            <a:r>
+              <a:rPr lang="zh-CN" altLang="en-US" dirty="0"/>
+              <a:t>自己</a:t>
+            </a:r>
+            <a:r>
+              <a:rPr lang="zh-CN" altLang="en-US" dirty="0" smtClean="0"/>
+              <a:t>也</a:t>
+            </a:r>
+            <a:r>
+              <a:rPr lang="zh-CN" altLang="en-US" dirty="0"/>
+              <a:t>是公家的人。</a:t>
             </a:r>
           </a:p>
           <a:p>
